--- a/decks/SLG-Agentic-AI-Suite-Executive-Overview.pptx
+++ b/decks/SLG-Agentic-AI-Suite-Executive-Overview.pptx
@@ -507,7 +507,9 @@
           <a:p>
             <a:r>
               <a:rPr lang="en-US" dirty="0"/>
-              <a:t/>
+              <a:t>TIMING ~1 min.
+SHOW: the title — Agentic AI for State &amp; Local Government, an executive overview for CIOs, CISOs, and directors of architecture.
+SAY: 'In ~15 minutes I'll show you eight governed AI agents and an optional whole-of-government platform — all AWS-native, all deployable standalone, and built so a CISO can defend them. The theme: the agent isn't the product; the governance that makes it deployable is.'</a:t>
             </a:r>
             <a:endParaRPr lang="en-US" dirty="0"/>
           </a:p>
@@ -595,7 +597,10 @@
           <a:p>
             <a:r>
               <a:rPr lang="en-US" dirty="0"/>
-              <a:t/>
+              <a:t>TIMING ~2.5 min.
+SHOW: the four stat cards — AI is the #1 state-CIO priority, 90% of states piloting GenAI, only 25% funded, ADA Title II deadlines 2027-28.
+SAY: 'AI just became the number-one state-CIO priority for 2026, displacing cybersecurity. But 90% of states are stuck in pilots and only a quarter have funding — and ADA Title II now puts AI-generated output on a compliance clock.'
+LAND IT: 'The gap between a pilot and production isn't the model — it's governance: identity, authorization, audit, retention, accessibility. That gap is exactly what this closes.'</a:t>
             </a:r>
             <a:endParaRPr lang="en-US" dirty="0"/>
           </a:p>
@@ -683,7 +688,10 @@
           <a:p>
             <a:r>
               <a:rPr lang="en-US" dirty="0"/>
-              <a:t/>
+              <a:t>TIMING ~3 min.
+SHOW: the 4x2 portfolio grid of the eight agents.
+SAY: 'Eight agents across the highest-value workflows — resident services, forms, permitting, benefits, public records, procurement, IT service desk, and public safety/health. Pick the one or two that match this customer's pain and go deep there in the per-agent deck.'
+EMPHASIZE the footer: 'Each agent prepares; a human owns every legally consequential decision — issue a permit, adjudicate eligibility, release records, award a contract — and that's withheld in code, not just policy. A passing test proves it.'</a:t>
             </a:r>
             <a:endParaRPr lang="en-US" dirty="0"/>
           </a:p>
@@ -771,7 +779,10 @@
           <a:p>
             <a:r>
               <a:rPr lang="en-US" dirty="0"/>
-              <a:t/>
+              <a:t>TIMING ~3 min.
+SHOW: the four platform pillars on the navy slide.
+SAY: 'Here's why this is different. The deny-by-default gateway means an agent can never exceed the employee it acts for. The human gate is framework-enforced, not documented. It's regulated by design — WORM retention, KMS, data-class isolation, mapped to CJIS, IRS 1075, HIPAA, FERPA, DPPA, ADA, GovRAMP and NIST AI RMF. And it deploys on AWS, commercial and GovCloud.'
+SOUNDBITE: 'A control improvement here — the masker, the audit, grounding — benefits all eight agents at once. Controls compound instead of multiplying audits.'</a:t>
             </a:r>
             <a:endParaRPr lang="en-US" dirty="0"/>
           </a:p>
@@ -859,7 +870,10 @@
           <a:p>
             <a:r>
               <a:rPr lang="en-US" dirty="0"/>
-              <a:t/>
+              <a:t>TIMING ~2.5 min.
+SHOW: the four Whole-of-Government cards — canonical data, consent &amp; identity, compliance event bus, life-event orchestrator.
+SAY: 'The strategic layer organizes government around life events — moving, a new child, starting a business, losing a job, a disaster, a death in the family — not the org chart. A durable saga coordinates the agencies; if a downstream step fails, completed steps roll back, so nobody is left half-enrolled. Five life-events run today.'
+FRAME: 'This is additive — agents deploy standalone first; the platform is the long game that turns dozens of demos into digital government.'</a:t>
             </a:r>
             <a:endParaRPr lang="en-US" dirty="0"/>
           </a:p>
@@ -947,7 +961,10 @@
           <a:p>
             <a:r>
               <a:rPr lang="en-US" dirty="0"/>
-              <a:t/>
+              <a:t>TIMING ~2 min + close.
+SHOW: the four engagement cards.
+SAY: 'This is a credible starting point, not a science project: it runs today with no API key and 179 passing governance tests; it ships as CloudFormation and Terraform for commercial and GovCloud; and it comes with field-ready collateral — per-agent decks, ROI, compliance mappings, runbooks, and a seller/SA field guide.'
+THE ASK: 'Let's pick one agency and one workflow, stand it up in your account, and put a real, cross-agency audit trail in front of your CISO. Everything you saw already runs — the pilot just points it at your systems.'</a:t>
             </a:r>
             <a:endParaRPr lang="en-US" dirty="0"/>
           </a:p>
@@ -4391,7 +4408,7 @@
                   <a:srgbClr val="CADCFC"/>
                 </a:solidFill>
               </a:rPr>
-              <a:t>64 automated tests pass with no API key; deterministic demo before any AWS spend.</a:t>
+              <a:t>179 automated tests pass with no API key; deterministic demo before any AWS spend.</a:t>
             </a:r>
             <a:endParaRPr lang="en-US" sz="1300" dirty="0"/>
           </a:p>

--- a/decks/SLG-Agentic-AI-Suite-Executive-Overview.pptx
+++ b/decks/SLG-Agentic-AI-Suite-Executive-Overview.pptx
@@ -15,8 +15,8 @@
   <p:notesMasterIdLst>
     <p:notesMasterId r:id="rId8"/>
   </p:notesMasterIdLst>
-  <p:sldSz cx="12192000" cy="6858000"/>
-  <p:notesSz cx="6858000" cy="12192000"/>
+  <p:sldSz cx="12191695" cy="6858000"/>
+  <p:notesSz cx="6858000" cy="12191695"/>
   <p:defaultTextStyle>
     <a:lvl1pPr marL="0" algn="l" defTabSz="914400" rtl="0" eaLnBrk="1" latinLnBrk="0" hangingPunct="1">
       <a:defRPr sz="1800" kern="1200">
@@ -507,9 +507,7 @@
           <a:p>
             <a:r>
               <a:rPr lang="en-US" dirty="0"/>
-              <a:t>TIMING ~1 min.
-SHOW: the title — Agentic AI for State &amp; Local Government, an executive overview for CIOs, CISOs, and directors of architecture.
-SAY: 'In ~15 minutes I'll show you eight governed AI agents and an optional whole-of-government platform — all AWS-native, all deployable standalone, and built so a CISO can defend them. The theme: the agent isn't the product; the governance that makes it deployable is.'</a:t>
+              <a:t>[~30 sec] This is your opener for an executive briefing or the leave-behind that frames the whole library. Use it when you don't yet know which agent the room cares about. Establish the thesis: governed, deployable, regulated-by-design AI on AWS.</a:t>
             </a:r>
             <a:endParaRPr lang="en-US" dirty="0"/>
           </a:p>
@@ -597,10 +595,7 @@
           <a:p>
             <a:r>
               <a:rPr lang="en-US" dirty="0"/>
-              <a:t>TIMING ~2.5 min.
-SHOW: the four stat cards — AI is the #1 state-CIO priority, 90% of states piloting GenAI, only 25% funded, ADA Title II deadlines 2027-28.
-SAY: 'AI just became the number-one state-CIO priority for 2026, displacing cybersecurity. But 90% of states are stuck in pilots and only a quarter have funding — and ADA Title II now puts AI-generated output on a compliance clock.'
-LAND IT: 'The gap between a pilot and production isn't the model — it's governance: identity, authorization, audit, retention, accessibility. That gap is exactly what this closes.'</a:t>
+              <a:t>[~60 sec] Anchor on NASCIO: AI is the #1 state-CIO priority for 2026. Then the portfolio: eight agents plus a platform, all on AWS, with Bedrock at FedRAMP High and DoD IL-4/5 in GovCloud — that last line preempts the security objection before it's raised. The narrative: the demand is settled; what's missing is governed, fundable production, and that's what this library is.</a:t>
             </a:r>
             <a:endParaRPr lang="en-US" dirty="0"/>
           </a:p>
@@ -688,10 +683,7 @@
           <a:p>
             <a:r>
               <a:rPr lang="en-US" dirty="0"/>
-              <a:t>TIMING ~3 min.
-SHOW: the 4x2 portfolio grid of the eight agents.
-SAY: 'Eight agents across the highest-value workflows — resident services, forms, permitting, benefits, public records, procurement, IT service desk, and public safety/health. Pick the one or two that match this customer's pain and go deep there in the per-agent deck.'
-EMPHASIZE the footer: 'Each agent prepares; a human owns every legally consequential decision — issue a permit, adjudicate eligibility, release records, award a contract — and that's withheld in code, not just policy. A passing test proves it.'</a:t>
+              <a:t>[~55 sec] Tailor to the room: CIO hears the pilot trap and the legacy-budget squeeze; CISO hears 'security and audit are built in, not bolted on'; architect hears 'build the pattern once, reuse eight times.' The ADA deadline is a real, dated forcing function — April 2027 for governments over 50k — so accessibility isn't optional and we test for it.</a:t>
             </a:r>
             <a:endParaRPr lang="en-US" dirty="0"/>
           </a:p>
@@ -779,10 +771,7 @@
           <a:p>
             <a:r>
               <a:rPr lang="en-US" dirty="0"/>
-              <a:t>TIMING ~3 min.
-SHOW: the four platform pillars on the navy slide.
-SAY: 'Here's why this is different. The deny-by-default gateway means an agent can never exceed the employee it acts for. The human gate is framework-enforced, not documented. It's regulated by design — WORM retention, KMS, data-class isolation, mapped to CJIS, IRS 1075, HIPAA, FERPA, DPPA, ADA, GovRAMP and NIST AI RMF. And it deploys on AWS, commercial and GovCloud.'
-SOUNDBITE: 'A control improvement here — the masker, the audit, grounding — benefits all eight agents at once. Controls compound instead of multiplying audits.'</a:t>
+              <a:t>[~70 sec] Show the portfolio as one repeated pattern across three tiers — resident-facing, casework, operations — with a human gate everywhere and one platform underneath. The proof point for a skeptical engineer: each agent withholds its consequential action (issue, adjudicate, release, award) and that's enforced by tests, not promised in a slide.</a:t>
             </a:r>
             <a:endParaRPr lang="en-US" dirty="0"/>
           </a:p>
@@ -870,10 +859,7 @@
           <a:p>
             <a:r>
               <a:rPr lang="en-US" dirty="0"/>
-              <a:t>TIMING ~2.5 min.
-SHOW: the four Whole-of-Government cards — canonical data, consent &amp; identity, compliance event bus, life-event orchestrator.
-SAY: 'The strategic layer organizes government around life events — moving, a new child, starting a business, losing a job, a disaster, a death in the family — not the org chart. A durable saga coordinates the agencies; if a downstream step fails, completed steps roll back, so nobody is left half-enrolled. Five life-events run today.'
-FRAME: 'This is additive — agents deploy standalone first; the platform is the long game that turns dozens of demos into digital government.'</a:t>
+              <a:t>[~75 sec] One governed backbone shared by all agents — that's the cost and security argument in a single diagram. Reuse the JWT/least-privilege/WORM walk-through. Stress full IaC parity: CloudFormation and Terraform, commercial and GovCloud. For the CISO, this is the slide that says 'a solution architect can deploy this, and it'll pass your review.'</a:t>
             </a:r>
             <a:endParaRPr lang="en-US" dirty="0"/>
           </a:p>
@@ -961,10 +947,7 @@
           <a:p>
             <a:r>
               <a:rPr lang="en-US" dirty="0"/>
-              <a:t>TIMING ~2 min + close.
-SHOW: the four engagement cards.
-SAY: 'This is a credible starting point, not a science project: it runs today with no API key and 179 passing governance tests; it ships as CloudFormation and Terraform for commercial and GovCloud; and it comes with field-ready collateral — per-agent decks, ROI, compliance mappings, runbooks, and a seller/SA field guide.'
-THE ASK: 'Let's pick one agency and one workflow, stand it up in your account, and put a real, cross-agency audit trail in front of your CISO. Everything you saw already runs — the pilot just points it at your systems.'</a:t>
+              <a:t>[~60 sec] Close on deployability: every agent ships with code, infrastructure-as-code, containers, runbooks and its own customer deck; full CFN/Terraform parity; WCAG 2.1 AA tested with control mappings included. Then the sales coaching line: lead with the agent that fits the room, sell the platform underneath. The executive takeaway: build governance once, inherit it forever — that's a fundable program, not another pilot.</a:t>
             </a:r>
             <a:endParaRPr lang="en-US" dirty="0"/>
           </a:p>
@@ -1319,7 +1302,7 @@
     <p:bg>
       <p:bgPr>
         <a:solidFill>
-          <a:srgbClr val="1E2761"/>
+          <a:srgbClr val="232F3E"/>
         </a:solidFill>
       </p:bgPr>
     </p:bg>
@@ -1345,14 +1328,16 @@
         </p:nvSpPr>
         <p:spPr>
           <a:xfrm>
-            <a:off x="9144000" y="-1645920"/>
-            <a:ext cx="4937760" cy="4937760"/>
-          </a:xfrm>
-          <a:prstGeom prst="ellipse">
-            <a:avLst/>
+            <a:off x="822960" y="1463040"/>
+            <a:ext cx="859536" cy="457200"/>
+          </a:xfrm>
+          <a:prstGeom prst="roundRect">
+            <a:avLst>
+              <a:gd name="adj" fmla="val 8000"/>
+            </a:avLst>
           </a:prstGeom>
           <a:solidFill>
-            <a:srgbClr val="2A376E"/>
+            <a:srgbClr val="FF9900"/>
           </a:solidFill>
           <a:ln/>
         </p:spPr>
@@ -1365,8 +1350,8 @@
         </p:nvSpPr>
         <p:spPr>
           <a:xfrm>
-            <a:off x="731520" y="1280160"/>
-            <a:ext cx="10058400" cy="365760"/>
+            <a:off x="822960" y="1463040"/>
+            <a:ext cx="859536" cy="457200"/>
           </a:xfrm>
           <a:prstGeom prst="rect">
             <a:avLst/>
@@ -1378,18 +1363,21 @@
           <a:bodyPr wrap="square" rtlCol="0" anchor="ctr"/>
           <a:lstStyle/>
           <a:p>
-            <a:pPr indent="0" marL="0">
-              <a:buNone/>
-            </a:pPr>
-            <a:r>
-              <a:rPr lang="en-US" sz="1400" b="1" spc="200" kern="0" dirty="0">
-                <a:solidFill>
-                  <a:srgbClr val="CADCFC"/>
-                </a:solidFill>
-              </a:rPr>
-              <a:t>STATE &amp; LOCAL GOVERNMENT  ·  BUILT ON AWS</a:t>
-            </a:r>
-            <a:endParaRPr lang="en-US" sz="1400" dirty="0"/>
+            <a:pPr algn="ctr" indent="0" marL="0">
+              <a:buNone/>
+            </a:pPr>
+            <a:r>
+              <a:rPr lang="en-US" sz="1900" b="1" dirty="0">
+                <a:solidFill>
+                  <a:srgbClr val="232F3E"/>
+                </a:solidFill>
+                <a:latin typeface="Trebuchet MS" pitchFamily="34" charset="0"/>
+                <a:ea typeface="Trebuchet MS" pitchFamily="34" charset="-122"/>
+                <a:cs typeface="Trebuchet MS" pitchFamily="34" charset="-120"/>
+              </a:rPr>
+              <a:t>AWS</a:t>
+            </a:r>
+            <a:endParaRPr lang="en-US" sz="1900" dirty="0"/>
           </a:p>
         </p:txBody>
       </p:sp>
@@ -1401,8 +1389,8 @@
         </p:nvSpPr>
         <p:spPr>
           <a:xfrm>
-            <a:off x="731520" y="1828800"/>
-            <a:ext cx="10607040" cy="1097280"/>
+            <a:off x="1828800" y="1463040"/>
+            <a:ext cx="8229600" cy="457200"/>
           </a:xfrm>
           <a:prstGeom prst="rect">
             <a:avLst/>
@@ -1418,30 +1406,72 @@
               <a:buNone/>
             </a:pPr>
             <a:r>
-              <a:rPr lang="en-US" sz="4400" b="1" dirty="0">
+              <a:rPr lang="en-US" sz="1300" b="1" spc="250" kern="0" dirty="0">
+                <a:solidFill>
+                  <a:srgbClr val="FF9900"/>
+                </a:solidFill>
+                <a:latin typeface="Calibri" pitchFamily="34" charset="0"/>
+                <a:ea typeface="Calibri" pitchFamily="34" charset="-122"/>
+                <a:cs typeface="Calibri" pitchFamily="34" charset="-120"/>
+              </a:rPr>
+              <a:t>SLG AGENTIC AI REFERENCE LIBRARY</a:t>
+            </a:r>
+            <a:endParaRPr lang="en-US" sz="1300" dirty="0"/>
+          </a:p>
+        </p:txBody>
+      </p:sp>
+      <p:sp>
+        <p:nvSpPr>
+          <p:cNvPr id="5" name="Text 3"/>
+          <p:cNvSpPr/>
+          <p:nvPr/>
+        </p:nvSpPr>
+        <p:spPr>
+          <a:xfrm>
+            <a:off x="822960" y="2148840"/>
+            <a:ext cx="10515600" cy="1737360"/>
+          </a:xfrm>
+          <a:prstGeom prst="rect">
+            <a:avLst/>
+          </a:prstGeom>
+          <a:noFill/>
+          <a:ln/>
+        </p:spPr>
+        <p:txBody>
+          <a:bodyPr wrap="square" rtlCol="0" anchor="t"/>
+          <a:lstStyle/>
+          <a:p>
+            <a:pPr indent="0" marL="0">
+              <a:lnSpc>
+                <a:spcPct val="100000"/>
+              </a:lnSpc>
+              <a:buNone/>
+            </a:pPr>
+            <a:r>
+              <a:rPr lang="en-US" sz="4000" b="1" dirty="0">
                 <a:solidFill>
                   <a:srgbClr val="FFFFFF"/>
                 </a:solidFill>
-                <a:latin typeface="Cambria" pitchFamily="34" charset="0"/>
-                <a:ea typeface="Cambria" pitchFamily="34" charset="-122"/>
-                <a:cs typeface="Cambria" pitchFamily="34" charset="-120"/>
+                <a:latin typeface="Trebuchet MS" pitchFamily="34" charset="0"/>
+                <a:ea typeface="Trebuchet MS" pitchFamily="34" charset="-122"/>
+                <a:cs typeface="Trebuchet MS" pitchFamily="34" charset="-120"/>
               </a:rPr>
               <a:t>Agentic AI for State &amp; Local Government</a:t>
             </a:r>
-            <a:endParaRPr lang="en-US" sz="4400" dirty="0"/>
-          </a:p>
-        </p:txBody>
-      </p:sp>
-      <p:sp>
-        <p:nvSpPr>
-          <p:cNvPr id="5" name="Text 3"/>
-          <p:cNvSpPr/>
-          <p:nvPr/>
-        </p:nvSpPr>
-        <p:spPr>
-          <a:xfrm>
-            <a:off x="731520" y="3200400"/>
-            <a:ext cx="9875520" cy="822960"/>
+            <a:endParaRPr lang="en-US" sz="4000" dirty="0"/>
+          </a:p>
+        </p:txBody>
+      </p:sp>
+      <p:sp>
+        <p:nvSpPr>
+          <p:cNvPr id="6" name="Text 4"/>
+          <p:cNvSpPr/>
+          <p:nvPr/>
+        </p:nvSpPr>
+        <p:spPr>
+          <a:xfrm>
+            <a:off x="841248" y="3977640"/>
+            <a:ext cx="10058400" cy="548640"/>
           </a:xfrm>
           <a:prstGeom prst="rect">
             <a:avLst/>
@@ -1457,12 +1487,15 @@
               <a:buNone/>
             </a:pPr>
             <a:r>
-              <a:rPr lang="en-US" sz="1800" dirty="0">
-                <a:solidFill>
-                  <a:srgbClr val="CADCFC"/>
-                </a:solidFill>
-              </a:rPr>
-              <a:t>Eight governed agents and a whole-of-government platform — deployable, auditable, and compliant on AWS.</a:t>
+              <a:rPr lang="en-US" sz="1800" i="1" dirty="0">
+                <a:solidFill>
+                  <a:srgbClr val="8FA1B3"/>
+                </a:solidFill>
+                <a:latin typeface="Calibri" pitchFamily="34" charset="0"/>
+                <a:ea typeface="Calibri" pitchFamily="34" charset="-122"/>
+                <a:cs typeface="Calibri" pitchFamily="34" charset="-120"/>
+              </a:rPr>
+              <a:t>Eight governed agents and one platform — a reference library for regulated public-sector AI, on AWS</a:t>
             </a:r>
             <a:endParaRPr lang="en-US" sz="1800" dirty="0"/>
           </a:p>
@@ -1470,14 +1503,34 @@
       </p:sp>
       <p:sp>
         <p:nvSpPr>
-          <p:cNvPr id="6" name="Text 4"/>
-          <p:cNvSpPr/>
-          <p:nvPr/>
-        </p:nvSpPr>
-        <p:spPr>
-          <a:xfrm>
-            <a:off x="731520" y="5212080"/>
-            <a:ext cx="10058400" cy="457200"/>
+          <p:cNvPr id="7" name="Shape 5"/>
+          <p:cNvSpPr/>
+          <p:nvPr/>
+        </p:nvSpPr>
+        <p:spPr>
+          <a:xfrm>
+            <a:off x="822960" y="5806440"/>
+            <a:ext cx="292608" cy="54864"/>
+          </a:xfrm>
+          <a:prstGeom prst="rect">
+            <a:avLst/>
+          </a:prstGeom>
+          <a:solidFill>
+            <a:srgbClr val="FF9900"/>
+          </a:solidFill>
+          <a:ln/>
+        </p:spPr>
+      </p:sp>
+      <p:sp>
+        <p:nvSpPr>
+          <p:cNvPr id="8" name="Text 6"/>
+          <p:cNvSpPr/>
+          <p:nvPr/>
+        </p:nvSpPr>
+        <p:spPr>
+          <a:xfrm>
+            <a:off x="822960" y="5943600"/>
+            <a:ext cx="10515600" cy="640080"/>
           </a:xfrm>
           <a:prstGeom prst="rect">
             <a:avLst/>
@@ -1490,6 +1543,9 @@
           <a:lstStyle/>
           <a:p>
             <a:pPr indent="0" marL="0">
+              <a:lnSpc>
+                <a:spcPct val="110000"/>
+              </a:lnSpc>
               <a:buNone/>
             </a:pPr>
             <a:r>
@@ -1497,19 +1553,37 @@
                 <a:solidFill>
                   <a:srgbClr val="FFFFFF"/>
                 </a:solidFill>
-              </a:rPr>
-              <a:t>Executive overview  </a:t>
-            </a:r>
-            <a:pPr indent="0" marL="0">
-              <a:buNone/>
-            </a:pPr>
-            <a:r>
-              <a:rPr lang="en-US" sz="1500" i="1" dirty="0">
-                <a:solidFill>
-                  <a:srgbClr val="CADCFC"/>
-                </a:solidFill>
-              </a:rPr>
-              <a:t>for CIOs, CISOs, and directors of architecture</a:t>
+                <a:latin typeface="Calibri" pitchFamily="34" charset="0"/>
+                <a:ea typeface="Calibri" pitchFamily="34" charset="-122"/>
+                <a:cs typeface="Calibri" pitchFamily="34" charset="-120"/>
+              </a:rPr>
+              <a:t>David Ryder</a:t>
+            </a:r>
+            <a:pPr indent="0" marL="0">
+              <a:lnSpc>
+                <a:spcPct val="110000"/>
+              </a:lnSpc>
+              <a:buNone/>
+            </a:pPr>
+            <a:endParaRPr lang="en-US" sz="1500" dirty="0"/>
+          </a:p>
+          <a:p>
+            <a:pPr indent="0" marL="0">
+              <a:lnSpc>
+                <a:spcPct val="110000"/>
+              </a:lnSpc>
+              <a:buNone/>
+            </a:pPr>
+            <a:r>
+              <a:rPr lang="en-US" sz="1200" dirty="0">
+                <a:solidFill>
+                  <a:srgbClr val="8FA1B3"/>
+                </a:solidFill>
+                <a:latin typeface="Calibri" pitchFamily="34" charset="0"/>
+                <a:ea typeface="Calibri" pitchFamily="34" charset="-122"/>
+                <a:cs typeface="Calibri" pitchFamily="34" charset="-120"/>
+              </a:rPr>
+              <a:t>AI Strategy &amp; Architecture Leader   ·   github.com/virtualryder/slg-ai-agents   ·   June 2026</a:t>
             </a:r>
             <a:endParaRPr lang="en-US" sz="1500" dirty="0"/>
           </a:p>
@@ -1529,7 +1603,7 @@
     <p:bg>
       <p:bgPr>
         <a:solidFill>
-          <a:srgbClr val="FFFFFF"/>
+          <a:srgbClr val="232F3E"/>
         </a:solidFill>
       </p:bgPr>
     </p:bg>
@@ -1555,8 +1629,8 @@
         </p:nvSpPr>
         <p:spPr>
           <a:xfrm>
-            <a:off x="640080" y="457200"/>
-            <a:ext cx="10058400" cy="274320"/>
+            <a:off x="822960" y="640080"/>
+            <a:ext cx="10515600" cy="1051560"/>
           </a:xfrm>
           <a:prstGeom prst="rect">
             <a:avLst/>
@@ -1572,14 +1646,17 @@
               <a:buNone/>
             </a:pPr>
             <a:r>
-              <a:rPr lang="en-US" sz="1300" b="1" spc="200" kern="0" dirty="0">
-                <a:solidFill>
-                  <a:srgbClr val="2E8BC0"/>
-                </a:solidFill>
-              </a:rPr>
-              <a:t>THE MOMENT</a:t>
-            </a:r>
-            <a:endParaRPr lang="en-US" sz="1300" dirty="0"/>
+              <a:rPr lang="en-US" sz="3800" b="1" dirty="0">
+                <a:solidFill>
+                  <a:srgbClr val="FF9900"/>
+                </a:solidFill>
+                <a:latin typeface="Trebuchet MS" pitchFamily="34" charset="0"/>
+                <a:ea typeface="Trebuchet MS" pitchFamily="34" charset="-122"/>
+                <a:cs typeface="Trebuchet MS" pitchFamily="34" charset="-120"/>
+              </a:rPr>
+              <a:t>FROM SCATTERED PILOTS TO A GOVERNED AI PLATFORM</a:t>
+            </a:r>
+            <a:endParaRPr lang="en-US" sz="3800" dirty="0"/>
           </a:p>
         </p:txBody>
       </p:sp>
@@ -1591,8 +1668,8 @@
         </p:nvSpPr>
         <p:spPr>
           <a:xfrm>
-            <a:off x="640080" y="731520"/>
-            <a:ext cx="10972800" cy="731520"/>
+            <a:off x="841248" y="1755648"/>
+            <a:ext cx="10515600" cy="457200"/>
           </a:xfrm>
           <a:prstGeom prst="rect">
             <a:avLst/>
@@ -1608,59 +1685,119 @@
               <a:buNone/>
             </a:pPr>
             <a:r>
-              <a:rPr lang="en-US" sz="2900" b="1" dirty="0">
-                <a:solidFill>
-                  <a:srgbClr val="1B2440"/>
-                </a:solidFill>
-                <a:latin typeface="Cambria" pitchFamily="34" charset="0"/>
-                <a:ea typeface="Cambria" pitchFamily="34" charset="-122"/>
-                <a:cs typeface="Cambria" pitchFamily="34" charset="-120"/>
-              </a:rPr>
-              <a:t>AI is now the #1 state CIO priority — but most work is still pilots</a:t>
-            </a:r>
-            <a:endParaRPr lang="en-US" sz="2900" dirty="0"/>
-          </a:p>
-        </p:txBody>
-      </p:sp>
-      <p:sp>
-        <p:nvSpPr>
-          <p:cNvPr id="4" name="Shape 2"/>
-          <p:cNvSpPr/>
-          <p:nvPr/>
-        </p:nvSpPr>
-        <p:spPr>
-          <a:xfrm>
-            <a:off x="640080" y="1828800"/>
-            <a:ext cx="2606040" cy="2194560"/>
+              <a:rPr lang="en-US" sz="1700" b="1" dirty="0">
+                <a:solidFill>
+                  <a:srgbClr val="FFFFFF"/>
+                </a:solidFill>
+                <a:latin typeface="Calibri" pitchFamily="34" charset="0"/>
+                <a:ea typeface="Calibri" pitchFamily="34" charset="-122"/>
+                <a:cs typeface="Calibri" pitchFamily="34" charset="-120"/>
+              </a:rPr>
+              <a:t>Agentic AI for State &amp; Local Government</a:t>
+            </a:r>
+            <a:endParaRPr lang="en-US" sz="1700" dirty="0"/>
+          </a:p>
+        </p:txBody>
+      </p:sp>
+      <p:sp>
+        <p:nvSpPr>
+          <p:cNvPr id="4" name="Text 2"/>
+          <p:cNvSpPr/>
+          <p:nvPr/>
+        </p:nvSpPr>
+        <p:spPr>
+          <a:xfrm>
+            <a:off x="841248" y="2286000"/>
+            <a:ext cx="10424160" cy="914400"/>
+          </a:xfrm>
+          <a:prstGeom prst="rect">
+            <a:avLst/>
+          </a:prstGeom>
+          <a:noFill/>
+          <a:ln/>
+        </p:spPr>
+        <p:txBody>
+          <a:bodyPr wrap="square" rtlCol="0" anchor="t"/>
+          <a:lstStyle/>
+          <a:p>
+            <a:pPr indent="0" marL="0">
+              <a:lnSpc>
+                <a:spcPct val="115000"/>
+              </a:lnSpc>
+              <a:buNone/>
+            </a:pPr>
+            <a:r>
+              <a:rPr lang="en-US" sz="1550" dirty="0">
+                <a:solidFill>
+                  <a:srgbClr val="C9D3DC"/>
+                </a:solidFill>
+                <a:latin typeface="Calibri" pitchFamily="34" charset="0"/>
+                <a:ea typeface="Calibri" pitchFamily="34" charset="-122"/>
+                <a:cs typeface="Calibri" pitchFamily="34" charset="-120"/>
+              </a:rPr>
+              <a:t>A complete, deployable reference library: eight production-shaped agents across the resident journey, all built on one governed platform where every consequential action stays human, every answer is cited, and every step is logged — designed for a regulated environment from day one.</a:t>
+            </a:r>
+            <a:endParaRPr lang="en-US" sz="1550" dirty="0"/>
+          </a:p>
+        </p:txBody>
+      </p:sp>
+      <p:sp>
+        <p:nvSpPr>
+          <p:cNvPr id="5" name="Shape 3"/>
+          <p:cNvSpPr/>
+          <p:nvPr/>
+        </p:nvSpPr>
+        <p:spPr>
+          <a:xfrm>
+            <a:off x="822960" y="3611880"/>
+            <a:ext cx="3291840" cy="1874520"/>
           </a:xfrm>
           <a:prstGeom prst="roundRect">
             <a:avLst>
-              <a:gd name="adj" fmla="val 2917"/>
+              <a:gd name="adj" fmla="val 3902"/>
             </a:avLst>
           </a:prstGeom>
           <a:solidFill>
-            <a:srgbClr val="1E2761"/>
+            <a:srgbClr val="2C3B4E"/>
           </a:solidFill>
-          <a:ln/>
-          <a:effectLst>
-            <a:outerShdw sx="100000" sy="100000" kx="0" ky="0" algn="bl" rotWithShape="0" blurRad="88900" dist="38100" dir="5400000">
-              <a:srgbClr val="000000">
-                <a:alpha val="16000"/>
-              </a:srgbClr>
-            </a:outerShdw>
-          </a:effectLst>
-        </p:spPr>
-      </p:sp>
-      <p:sp>
-        <p:nvSpPr>
-          <p:cNvPr id="5" name="Text 3"/>
-          <p:cNvSpPr/>
-          <p:nvPr/>
-        </p:nvSpPr>
-        <p:spPr>
-          <a:xfrm>
-            <a:off x="640080" y="2148840"/>
-            <a:ext cx="2606040" cy="822960"/>
+          <a:ln w="12700">
+            <a:solidFill>
+              <a:srgbClr val="37475A"/>
+            </a:solidFill>
+            <a:prstDash val="solid"/>
+          </a:ln>
+        </p:spPr>
+      </p:sp>
+      <p:sp>
+        <p:nvSpPr>
+          <p:cNvPr id="6" name="Shape 4"/>
+          <p:cNvSpPr/>
+          <p:nvPr/>
+        </p:nvSpPr>
+        <p:spPr>
+          <a:xfrm>
+            <a:off x="822960" y="3611880"/>
+            <a:ext cx="109728" cy="1874520"/>
+          </a:xfrm>
+          <a:prstGeom prst="rect">
+            <a:avLst/>
+          </a:prstGeom>
+          <a:solidFill>
+            <a:srgbClr val="FF9900"/>
+          </a:solidFill>
+          <a:ln/>
+        </p:spPr>
+      </p:sp>
+      <p:sp>
+        <p:nvSpPr>
+          <p:cNvPr id="7" name="Text 5"/>
+          <p:cNvSpPr/>
+          <p:nvPr/>
+        </p:nvSpPr>
+        <p:spPr>
+          <a:xfrm>
+            <a:off x="1051560" y="3813048"/>
+            <a:ext cx="2880360" cy="868680"/>
           </a:xfrm>
           <a:prstGeom prst="rect">
             <a:avLst/>
@@ -1672,99 +1809,123 @@
           <a:bodyPr wrap="square" rtlCol="0" anchor="ctr"/>
           <a:lstStyle/>
           <a:p>
-            <a:pPr algn="ctr" indent="0" marL="0">
-              <a:buNone/>
-            </a:pPr>
-            <a:r>
-              <a:rPr lang="en-US" sz="3400" b="1" dirty="0">
+            <a:pPr indent="0" marL="0">
+              <a:buNone/>
+            </a:pPr>
+            <a:r>
+              <a:rPr lang="en-US" sz="3600" b="1" dirty="0">
                 <a:solidFill>
                   <a:srgbClr val="FFFFFF"/>
                 </a:solidFill>
-                <a:latin typeface="Cambria" pitchFamily="34" charset="0"/>
-                <a:ea typeface="Cambria" pitchFamily="34" charset="-122"/>
-                <a:cs typeface="Cambria" pitchFamily="34" charset="-120"/>
+                <a:latin typeface="Trebuchet MS" pitchFamily="34" charset="0"/>
+                <a:ea typeface="Trebuchet MS" pitchFamily="34" charset="-122"/>
+                <a:cs typeface="Trebuchet MS" pitchFamily="34" charset="-120"/>
               </a:rPr>
               <a:t>#1</a:t>
             </a:r>
-            <a:endParaRPr lang="en-US" sz="3400" dirty="0"/>
-          </a:p>
-        </p:txBody>
-      </p:sp>
-      <p:sp>
-        <p:nvSpPr>
-          <p:cNvPr id="6" name="Text 4"/>
-          <p:cNvSpPr/>
-          <p:nvPr/>
-        </p:nvSpPr>
-        <p:spPr>
-          <a:xfrm>
-            <a:off x="822960" y="3017520"/>
-            <a:ext cx="2240280" cy="914400"/>
-          </a:xfrm>
-          <a:prstGeom prst="rect">
-            <a:avLst/>
-          </a:prstGeom>
-          <a:noFill/>
-          <a:ln/>
-        </p:spPr>
-        <p:txBody>
-          <a:bodyPr wrap="square" rtlCol="0" anchor="ctr"/>
-          <a:lstStyle/>
-          <a:p>
-            <a:pPr algn="ctr" indent="0" marL="0">
-              <a:buNone/>
-            </a:pPr>
-            <a:r>
-              <a:rPr lang="en-US" sz="1300" dirty="0">
-                <a:solidFill>
-                  <a:srgbClr val="CADCFC"/>
-                </a:solidFill>
-              </a:rPr>
-              <a:t>state CIO priority for 2026 (AI, displacing cyber)</a:t>
-            </a:r>
-            <a:endParaRPr lang="en-US" sz="1300" dirty="0"/>
-          </a:p>
-        </p:txBody>
-      </p:sp>
-      <p:sp>
-        <p:nvSpPr>
-          <p:cNvPr id="7" name="Shape 5"/>
-          <p:cNvSpPr/>
-          <p:nvPr/>
-        </p:nvSpPr>
-        <p:spPr>
-          <a:xfrm>
-            <a:off x="3429000" y="1828800"/>
-            <a:ext cx="2606040" cy="2194560"/>
+            <a:endParaRPr lang="en-US" sz="3600" dirty="0"/>
+          </a:p>
+        </p:txBody>
+      </p:sp>
+      <p:sp>
+        <p:nvSpPr>
+          <p:cNvPr id="8" name="Text 6"/>
+          <p:cNvSpPr/>
+          <p:nvPr/>
+        </p:nvSpPr>
+        <p:spPr>
+          <a:xfrm>
+            <a:off x="1078992" y="4690872"/>
+            <a:ext cx="2834640" cy="713232"/>
+          </a:xfrm>
+          <a:prstGeom prst="rect">
+            <a:avLst/>
+          </a:prstGeom>
+          <a:noFill/>
+          <a:ln/>
+        </p:spPr>
+        <p:txBody>
+          <a:bodyPr wrap="square" rtlCol="0" anchor="t"/>
+          <a:lstStyle/>
+          <a:p>
+            <a:pPr indent="0" marL="0">
+              <a:lnSpc>
+                <a:spcPct val="105000"/>
+              </a:lnSpc>
+              <a:buNone/>
+            </a:pPr>
+            <a:r>
+              <a:rPr lang="en-US" sz="1200" dirty="0">
+                <a:solidFill>
+                  <a:srgbClr val="8FA1B3"/>
+                </a:solidFill>
+                <a:latin typeface="Calibri" pitchFamily="34" charset="0"/>
+                <a:ea typeface="Calibri" pitchFamily="34" charset="-122"/>
+                <a:cs typeface="Calibri" pitchFamily="34" charset="-120"/>
+              </a:rPr>
+              <a:t>AI is the top state-CIO priority for 2026 (NASCIO)</a:t>
+            </a:r>
+            <a:endParaRPr lang="en-US" sz="1200" dirty="0"/>
+          </a:p>
+        </p:txBody>
+      </p:sp>
+      <p:sp>
+        <p:nvSpPr>
+          <p:cNvPr id="9" name="Shape 7"/>
+          <p:cNvSpPr/>
+          <p:nvPr/>
+        </p:nvSpPr>
+        <p:spPr>
+          <a:xfrm>
+            <a:off x="4434840" y="3611880"/>
+            <a:ext cx="3291840" cy="1874520"/>
           </a:xfrm>
           <a:prstGeom prst="roundRect">
             <a:avLst>
-              <a:gd name="adj" fmla="val 2917"/>
+              <a:gd name="adj" fmla="val 3902"/>
             </a:avLst>
           </a:prstGeom>
           <a:solidFill>
-            <a:srgbClr val="1E2761"/>
+            <a:srgbClr val="2C3B4E"/>
           </a:solidFill>
-          <a:ln/>
-          <a:effectLst>
-            <a:outerShdw sx="100000" sy="100000" kx="0" ky="0" algn="bl" rotWithShape="0" blurRad="88900" dist="38100" dir="5400000">
-              <a:srgbClr val="000000">
-                <a:alpha val="16000"/>
-              </a:srgbClr>
-            </a:outerShdw>
-          </a:effectLst>
-        </p:spPr>
-      </p:sp>
-      <p:sp>
-        <p:nvSpPr>
-          <p:cNvPr id="8" name="Text 6"/>
-          <p:cNvSpPr/>
-          <p:nvPr/>
-        </p:nvSpPr>
-        <p:spPr>
-          <a:xfrm>
-            <a:off x="3429000" y="2148840"/>
-            <a:ext cx="2606040" cy="822960"/>
+          <a:ln w="12700">
+            <a:solidFill>
+              <a:srgbClr val="37475A"/>
+            </a:solidFill>
+            <a:prstDash val="solid"/>
+          </a:ln>
+        </p:spPr>
+      </p:sp>
+      <p:sp>
+        <p:nvSpPr>
+          <p:cNvPr id="10" name="Shape 8"/>
+          <p:cNvSpPr/>
+          <p:nvPr/>
+        </p:nvSpPr>
+        <p:spPr>
+          <a:xfrm>
+            <a:off x="4434840" y="3611880"/>
+            <a:ext cx="109728" cy="1874520"/>
+          </a:xfrm>
+          <a:prstGeom prst="rect">
+            <a:avLst/>
+          </a:prstGeom>
+          <a:solidFill>
+            <a:srgbClr val="FF9900"/>
+          </a:solidFill>
+          <a:ln/>
+        </p:spPr>
+      </p:sp>
+      <p:sp>
+        <p:nvSpPr>
+          <p:cNvPr id="11" name="Text 9"/>
+          <p:cNvSpPr/>
+          <p:nvPr/>
+        </p:nvSpPr>
+        <p:spPr>
+          <a:xfrm>
+            <a:off x="4663440" y="3813048"/>
+            <a:ext cx="2880360" cy="868680"/>
           </a:xfrm>
           <a:prstGeom prst="rect">
             <a:avLst/>
@@ -1776,99 +1937,123 @@
           <a:bodyPr wrap="square" rtlCol="0" anchor="ctr"/>
           <a:lstStyle/>
           <a:p>
-            <a:pPr algn="ctr" indent="0" marL="0">
-              <a:buNone/>
-            </a:pPr>
-            <a:r>
-              <a:rPr lang="en-US" sz="3400" b="1" dirty="0">
+            <a:pPr indent="0" marL="0">
+              <a:buNone/>
+            </a:pPr>
+            <a:r>
+              <a:rPr lang="en-US" sz="3200" b="1" dirty="0">
                 <a:solidFill>
                   <a:srgbClr val="FFFFFF"/>
                 </a:solidFill>
-                <a:latin typeface="Cambria" pitchFamily="34" charset="0"/>
-                <a:ea typeface="Cambria" pitchFamily="34" charset="-122"/>
-                <a:cs typeface="Cambria" pitchFamily="34" charset="-120"/>
-              </a:rPr>
-              <a:t>90%</a:t>
-            </a:r>
-            <a:endParaRPr lang="en-US" sz="3400" dirty="0"/>
-          </a:p>
-        </p:txBody>
-      </p:sp>
-      <p:sp>
-        <p:nvSpPr>
-          <p:cNvPr id="9" name="Text 7"/>
-          <p:cNvSpPr/>
-          <p:nvPr/>
-        </p:nvSpPr>
-        <p:spPr>
-          <a:xfrm>
-            <a:off x="3611880" y="3017520"/>
-            <a:ext cx="2240280" cy="914400"/>
-          </a:xfrm>
-          <a:prstGeom prst="rect">
-            <a:avLst/>
-          </a:prstGeom>
-          <a:noFill/>
-          <a:ln/>
-        </p:spPr>
-        <p:txBody>
-          <a:bodyPr wrap="square" rtlCol="0" anchor="ctr"/>
-          <a:lstStyle/>
-          <a:p>
-            <a:pPr algn="ctr" indent="0" marL="0">
-              <a:buNone/>
-            </a:pPr>
-            <a:r>
-              <a:rPr lang="en-US" sz="1300" dirty="0">
-                <a:solidFill>
-                  <a:srgbClr val="CADCFC"/>
-                </a:solidFill>
-              </a:rPr>
-              <a:t>of states running GenAI pilots</a:t>
-            </a:r>
-            <a:endParaRPr lang="en-US" sz="1300" dirty="0"/>
-          </a:p>
-        </p:txBody>
-      </p:sp>
-      <p:sp>
-        <p:nvSpPr>
-          <p:cNvPr id="10" name="Shape 8"/>
-          <p:cNvSpPr/>
-          <p:nvPr/>
-        </p:nvSpPr>
-        <p:spPr>
-          <a:xfrm>
-            <a:off x="6217920" y="1828800"/>
-            <a:ext cx="2606040" cy="2194560"/>
+                <a:latin typeface="Trebuchet MS" pitchFamily="34" charset="0"/>
+                <a:ea typeface="Trebuchet MS" pitchFamily="34" charset="-122"/>
+                <a:cs typeface="Trebuchet MS" pitchFamily="34" charset="-120"/>
+              </a:rPr>
+              <a:t>8 + 1</a:t>
+            </a:r>
+            <a:endParaRPr lang="en-US" sz="3200" dirty="0"/>
+          </a:p>
+        </p:txBody>
+      </p:sp>
+      <p:sp>
+        <p:nvSpPr>
+          <p:cNvPr id="12" name="Text 10"/>
+          <p:cNvSpPr/>
+          <p:nvPr/>
+        </p:nvSpPr>
+        <p:spPr>
+          <a:xfrm>
+            <a:off x="4690872" y="4690872"/>
+            <a:ext cx="2834640" cy="713232"/>
+          </a:xfrm>
+          <a:prstGeom prst="rect">
+            <a:avLst/>
+          </a:prstGeom>
+          <a:noFill/>
+          <a:ln/>
+        </p:spPr>
+        <p:txBody>
+          <a:bodyPr wrap="square" rtlCol="0" anchor="t"/>
+          <a:lstStyle/>
+          <a:p>
+            <a:pPr indent="0" marL="0">
+              <a:lnSpc>
+                <a:spcPct val="105000"/>
+              </a:lnSpc>
+              <a:buNone/>
+            </a:pPr>
+            <a:r>
+              <a:rPr lang="en-US" sz="1200" dirty="0">
+                <a:solidFill>
+                  <a:srgbClr val="8FA1B3"/>
+                </a:solidFill>
+                <a:latin typeface="Calibri" pitchFamily="34" charset="0"/>
+                <a:ea typeface="Calibri" pitchFamily="34" charset="-122"/>
+                <a:cs typeface="Calibri" pitchFamily="34" charset="-120"/>
+              </a:rPr>
+              <a:t>governed agents plus a whole-of-government platform, all on AWS</a:t>
+            </a:r>
+            <a:endParaRPr lang="en-US" sz="1200" dirty="0"/>
+          </a:p>
+        </p:txBody>
+      </p:sp>
+      <p:sp>
+        <p:nvSpPr>
+          <p:cNvPr id="13" name="Shape 11"/>
+          <p:cNvSpPr/>
+          <p:nvPr/>
+        </p:nvSpPr>
+        <p:spPr>
+          <a:xfrm>
+            <a:off x="8046720" y="3611880"/>
+            <a:ext cx="3291840" cy="1874520"/>
           </a:xfrm>
           <a:prstGeom prst="roundRect">
             <a:avLst>
-              <a:gd name="adj" fmla="val 2917"/>
+              <a:gd name="adj" fmla="val 3902"/>
             </a:avLst>
           </a:prstGeom>
           <a:solidFill>
-            <a:srgbClr val="1E2761"/>
+            <a:srgbClr val="2C3B4E"/>
           </a:solidFill>
-          <a:ln/>
-          <a:effectLst>
-            <a:outerShdw sx="100000" sy="100000" kx="0" ky="0" algn="bl" rotWithShape="0" blurRad="88900" dist="38100" dir="5400000">
-              <a:srgbClr val="000000">
-                <a:alpha val="16000"/>
-              </a:srgbClr>
-            </a:outerShdw>
-          </a:effectLst>
-        </p:spPr>
-      </p:sp>
-      <p:sp>
-        <p:nvSpPr>
-          <p:cNvPr id="11" name="Text 9"/>
-          <p:cNvSpPr/>
-          <p:nvPr/>
-        </p:nvSpPr>
-        <p:spPr>
-          <a:xfrm>
-            <a:off x="6217920" y="2148840"/>
-            <a:ext cx="2606040" cy="822960"/>
+          <a:ln w="12700">
+            <a:solidFill>
+              <a:srgbClr val="37475A"/>
+            </a:solidFill>
+            <a:prstDash val="solid"/>
+          </a:ln>
+        </p:spPr>
+      </p:sp>
+      <p:sp>
+        <p:nvSpPr>
+          <p:cNvPr id="14" name="Shape 12"/>
+          <p:cNvSpPr/>
+          <p:nvPr/>
+        </p:nvSpPr>
+        <p:spPr>
+          <a:xfrm>
+            <a:off x="8046720" y="3611880"/>
+            <a:ext cx="109728" cy="1874520"/>
+          </a:xfrm>
+          <a:prstGeom prst="rect">
+            <a:avLst/>
+          </a:prstGeom>
+          <a:solidFill>
+            <a:srgbClr val="FF9900"/>
+          </a:solidFill>
+          <a:ln/>
+        </p:spPr>
+      </p:sp>
+      <p:sp>
+        <p:nvSpPr>
+          <p:cNvPr id="15" name="Text 13"/>
+          <p:cNvSpPr/>
+          <p:nvPr/>
+        </p:nvSpPr>
+        <p:spPr>
+          <a:xfrm>
+            <a:off x="8275320" y="3813048"/>
+            <a:ext cx="2880360" cy="868680"/>
           </a:xfrm>
           <a:prstGeom prst="rect">
             <a:avLst/>
@@ -1880,34 +2065,76 @@
           <a:bodyPr wrap="square" rtlCol="0" anchor="ctr"/>
           <a:lstStyle/>
           <a:p>
-            <a:pPr algn="ctr" indent="0" marL="0">
-              <a:buNone/>
-            </a:pPr>
-            <a:r>
-              <a:rPr lang="en-US" sz="3400" b="1" dirty="0">
+            <a:pPr indent="0" marL="0">
+              <a:buNone/>
+            </a:pPr>
+            <a:r>
+              <a:rPr lang="en-US" sz="2600" b="1" dirty="0">
                 <a:solidFill>
                   <a:srgbClr val="FFFFFF"/>
                 </a:solidFill>
-                <a:latin typeface="Cambria" pitchFamily="34" charset="0"/>
-                <a:ea typeface="Cambria" pitchFamily="34" charset="-122"/>
-                <a:cs typeface="Cambria" pitchFamily="34" charset="-120"/>
-              </a:rPr>
-              <a:t>25%</a:t>
-            </a:r>
-            <a:endParaRPr lang="en-US" sz="3400" dirty="0"/>
-          </a:p>
-        </p:txBody>
-      </p:sp>
-      <p:sp>
-        <p:nvSpPr>
-          <p:cNvPr id="12" name="Text 10"/>
-          <p:cNvSpPr/>
-          <p:nvPr/>
-        </p:nvSpPr>
-        <p:spPr>
-          <a:xfrm>
-            <a:off x="6400800" y="3017520"/>
-            <a:ext cx="2240280" cy="914400"/>
+                <a:latin typeface="Trebuchet MS" pitchFamily="34" charset="0"/>
+                <a:ea typeface="Trebuchet MS" pitchFamily="34" charset="-122"/>
+                <a:cs typeface="Trebuchet MS" pitchFamily="34" charset="-120"/>
+              </a:rPr>
+              <a:t>FedRAMP High</a:t>
+            </a:r>
+            <a:endParaRPr lang="en-US" sz="2600" dirty="0"/>
+          </a:p>
+        </p:txBody>
+      </p:sp>
+      <p:sp>
+        <p:nvSpPr>
+          <p:cNvPr id="16" name="Text 14"/>
+          <p:cNvSpPr/>
+          <p:nvPr/>
+        </p:nvSpPr>
+        <p:spPr>
+          <a:xfrm>
+            <a:off x="8302752" y="4690872"/>
+            <a:ext cx="2834640" cy="713232"/>
+          </a:xfrm>
+          <a:prstGeom prst="rect">
+            <a:avLst/>
+          </a:prstGeom>
+          <a:noFill/>
+          <a:ln/>
+        </p:spPr>
+        <p:txBody>
+          <a:bodyPr wrap="square" rtlCol="0" anchor="t"/>
+          <a:lstStyle/>
+          <a:p>
+            <a:pPr indent="0" marL="0">
+              <a:lnSpc>
+                <a:spcPct val="105000"/>
+              </a:lnSpc>
+              <a:buNone/>
+            </a:pPr>
+            <a:r>
+              <a:rPr lang="en-US" sz="1200" dirty="0">
+                <a:solidFill>
+                  <a:srgbClr val="8FA1B3"/>
+                </a:solidFill>
+                <a:latin typeface="Calibri" pitchFamily="34" charset="0"/>
+                <a:ea typeface="Calibri" pitchFamily="34" charset="-122"/>
+                <a:cs typeface="Calibri" pitchFamily="34" charset="-120"/>
+              </a:rPr>
+              <a:t>Bedrock authorized; DoD IL-4/5 in GovCloud (US)</a:t>
+            </a:r>
+            <a:endParaRPr lang="en-US" sz="1200" dirty="0"/>
+          </a:p>
+        </p:txBody>
+      </p:sp>
+      <p:sp>
+        <p:nvSpPr>
+          <p:cNvPr id="17" name="Text 15"/>
+          <p:cNvSpPr/>
+          <p:nvPr/>
+        </p:nvSpPr>
+        <p:spPr>
+          <a:xfrm>
+            <a:off x="822960" y="6327648"/>
+            <a:ext cx="10515600" cy="274320"/>
           </a:xfrm>
           <a:prstGeom prst="rect">
             <a:avLst/>
@@ -1919,194 +2146,21 @@
           <a:bodyPr wrap="square" rtlCol="0" anchor="ctr"/>
           <a:lstStyle/>
           <a:p>
-            <a:pPr algn="ctr" indent="0" marL="0">
-              <a:buNone/>
-            </a:pPr>
-            <a:r>
-              <a:rPr lang="en-US" sz="1300" dirty="0">
-                <a:solidFill>
-                  <a:srgbClr val="CADCFC"/>
-                </a:solidFill>
-              </a:rPr>
-              <a:t>have dedicated GenAI funding</a:t>
-            </a:r>
-            <a:endParaRPr lang="en-US" sz="1300" dirty="0"/>
-          </a:p>
-        </p:txBody>
-      </p:sp>
-      <p:sp>
-        <p:nvSpPr>
-          <p:cNvPr id="13" name="Shape 11"/>
-          <p:cNvSpPr/>
-          <p:nvPr/>
-        </p:nvSpPr>
-        <p:spPr>
-          <a:xfrm>
-            <a:off x="9006840" y="1828800"/>
-            <a:ext cx="2606040" cy="2194560"/>
-          </a:xfrm>
-          <a:prstGeom prst="roundRect">
-            <a:avLst>
-              <a:gd name="adj" fmla="val 2917"/>
-            </a:avLst>
-          </a:prstGeom>
-          <a:solidFill>
-            <a:srgbClr val="1E2761"/>
-          </a:solidFill>
-          <a:ln/>
-          <a:effectLst>
-            <a:outerShdw sx="100000" sy="100000" kx="0" ky="0" algn="bl" rotWithShape="0" blurRad="88900" dist="38100" dir="5400000">
-              <a:srgbClr val="000000">
-                <a:alpha val="16000"/>
-              </a:srgbClr>
-            </a:outerShdw>
-          </a:effectLst>
-        </p:spPr>
-      </p:sp>
-      <p:sp>
-        <p:nvSpPr>
-          <p:cNvPr id="14" name="Text 12"/>
-          <p:cNvSpPr/>
-          <p:nvPr/>
-        </p:nvSpPr>
-        <p:spPr>
-          <a:xfrm>
-            <a:off x="9006840" y="2148840"/>
-            <a:ext cx="2606040" cy="822960"/>
-          </a:xfrm>
-          <a:prstGeom prst="rect">
-            <a:avLst/>
-          </a:prstGeom>
-          <a:noFill/>
-          <a:ln/>
-        </p:spPr>
-        <p:txBody>
-          <a:bodyPr wrap="square" rtlCol="0" anchor="ctr"/>
-          <a:lstStyle/>
-          <a:p>
-            <a:pPr algn="ctr" indent="0" marL="0">
-              <a:buNone/>
-            </a:pPr>
-            <a:r>
-              <a:rPr lang="en-US" sz="3400" b="1" dirty="0">
-                <a:solidFill>
-                  <a:srgbClr val="FFFFFF"/>
-                </a:solidFill>
-                <a:latin typeface="Cambria" pitchFamily="34" charset="0"/>
-                <a:ea typeface="Cambria" pitchFamily="34" charset="-122"/>
-                <a:cs typeface="Cambria" pitchFamily="34" charset="-120"/>
-              </a:rPr>
-              <a:t>2027–28</a:t>
-            </a:r>
-            <a:endParaRPr lang="en-US" sz="3400" dirty="0"/>
-          </a:p>
-        </p:txBody>
-      </p:sp>
-      <p:sp>
-        <p:nvSpPr>
-          <p:cNvPr id="15" name="Text 13"/>
-          <p:cNvSpPr/>
-          <p:nvPr/>
-        </p:nvSpPr>
-        <p:spPr>
-          <a:xfrm>
-            <a:off x="9189720" y="3017520"/>
-            <a:ext cx="2240280" cy="914400"/>
-          </a:xfrm>
-          <a:prstGeom prst="rect">
-            <a:avLst/>
-          </a:prstGeom>
-          <a:noFill/>
-          <a:ln/>
-        </p:spPr>
-        <p:txBody>
-          <a:bodyPr wrap="square" rtlCol="0" anchor="ctr"/>
-          <a:lstStyle/>
-          <a:p>
-            <a:pPr algn="ctr" indent="0" marL="0">
-              <a:buNone/>
-            </a:pPr>
-            <a:r>
-              <a:rPr lang="en-US" sz="1300" dirty="0">
-                <a:solidFill>
-                  <a:srgbClr val="CADCFC"/>
-                </a:solidFill>
-              </a:rPr>
-              <a:t>new ADA Title II accessibility deadlines</a:t>
-            </a:r>
-            <a:endParaRPr lang="en-US" sz="1300" dirty="0"/>
-          </a:p>
-        </p:txBody>
-      </p:sp>
-      <p:sp>
-        <p:nvSpPr>
-          <p:cNvPr id="16" name="Text 14"/>
-          <p:cNvSpPr/>
-          <p:nvPr/>
-        </p:nvSpPr>
-        <p:spPr>
-          <a:xfrm>
-            <a:off x="640080" y="4389120"/>
-            <a:ext cx="10881360" cy="548640"/>
-          </a:xfrm>
-          <a:prstGeom prst="rect">
-            <a:avLst/>
-          </a:prstGeom>
-          <a:noFill/>
-          <a:ln/>
-        </p:spPr>
-        <p:txBody>
-          <a:bodyPr wrap="square" rtlCol="0" anchor="ctr"/>
-          <a:lstStyle/>
-          <a:p>
-            <a:pPr indent="0" marL="0">
-              <a:buNone/>
-            </a:pPr>
-            <a:r>
-              <a:rPr lang="en-US" sz="1600" b="1" dirty="0">
-                <a:solidFill>
-                  <a:srgbClr val="1B2440"/>
-                </a:solidFill>
-              </a:rPr>
-              <a:t>The gap between pilots and production is governance: identity, authorization, audit, retention, accessibility.</a:t>
-            </a:r>
-            <a:endParaRPr lang="en-US" sz="1600" dirty="0"/>
-          </a:p>
-        </p:txBody>
-      </p:sp>
-      <p:sp>
-        <p:nvSpPr>
-          <p:cNvPr id="17" name="Text 15"/>
-          <p:cNvSpPr/>
-          <p:nvPr/>
-        </p:nvSpPr>
-        <p:spPr>
-          <a:xfrm>
-            <a:off x="640080" y="6263640"/>
-            <a:ext cx="10515600" cy="274320"/>
-          </a:xfrm>
-          <a:prstGeom prst="rect">
-            <a:avLst/>
-          </a:prstGeom>
-          <a:noFill/>
-          <a:ln/>
-        </p:spPr>
-        <p:txBody>
-          <a:bodyPr wrap="square" rtlCol="0" anchor="ctr"/>
-          <a:lstStyle/>
-          <a:p>
-            <a:pPr indent="0" marL="0">
-              <a:buNone/>
-            </a:pPr>
-            <a:r>
-              <a:rPr lang="en-US" sz="1100" i="1" dirty="0">
-                <a:solidFill>
-                  <a:srgbClr val="5B6488"/>
-                </a:solidFill>
-              </a:rPr>
-              <a:t>Source: NASCIO 2026 priorities &amp; 2025 survey; DOJ ADA Title II IFR (Apr 2026). See SOURCES.md.</a:t>
-            </a:r>
-            <a:endParaRPr lang="en-US" sz="1100" dirty="0"/>
+            <a:pPr indent="0" marL="0">
+              <a:buNone/>
+            </a:pPr>
+            <a:r>
+              <a:rPr lang="en-US" sz="1000" dirty="0">
+                <a:solidFill>
+                  <a:srgbClr val="5A6B7B"/>
+                </a:solidFill>
+                <a:latin typeface="Calibri" pitchFamily="34" charset="0"/>
+                <a:ea typeface="Calibri" pitchFamily="34" charset="-122"/>
+                <a:cs typeface="Calibri" pitchFamily="34" charset="-120"/>
+              </a:rPr>
+              <a:t>David Ryder   ·   AI Strategy &amp; Architecture Leader   ·   github.com/virtualryder/slg-ai-agents</a:t>
+            </a:r>
+            <a:endParaRPr lang="en-US" sz="1000" dirty="0"/>
           </a:p>
         </p:txBody>
       </p:sp>
@@ -2124,7 +2178,7 @@
     <p:bg>
       <p:bgPr>
         <a:solidFill>
-          <a:srgbClr val="FFFFFF"/>
+          <a:srgbClr val="F4F5F7"/>
         </a:solidFill>
       </p:bgPr>
     </p:bg>
@@ -2150,8 +2204,8 @@
         </p:nvSpPr>
         <p:spPr>
           <a:xfrm>
-            <a:off x="640080" y="457200"/>
-            <a:ext cx="10058400" cy="274320"/>
+            <a:off x="822960" y="502920"/>
+            <a:ext cx="10515600" cy="310896"/>
           </a:xfrm>
           <a:prstGeom prst="rect">
             <a:avLst/>
@@ -2167,14 +2221,17 @@
               <a:buNone/>
             </a:pPr>
             <a:r>
-              <a:rPr lang="en-US" sz="1300" b="1" spc="200" kern="0" dirty="0">
-                <a:solidFill>
-                  <a:srgbClr val="2E8BC0"/>
-                </a:solidFill>
-              </a:rPr>
-              <a:t>THE PORTFOLIO</a:t>
-            </a:r>
-            <a:endParaRPr lang="en-US" sz="1300" dirty="0"/>
+              <a:rPr lang="en-US" sz="1200" b="1" spc="200" kern="0" dirty="0">
+                <a:solidFill>
+                  <a:srgbClr val="ED7100"/>
+                </a:solidFill>
+                <a:latin typeface="Calibri" pitchFamily="34" charset="0"/>
+                <a:ea typeface="Calibri" pitchFamily="34" charset="-122"/>
+                <a:cs typeface="Calibri" pitchFamily="34" charset="-120"/>
+              </a:rPr>
+              <a:t>THE CUSTOMER &amp; THE PROBLEM TODAY</a:t>
+            </a:r>
+            <a:endParaRPr lang="en-US" sz="1200" dirty="0"/>
           </a:p>
         </p:txBody>
       </p:sp>
@@ -2186,8 +2243,50 @@
         </p:nvSpPr>
         <p:spPr>
           <a:xfrm>
-            <a:off x="640080" y="731520"/>
-            <a:ext cx="10972800" cy="731520"/>
+            <a:off x="822960" y="960120"/>
+            <a:ext cx="10515600" cy="777240"/>
+          </a:xfrm>
+          <a:prstGeom prst="rect">
+            <a:avLst/>
+          </a:prstGeom>
+          <a:noFill/>
+          <a:ln/>
+        </p:spPr>
+        <p:txBody>
+          <a:bodyPr wrap="square" rtlCol="0" anchor="t"/>
+          <a:lstStyle/>
+          <a:p>
+            <a:pPr indent="0" marL="0">
+              <a:lnSpc>
+                <a:spcPct val="100000"/>
+              </a:lnSpc>
+              <a:buNone/>
+            </a:pPr>
+            <a:r>
+              <a:rPr lang="en-US" sz="2600" b="1" dirty="0">
+                <a:solidFill>
+                  <a:srgbClr val="232F3E"/>
+                </a:solidFill>
+                <a:latin typeface="Trebuchet MS" pitchFamily="34" charset="0"/>
+                <a:ea typeface="Trebuchet MS" pitchFamily="34" charset="-122"/>
+                <a:cs typeface="Trebuchet MS" pitchFamily="34" charset="-120"/>
+              </a:rPr>
+              <a:t>The demand is proven; the missing piece is governed, fundable production.</a:t>
+            </a:r>
+            <a:endParaRPr lang="en-US" sz="2600" dirty="0"/>
+          </a:p>
+        </p:txBody>
+      </p:sp>
+      <p:sp>
+        <p:nvSpPr>
+          <p:cNvPr id="4" name="Text 2"/>
+          <p:cNvSpPr/>
+          <p:nvPr/>
+        </p:nvSpPr>
+        <p:spPr>
+          <a:xfrm>
+            <a:off x="822960" y="1965960"/>
+            <a:ext cx="5852160" cy="274320"/>
           </a:xfrm>
           <a:prstGeom prst="rect">
             <a:avLst/>
@@ -2203,59 +2302,251 @@
               <a:buNone/>
             </a:pPr>
             <a:r>
-              <a:rPr lang="en-US" sz="2900" b="1" dirty="0">
-                <a:solidFill>
-                  <a:srgbClr val="1B2440"/>
-                </a:solidFill>
-                <a:latin typeface="Cambria" pitchFamily="34" charset="0"/>
-                <a:ea typeface="Cambria" pitchFamily="34" charset="-122"/>
-                <a:cs typeface="Cambria" pitchFamily="34" charset="-120"/>
-              </a:rPr>
-              <a:t>Eight agents across the highest-value SLG workflows</a:t>
-            </a:r>
-            <a:endParaRPr lang="en-US" sz="2900" dirty="0"/>
-          </a:p>
-        </p:txBody>
-      </p:sp>
-      <p:sp>
-        <p:nvSpPr>
-          <p:cNvPr id="4" name="Shape 2"/>
-          <p:cNvSpPr/>
-          <p:nvPr/>
-        </p:nvSpPr>
-        <p:spPr>
-          <a:xfrm>
-            <a:off x="640080" y="1783080"/>
-            <a:ext cx="2606040" cy="1874520"/>
+              <a:rPr lang="en-US" sz="1250" b="1" dirty="0">
+                <a:solidFill>
+                  <a:srgbClr val="ED7100"/>
+                </a:solidFill>
+                <a:latin typeface="Calibri" pitchFamily="34" charset="0"/>
+                <a:ea typeface="Calibri" pitchFamily="34" charset="-122"/>
+                <a:cs typeface="Calibri" pitchFamily="34" charset="-120"/>
+              </a:rPr>
+              <a:t>Who they are</a:t>
+            </a:r>
+            <a:endParaRPr lang="en-US" sz="1250" dirty="0"/>
+          </a:p>
+        </p:txBody>
+      </p:sp>
+      <p:sp>
+        <p:nvSpPr>
+          <p:cNvPr id="5" name="Text 3"/>
+          <p:cNvSpPr/>
+          <p:nvPr/>
+        </p:nvSpPr>
+        <p:spPr>
+          <a:xfrm>
+            <a:off x="822960" y="2249424"/>
+            <a:ext cx="5852160" cy="822960"/>
+          </a:xfrm>
+          <a:prstGeom prst="rect">
+            <a:avLst/>
+          </a:prstGeom>
+          <a:noFill/>
+          <a:ln/>
+        </p:spPr>
+        <p:txBody>
+          <a:bodyPr wrap="square" rtlCol="0" anchor="t"/>
+          <a:lstStyle/>
+          <a:p>
+            <a:pPr indent="0" marL="0">
+              <a:lnSpc>
+                <a:spcPct val="112000"/>
+              </a:lnSpc>
+              <a:buNone/>
+            </a:pPr>
+            <a:r>
+              <a:rPr lang="en-US" sz="1400" dirty="0">
+                <a:solidFill>
+                  <a:srgbClr val="232F3E"/>
+                </a:solidFill>
+                <a:latin typeface="Calibri" pitchFamily="34" charset="0"/>
+                <a:ea typeface="Calibri" pitchFamily="34" charset="-122"/>
+                <a:cs typeface="Calibri" pitchFamily="34" charset="-120"/>
+              </a:rPr>
+              <a:t>State and local executives — CIOs, CISOs and directors of architecture — deciding where to place AI bets that will survive security review, an audit, and a budget cycle.</a:t>
+            </a:r>
+            <a:endParaRPr lang="en-US" sz="1400" dirty="0"/>
+          </a:p>
+        </p:txBody>
+      </p:sp>
+      <p:sp>
+        <p:nvSpPr>
+          <p:cNvPr id="6" name="Text 4"/>
+          <p:cNvSpPr/>
+          <p:nvPr/>
+        </p:nvSpPr>
+        <p:spPr>
+          <a:xfrm>
+            <a:off x="822960" y="3200400"/>
+            <a:ext cx="5852160" cy="274320"/>
+          </a:xfrm>
+          <a:prstGeom prst="rect">
+            <a:avLst/>
+          </a:prstGeom>
+          <a:noFill/>
+          <a:ln/>
+        </p:spPr>
+        <p:txBody>
+          <a:bodyPr wrap="square" rtlCol="0" anchor="ctr"/>
+          <a:lstStyle/>
+          <a:p>
+            <a:pPr indent="0" marL="0">
+              <a:buNone/>
+            </a:pPr>
+            <a:r>
+              <a:rPr lang="en-US" sz="1250" b="1" dirty="0">
+                <a:solidFill>
+                  <a:srgbClr val="ED7100"/>
+                </a:solidFill>
+                <a:latin typeface="Calibri" pitchFamily="34" charset="0"/>
+                <a:ea typeface="Calibri" pitchFamily="34" charset="-122"/>
+                <a:cs typeface="Calibri" pitchFamily="34" charset="-120"/>
+              </a:rPr>
+              <a:t>What they live with today</a:t>
+            </a:r>
+            <a:endParaRPr lang="en-US" sz="1250" dirty="0"/>
+          </a:p>
+        </p:txBody>
+      </p:sp>
+      <p:sp>
+        <p:nvSpPr>
+          <p:cNvPr id="7" name="Text 5"/>
+          <p:cNvSpPr/>
+          <p:nvPr/>
+        </p:nvSpPr>
+        <p:spPr>
+          <a:xfrm>
+            <a:off x="868680" y="3493008"/>
+            <a:ext cx="5852160" cy="2468880"/>
+          </a:xfrm>
+          <a:prstGeom prst="rect">
+            <a:avLst/>
+          </a:prstGeom>
+          <a:noFill/>
+          <a:ln/>
+        </p:spPr>
+        <p:txBody>
+          <a:bodyPr wrap="square" rtlCol="0" anchor="t"/>
+          <a:lstStyle/>
+          <a:p>
+            <a:pPr marL="177800" indent="-177800">
+              <a:lnSpc>
+                <a:spcPct val="105000"/>
+              </a:lnSpc>
+              <a:spcAft>
+                <a:spcPts val="700"/>
+              </a:spcAft>
+              <a:buSzPct val="100000"/>
+              <a:buChar char="•"/>
+            </a:pPr>
+            <a:r>
+              <a:rPr lang="en-US" sz="1350" dirty="0">
+                <a:solidFill>
+                  <a:srgbClr val="232F3E"/>
+                </a:solidFill>
+                <a:latin typeface="Calibri" pitchFamily="34" charset="0"/>
+                <a:ea typeface="Calibri" pitchFamily="34" charset="-122"/>
+                <a:cs typeface="Calibri" pitchFamily="34" charset="-120"/>
+              </a:rPr>
+              <a:t>Pilots are everywhere; few reach governed, funded production.</a:t>
+            </a:r>
+            <a:endParaRPr lang="en-US" sz="1350" dirty="0"/>
+          </a:p>
+          <a:p>
+            <a:pPr marL="177800" indent="-177800">
+              <a:lnSpc>
+                <a:spcPct val="105000"/>
+              </a:lnSpc>
+              <a:spcAft>
+                <a:spcPts val="700"/>
+              </a:spcAft>
+              <a:buSzPct val="100000"/>
+              <a:buChar char="•"/>
+            </a:pPr>
+            <a:r>
+              <a:rPr lang="en-US" sz="1350" dirty="0">
+                <a:solidFill>
+                  <a:srgbClr val="232F3E"/>
+                </a:solidFill>
+                <a:latin typeface="Calibri" pitchFamily="34" charset="0"/>
+                <a:ea typeface="Calibri" pitchFamily="34" charset="-122"/>
+                <a:cs typeface="Calibri" pitchFamily="34" charset="-120"/>
+              </a:rPr>
+              <a:t>Each agent rebuilt from scratch multiplies cost and risk.</a:t>
+            </a:r>
+            <a:endParaRPr lang="en-US" sz="1350" dirty="0"/>
+          </a:p>
+          <a:p>
+            <a:pPr marL="177800" indent="-177800">
+              <a:lnSpc>
+                <a:spcPct val="105000"/>
+              </a:lnSpc>
+              <a:spcAft>
+                <a:spcPts val="700"/>
+              </a:spcAft>
+              <a:buSzPct val="100000"/>
+              <a:buChar char="•"/>
+            </a:pPr>
+            <a:r>
+              <a:rPr lang="en-US" sz="1350" dirty="0">
+                <a:solidFill>
+                  <a:srgbClr val="232F3E"/>
+                </a:solidFill>
+                <a:latin typeface="Calibri" pitchFamily="34" charset="0"/>
+                <a:ea typeface="Calibri" pitchFamily="34" charset="-122"/>
+                <a:cs typeface="Calibri" pitchFamily="34" charset="-120"/>
+              </a:rPr>
+              <a:t>Security, accessibility and audit are bolted on late, if at all.</a:t>
+            </a:r>
+            <a:endParaRPr lang="en-US" sz="1350" dirty="0"/>
+          </a:p>
+          <a:p>
+            <a:pPr marL="177800" indent="-177800">
+              <a:lnSpc>
+                <a:spcPct val="105000"/>
+              </a:lnSpc>
+              <a:spcAft>
+                <a:spcPts val="700"/>
+              </a:spcAft>
+              <a:buSzPct val="100000"/>
+              <a:buChar char="•"/>
+            </a:pPr>
+            <a:r>
+              <a:rPr lang="en-US" sz="1350" dirty="0">
+                <a:solidFill>
+                  <a:srgbClr val="232F3E"/>
+                </a:solidFill>
+                <a:latin typeface="Calibri" pitchFamily="34" charset="0"/>
+                <a:ea typeface="Calibri" pitchFamily="34" charset="-122"/>
+                <a:cs typeface="Calibri" pitchFamily="34" charset="-120"/>
+              </a:rPr>
+              <a:t>Residents experience government as disconnected silos.</a:t>
+            </a:r>
+            <a:endParaRPr lang="en-US" sz="1350" dirty="0"/>
+          </a:p>
+        </p:txBody>
+      </p:sp>
+      <p:sp>
+        <p:nvSpPr>
+          <p:cNvPr id="8" name="Shape 6"/>
+          <p:cNvSpPr/>
+          <p:nvPr/>
+        </p:nvSpPr>
+        <p:spPr>
+          <a:xfrm>
+            <a:off x="7040880" y="1965960"/>
+            <a:ext cx="4325112" cy="3977640"/>
           </a:xfrm>
           <a:prstGeom prst="roundRect">
             <a:avLst>
-              <a:gd name="adj" fmla="val 3415"/>
+              <a:gd name="adj" fmla="val 1839"/>
             </a:avLst>
           </a:prstGeom>
           <a:solidFill>
-            <a:srgbClr val="F4F7FE"/>
+            <a:srgbClr val="232F3E"/>
           </a:solidFill>
           <a:ln/>
-          <a:effectLst>
-            <a:outerShdw sx="100000" sy="100000" kx="0" ky="0" algn="bl" rotWithShape="0" blurRad="88900" dist="38100" dir="5400000">
-              <a:srgbClr val="000000">
-                <a:alpha val="16000"/>
-              </a:srgbClr>
-            </a:outerShdw>
-          </a:effectLst>
-        </p:spPr>
-      </p:sp>
-      <p:sp>
-        <p:nvSpPr>
-          <p:cNvPr id="5" name="Text 3"/>
-          <p:cNvSpPr/>
-          <p:nvPr/>
-        </p:nvSpPr>
-        <p:spPr>
-          <a:xfrm>
-            <a:off x="822960" y="1965960"/>
-            <a:ext cx="2286000" cy="548640"/>
+        </p:spPr>
+      </p:sp>
+      <p:sp>
+        <p:nvSpPr>
+          <p:cNvPr id="9" name="Text 7"/>
+          <p:cNvSpPr/>
+          <p:nvPr/>
+        </p:nvSpPr>
+        <p:spPr>
+          <a:xfrm>
+            <a:off x="7269480" y="2148840"/>
+            <a:ext cx="3931920" cy="274320"/>
           </a:xfrm>
           <a:prstGeom prst="rect">
             <a:avLst/>
@@ -2271,30 +2562,30 @@
               <a:buNone/>
             </a:pPr>
             <a:r>
-              <a:rPr lang="en-US" sz="1450" b="1" dirty="0">
-                <a:solidFill>
-                  <a:srgbClr val="1E2761"/>
-                </a:solidFill>
-                <a:latin typeface="Cambria" pitchFamily="34" charset="0"/>
-                <a:ea typeface="Cambria" pitchFamily="34" charset="-122"/>
-                <a:cs typeface="Cambria" pitchFamily="34" charset="-120"/>
-              </a:rPr>
-              <a:t>01 Resident Services &amp; 311</a:t>
-            </a:r>
-            <a:endParaRPr lang="en-US" sz="1450" dirty="0"/>
-          </a:p>
-        </p:txBody>
-      </p:sp>
-      <p:sp>
-        <p:nvSpPr>
-          <p:cNvPr id="6" name="Text 4"/>
-          <p:cNvSpPr/>
-          <p:nvPr/>
-        </p:nvSpPr>
-        <p:spPr>
-          <a:xfrm>
-            <a:off x="822960" y="2560320"/>
-            <a:ext cx="2286000" cy="960120"/>
+              <a:rPr lang="en-US" sz="1100" b="1" spc="150" kern="0" dirty="0">
+                <a:solidFill>
+                  <a:srgbClr val="FF9900"/>
+                </a:solidFill>
+                <a:latin typeface="Calibri" pitchFamily="34" charset="0"/>
+                <a:ea typeface="Calibri" pitchFamily="34" charset="-122"/>
+                <a:cs typeface="Calibri" pitchFamily="34" charset="-120"/>
+              </a:rPr>
+              <a:t>THE COST OF THE STATUS QUO</a:t>
+            </a:r>
+            <a:endParaRPr lang="en-US" sz="1100" dirty="0"/>
+          </a:p>
+        </p:txBody>
+      </p:sp>
+      <p:sp>
+        <p:nvSpPr>
+          <p:cNvPr id="10" name="Text 8"/>
+          <p:cNvSpPr/>
+          <p:nvPr/>
+        </p:nvSpPr>
+        <p:spPr>
+          <a:xfrm>
+            <a:off x="7269480" y="2578608"/>
+            <a:ext cx="3840480" cy="570586"/>
           </a:xfrm>
           <a:prstGeom prst="rect">
             <a:avLst/>
@@ -2310,56 +2601,95 @@
               <a:buNone/>
             </a:pPr>
             <a:r>
-              <a:rPr lang="en-US" sz="1200" dirty="0">
-                <a:solidFill>
-                  <a:srgbClr val="1B2440"/>
-                </a:solidFill>
-              </a:rPr>
-              <a:t>Find the right service; cited answers; gated 311 actions</a:t>
-            </a:r>
-            <a:endParaRPr lang="en-US" sz="1200" dirty="0"/>
-          </a:p>
-        </p:txBody>
-      </p:sp>
-      <p:sp>
-        <p:nvSpPr>
-          <p:cNvPr id="7" name="Shape 5"/>
-          <p:cNvSpPr/>
-          <p:nvPr/>
-        </p:nvSpPr>
-        <p:spPr>
-          <a:xfrm>
-            <a:off x="3429000" y="1783080"/>
-            <a:ext cx="2606040" cy="1874520"/>
-          </a:xfrm>
-          <a:prstGeom prst="roundRect">
-            <a:avLst>
-              <a:gd name="adj" fmla="val 3415"/>
-            </a:avLst>
-          </a:prstGeom>
-          <a:solidFill>
-            <a:srgbClr val="F4F7FE"/>
-          </a:solidFill>
-          <a:ln/>
-          <a:effectLst>
-            <a:outerShdw sx="100000" sy="100000" kx="0" ky="0" algn="bl" rotWithShape="0" blurRad="88900" dist="38100" dir="5400000">
-              <a:srgbClr val="000000">
-                <a:alpha val="16000"/>
-              </a:srgbClr>
-            </a:outerShdw>
-          </a:effectLst>
-        </p:spPr>
-      </p:sp>
-      <p:sp>
-        <p:nvSpPr>
-          <p:cNvPr id="8" name="Text 6"/>
-          <p:cNvSpPr/>
-          <p:nvPr/>
-        </p:nvSpPr>
-        <p:spPr>
-          <a:xfrm>
-            <a:off x="3611880" y="1965960"/>
-            <a:ext cx="2286000" cy="548640"/>
+              <a:rPr lang="en-US" sz="2600" b="1" dirty="0">
+                <a:solidFill>
+                  <a:srgbClr val="FFFFFF"/>
+                </a:solidFill>
+                <a:latin typeface="Trebuchet MS" pitchFamily="34" charset="0"/>
+                <a:ea typeface="Trebuchet MS" pitchFamily="34" charset="-122"/>
+                <a:cs typeface="Trebuchet MS" pitchFamily="34" charset="-120"/>
+              </a:rPr>
+              <a:t>90% vs 25%</a:t>
+            </a:r>
+            <a:endParaRPr lang="en-US" sz="2600" dirty="0"/>
+          </a:p>
+        </p:txBody>
+      </p:sp>
+      <p:sp>
+        <p:nvSpPr>
+          <p:cNvPr id="11" name="Text 9"/>
+          <p:cNvSpPr/>
+          <p:nvPr/>
+        </p:nvSpPr>
+        <p:spPr>
+          <a:xfrm>
+            <a:off x="7287768" y="3090672"/>
+            <a:ext cx="3886200" cy="504749"/>
+          </a:xfrm>
+          <a:prstGeom prst="rect">
+            <a:avLst/>
+          </a:prstGeom>
+          <a:noFill/>
+          <a:ln/>
+        </p:spPr>
+        <p:txBody>
+          <a:bodyPr wrap="square" rtlCol="0" anchor="t"/>
+          <a:lstStyle/>
+          <a:p>
+            <a:pPr indent="0" marL="0">
+              <a:lnSpc>
+                <a:spcPct val="100000"/>
+              </a:lnSpc>
+              <a:buNone/>
+            </a:pPr>
+            <a:r>
+              <a:rPr lang="en-US" sz="1100" dirty="0">
+                <a:solidFill>
+                  <a:srgbClr val="8FA1B3"/>
+                </a:solidFill>
+                <a:latin typeface="Calibri" pitchFamily="34" charset="0"/>
+                <a:ea typeface="Calibri" pitchFamily="34" charset="-122"/>
+                <a:cs typeface="Calibri" pitchFamily="34" charset="-120"/>
+              </a:rPr>
+              <a:t>piloting GenAI vs. funded to scale it (NASCIO 2025)</a:t>
+            </a:r>
+            <a:endParaRPr lang="en-US" sz="1100" dirty="0"/>
+          </a:p>
+        </p:txBody>
+      </p:sp>
+      <p:sp>
+        <p:nvSpPr>
+          <p:cNvPr id="12" name="Shape 10"/>
+          <p:cNvSpPr/>
+          <p:nvPr/>
+        </p:nvSpPr>
+        <p:spPr>
+          <a:xfrm>
+            <a:off x="7269480" y="3621024"/>
+            <a:ext cx="3886200" cy="0"/>
+          </a:xfrm>
+          <a:prstGeom prst="line">
+            <a:avLst/>
+          </a:prstGeom>
+          <a:noFill/>
+          <a:ln w="12700">
+            <a:solidFill>
+              <a:srgbClr val="37475A"/>
+            </a:solidFill>
+            <a:prstDash val="solid"/>
+          </a:ln>
+        </p:spPr>
+      </p:sp>
+      <p:sp>
+        <p:nvSpPr>
+          <p:cNvPr id="13" name="Text 11"/>
+          <p:cNvSpPr/>
+          <p:nvPr/>
+        </p:nvSpPr>
+        <p:spPr>
+          <a:xfrm>
+            <a:off x="7269480" y="3675888"/>
+            <a:ext cx="3840480" cy="570586"/>
           </a:xfrm>
           <a:prstGeom prst="rect">
             <a:avLst/>
@@ -2375,30 +2705,95 @@
               <a:buNone/>
             </a:pPr>
             <a:r>
-              <a:rPr lang="en-US" sz="1450" b="1" dirty="0">
-                <a:solidFill>
-                  <a:srgbClr val="1E2761"/>
-                </a:solidFill>
-                <a:latin typeface="Cambria" pitchFamily="34" charset="0"/>
-                <a:ea typeface="Cambria" pitchFamily="34" charset="-122"/>
-                <a:cs typeface="Cambria" pitchFamily="34" charset="-120"/>
-              </a:rPr>
-              <a:t>02 Forms &amp; Document Processing</a:t>
-            </a:r>
-            <a:endParaRPr lang="en-US" sz="1450" dirty="0"/>
-          </a:p>
-        </p:txBody>
-      </p:sp>
-      <p:sp>
-        <p:nvSpPr>
-          <p:cNvPr id="9" name="Text 7"/>
-          <p:cNvSpPr/>
-          <p:nvPr/>
-        </p:nvSpPr>
-        <p:spPr>
-          <a:xfrm>
-            <a:off x="3611880" y="2560320"/>
-            <a:ext cx="2286000" cy="960120"/>
+              <a:rPr lang="en-US" sz="2600" b="1" dirty="0">
+                <a:solidFill>
+                  <a:srgbClr val="FFFFFF"/>
+                </a:solidFill>
+                <a:latin typeface="Trebuchet MS" pitchFamily="34" charset="0"/>
+                <a:ea typeface="Trebuchet MS" pitchFamily="34" charset="-122"/>
+                <a:cs typeface="Trebuchet MS" pitchFamily="34" charset="-120"/>
+              </a:rPr>
+              <a:t>$100B+</a:t>
+            </a:r>
+            <a:endParaRPr lang="en-US" sz="2600" dirty="0"/>
+          </a:p>
+        </p:txBody>
+      </p:sp>
+      <p:sp>
+        <p:nvSpPr>
+          <p:cNvPr id="14" name="Text 12"/>
+          <p:cNvSpPr/>
+          <p:nvPr/>
+        </p:nvSpPr>
+        <p:spPr>
+          <a:xfrm>
+            <a:off x="7287768" y="4187952"/>
+            <a:ext cx="3886200" cy="504749"/>
+          </a:xfrm>
+          <a:prstGeom prst="rect">
+            <a:avLst/>
+          </a:prstGeom>
+          <a:noFill/>
+          <a:ln/>
+        </p:spPr>
+        <p:txBody>
+          <a:bodyPr wrap="square" rtlCol="0" anchor="t"/>
+          <a:lstStyle/>
+          <a:p>
+            <a:pPr indent="0" marL="0">
+              <a:lnSpc>
+                <a:spcPct val="100000"/>
+              </a:lnSpc>
+              <a:buNone/>
+            </a:pPr>
+            <a:r>
+              <a:rPr lang="en-US" sz="1100" dirty="0">
+                <a:solidFill>
+                  <a:srgbClr val="8FA1B3"/>
+                </a:solidFill>
+                <a:latin typeface="Calibri" pitchFamily="34" charset="0"/>
+                <a:ea typeface="Calibri" pitchFamily="34" charset="-122"/>
+                <a:cs typeface="Calibri" pitchFamily="34" charset="-120"/>
+              </a:rPr>
+              <a:t>government IT spend, ~80% operating legacy systems (GAO)</a:t>
+            </a:r>
+            <a:endParaRPr lang="en-US" sz="1100" dirty="0"/>
+          </a:p>
+        </p:txBody>
+      </p:sp>
+      <p:sp>
+        <p:nvSpPr>
+          <p:cNvPr id="15" name="Shape 13"/>
+          <p:cNvSpPr/>
+          <p:nvPr/>
+        </p:nvSpPr>
+        <p:spPr>
+          <a:xfrm>
+            <a:off x="7269480" y="4718304"/>
+            <a:ext cx="3886200" cy="0"/>
+          </a:xfrm>
+          <a:prstGeom prst="line">
+            <a:avLst/>
+          </a:prstGeom>
+          <a:noFill/>
+          <a:ln w="12700">
+            <a:solidFill>
+              <a:srgbClr val="37475A"/>
+            </a:solidFill>
+            <a:prstDash val="solid"/>
+          </a:ln>
+        </p:spPr>
+      </p:sp>
+      <p:sp>
+        <p:nvSpPr>
+          <p:cNvPr id="16" name="Text 14"/>
+          <p:cNvSpPr/>
+          <p:nvPr/>
+        </p:nvSpPr>
+        <p:spPr>
+          <a:xfrm>
+            <a:off x="7269480" y="4773168"/>
+            <a:ext cx="3840480" cy="570586"/>
           </a:xfrm>
           <a:prstGeom prst="rect">
             <a:avLst/>
@@ -2414,56 +2809,72 @@
               <a:buNone/>
             </a:pPr>
             <a:r>
-              <a:rPr lang="en-US" sz="1200" dirty="0">
-                <a:solidFill>
-                  <a:srgbClr val="1B2440"/>
-                </a:solidFill>
-              </a:rPr>
-              <a:t>Extract, validate, assemble; cut re-keying &amp; backlogs</a:t>
-            </a:r>
-            <a:endParaRPr lang="en-US" sz="1200" dirty="0"/>
-          </a:p>
-        </p:txBody>
-      </p:sp>
-      <p:sp>
-        <p:nvSpPr>
-          <p:cNvPr id="10" name="Shape 8"/>
-          <p:cNvSpPr/>
-          <p:nvPr/>
-        </p:nvSpPr>
-        <p:spPr>
-          <a:xfrm>
-            <a:off x="6217920" y="1783080"/>
-            <a:ext cx="2606040" cy="1874520"/>
-          </a:xfrm>
-          <a:prstGeom prst="roundRect">
-            <a:avLst>
-              <a:gd name="adj" fmla="val 3415"/>
-            </a:avLst>
-          </a:prstGeom>
-          <a:solidFill>
-            <a:srgbClr val="F4F7FE"/>
-          </a:solidFill>
-          <a:ln/>
-          <a:effectLst>
-            <a:outerShdw sx="100000" sy="100000" kx="0" ky="0" algn="bl" rotWithShape="0" blurRad="88900" dist="38100" dir="5400000">
-              <a:srgbClr val="000000">
-                <a:alpha val="16000"/>
-              </a:srgbClr>
-            </a:outerShdw>
-          </a:effectLst>
-        </p:spPr>
-      </p:sp>
-      <p:sp>
-        <p:nvSpPr>
-          <p:cNvPr id="11" name="Text 9"/>
-          <p:cNvSpPr/>
-          <p:nvPr/>
-        </p:nvSpPr>
-        <p:spPr>
-          <a:xfrm>
-            <a:off x="6400800" y="1965960"/>
-            <a:ext cx="2286000" cy="548640"/>
+              <a:rPr lang="en-US" sz="2600" b="1" dirty="0">
+                <a:solidFill>
+                  <a:srgbClr val="FFFFFF"/>
+                </a:solidFill>
+                <a:latin typeface="Trebuchet MS" pitchFamily="34" charset="0"/>
+                <a:ea typeface="Trebuchet MS" pitchFamily="34" charset="-122"/>
+                <a:cs typeface="Trebuchet MS" pitchFamily="34" charset="-120"/>
+              </a:rPr>
+              <a:t>Apr 2027</a:t>
+            </a:r>
+            <a:endParaRPr lang="en-US" sz="2600" dirty="0"/>
+          </a:p>
+        </p:txBody>
+      </p:sp>
+      <p:sp>
+        <p:nvSpPr>
+          <p:cNvPr id="17" name="Text 15"/>
+          <p:cNvSpPr/>
+          <p:nvPr/>
+        </p:nvSpPr>
+        <p:spPr>
+          <a:xfrm>
+            <a:off x="7287768" y="5285232"/>
+            <a:ext cx="3886200" cy="504749"/>
+          </a:xfrm>
+          <a:prstGeom prst="rect">
+            <a:avLst/>
+          </a:prstGeom>
+          <a:noFill/>
+          <a:ln/>
+        </p:spPr>
+        <p:txBody>
+          <a:bodyPr wrap="square" rtlCol="0" anchor="t"/>
+          <a:lstStyle/>
+          <a:p>
+            <a:pPr indent="0" marL="0">
+              <a:lnSpc>
+                <a:spcPct val="100000"/>
+              </a:lnSpc>
+              <a:buNone/>
+            </a:pPr>
+            <a:r>
+              <a:rPr lang="en-US" sz="1100" dirty="0">
+                <a:solidFill>
+                  <a:srgbClr val="8FA1B3"/>
+                </a:solidFill>
+                <a:latin typeface="Calibri" pitchFamily="34" charset="0"/>
+                <a:ea typeface="Calibri" pitchFamily="34" charset="-122"/>
+                <a:cs typeface="Calibri" pitchFamily="34" charset="-120"/>
+              </a:rPr>
+              <a:t>ADA Title II WCAG 2.1 AA deadline for ≥50k-population governments</a:t>
+            </a:r>
+            <a:endParaRPr lang="en-US" sz="1100" dirty="0"/>
+          </a:p>
+        </p:txBody>
+      </p:sp>
+      <p:sp>
+        <p:nvSpPr>
+          <p:cNvPr id="18" name="Text 16"/>
+          <p:cNvSpPr/>
+          <p:nvPr/>
+        </p:nvSpPr>
+        <p:spPr>
+          <a:xfrm>
+            <a:off x="822960" y="6437376"/>
+            <a:ext cx="10515600" cy="329184"/>
           </a:xfrm>
           <a:prstGeom prst="rect">
             <a:avLst/>
@@ -2479,609 +2890,17 @@
               <a:buNone/>
             </a:pPr>
             <a:r>
-              <a:rPr lang="en-US" sz="1450" b="1" dirty="0">
-                <a:solidFill>
-                  <a:srgbClr val="1E2761"/>
-                </a:solidFill>
-                <a:latin typeface="Cambria" pitchFamily="34" charset="0"/>
-                <a:ea typeface="Cambria" pitchFamily="34" charset="-122"/>
-                <a:cs typeface="Cambria" pitchFamily="34" charset="-120"/>
-              </a:rPr>
-              <a:t>03 Permitting &amp; Licensing</a:t>
-            </a:r>
-            <a:endParaRPr lang="en-US" sz="1450" dirty="0"/>
-          </a:p>
-        </p:txBody>
-      </p:sp>
-      <p:sp>
-        <p:nvSpPr>
-          <p:cNvPr id="12" name="Text 10"/>
-          <p:cNvSpPr/>
-          <p:nvPr/>
-        </p:nvSpPr>
-        <p:spPr>
-          <a:xfrm>
-            <a:off x="6400800" y="2560320"/>
-            <a:ext cx="2286000" cy="960120"/>
-          </a:xfrm>
-          <a:prstGeom prst="rect">
-            <a:avLst/>
-          </a:prstGeom>
-          <a:noFill/>
-          <a:ln/>
-        </p:spPr>
-        <p:txBody>
-          <a:bodyPr wrap="square" rtlCol="0" anchor="ctr"/>
-          <a:lstStyle/>
-          <a:p>
-            <a:pPr indent="0" marL="0">
-              <a:buNone/>
-            </a:pPr>
-            <a:r>
-              <a:rPr lang="en-US" sz="1200" dirty="0">
-                <a:solidFill>
-                  <a:srgbClr val="1B2440"/>
-                </a:solidFill>
-              </a:rPr>
-              <a:t>Multi-department review; issuance stays human</a:t>
-            </a:r>
-            <a:endParaRPr lang="en-US" sz="1200" dirty="0"/>
-          </a:p>
-        </p:txBody>
-      </p:sp>
-      <p:sp>
-        <p:nvSpPr>
-          <p:cNvPr id="13" name="Shape 11"/>
-          <p:cNvSpPr/>
-          <p:nvPr/>
-        </p:nvSpPr>
-        <p:spPr>
-          <a:xfrm>
-            <a:off x="9006840" y="1783080"/>
-            <a:ext cx="2606040" cy="1874520"/>
-          </a:xfrm>
-          <a:prstGeom prst="roundRect">
-            <a:avLst>
-              <a:gd name="adj" fmla="val 3415"/>
-            </a:avLst>
-          </a:prstGeom>
-          <a:solidFill>
-            <a:srgbClr val="F4F7FE"/>
-          </a:solidFill>
-          <a:ln/>
-          <a:effectLst>
-            <a:outerShdw sx="100000" sy="100000" kx="0" ky="0" algn="bl" rotWithShape="0" blurRad="88900" dist="38100" dir="5400000">
-              <a:srgbClr val="000000">
-                <a:alpha val="16000"/>
-              </a:srgbClr>
-            </a:outerShdw>
-          </a:effectLst>
-        </p:spPr>
-      </p:sp>
-      <p:sp>
-        <p:nvSpPr>
-          <p:cNvPr id="14" name="Text 12"/>
-          <p:cNvSpPr/>
-          <p:nvPr/>
-        </p:nvSpPr>
-        <p:spPr>
-          <a:xfrm>
-            <a:off x="9189720" y="1965960"/>
-            <a:ext cx="2286000" cy="548640"/>
-          </a:xfrm>
-          <a:prstGeom prst="rect">
-            <a:avLst/>
-          </a:prstGeom>
-          <a:noFill/>
-          <a:ln/>
-        </p:spPr>
-        <p:txBody>
-          <a:bodyPr wrap="square" rtlCol="0" anchor="ctr"/>
-          <a:lstStyle/>
-          <a:p>
-            <a:pPr indent="0" marL="0">
-              <a:buNone/>
-            </a:pPr>
-            <a:r>
-              <a:rPr lang="en-US" sz="1450" b="1" dirty="0">
-                <a:solidFill>
-                  <a:srgbClr val="1E2761"/>
-                </a:solidFill>
-                <a:latin typeface="Cambria" pitchFamily="34" charset="0"/>
-                <a:ea typeface="Cambria" pitchFamily="34" charset="-122"/>
-                <a:cs typeface="Cambria" pitchFamily="34" charset="-120"/>
-              </a:rPr>
-              <a:t>04 Benefits / HHS Caseworker</a:t>
-            </a:r>
-            <a:endParaRPr lang="en-US" sz="1450" dirty="0"/>
-          </a:p>
-        </p:txBody>
-      </p:sp>
-      <p:sp>
-        <p:nvSpPr>
-          <p:cNvPr id="15" name="Text 13"/>
-          <p:cNvSpPr/>
-          <p:nvPr/>
-        </p:nvSpPr>
-        <p:spPr>
-          <a:xfrm>
-            <a:off x="9189720" y="2560320"/>
-            <a:ext cx="2286000" cy="960120"/>
-          </a:xfrm>
-          <a:prstGeom prst="rect">
-            <a:avLst/>
-          </a:prstGeom>
-          <a:noFill/>
-          <a:ln/>
-        </p:spPr>
-        <p:txBody>
-          <a:bodyPr wrap="square" rtlCol="0" anchor="ctr"/>
-          <a:lstStyle/>
-          <a:p>
-            <a:pPr indent="0" marL="0">
-              <a:buNone/>
-            </a:pPr>
-            <a:r>
-              <a:rPr lang="en-US" sz="1200" dirty="0">
-                <a:solidFill>
-                  <a:srgbClr val="1B2440"/>
-                </a:solidFill>
-              </a:rPr>
-              <a:t>Evidence assembly; deterministic eligibility + human</a:t>
-            </a:r>
-            <a:endParaRPr lang="en-US" sz="1200" dirty="0"/>
-          </a:p>
-        </p:txBody>
-      </p:sp>
-      <p:sp>
-        <p:nvSpPr>
-          <p:cNvPr id="16" name="Shape 14"/>
-          <p:cNvSpPr/>
-          <p:nvPr/>
-        </p:nvSpPr>
-        <p:spPr>
-          <a:xfrm>
-            <a:off x="640080" y="3931920"/>
-            <a:ext cx="2606040" cy="1874520"/>
-          </a:xfrm>
-          <a:prstGeom prst="roundRect">
-            <a:avLst>
-              <a:gd name="adj" fmla="val 3415"/>
-            </a:avLst>
-          </a:prstGeom>
-          <a:solidFill>
-            <a:srgbClr val="F4F7FE"/>
-          </a:solidFill>
-          <a:ln/>
-          <a:effectLst>
-            <a:outerShdw sx="100000" sy="100000" kx="0" ky="0" algn="bl" rotWithShape="0" blurRad="88900" dist="38100" dir="5400000">
-              <a:srgbClr val="000000">
-                <a:alpha val="16000"/>
-              </a:srgbClr>
-            </a:outerShdw>
-          </a:effectLst>
-        </p:spPr>
-      </p:sp>
-      <p:sp>
-        <p:nvSpPr>
-          <p:cNvPr id="17" name="Text 15"/>
-          <p:cNvSpPr/>
-          <p:nvPr/>
-        </p:nvSpPr>
-        <p:spPr>
-          <a:xfrm>
-            <a:off x="822960" y="4114800"/>
-            <a:ext cx="2286000" cy="548640"/>
-          </a:xfrm>
-          <a:prstGeom prst="rect">
-            <a:avLst/>
-          </a:prstGeom>
-          <a:noFill/>
-          <a:ln/>
-        </p:spPr>
-        <p:txBody>
-          <a:bodyPr wrap="square" rtlCol="0" anchor="ctr"/>
-          <a:lstStyle/>
-          <a:p>
-            <a:pPr indent="0" marL="0">
-              <a:buNone/>
-            </a:pPr>
-            <a:r>
-              <a:rPr lang="en-US" sz="1450" b="1" dirty="0">
-                <a:solidFill>
-                  <a:srgbClr val="1E2761"/>
-                </a:solidFill>
-                <a:latin typeface="Cambria" pitchFamily="34" charset="0"/>
-                <a:ea typeface="Cambria" pitchFamily="34" charset="-122"/>
-                <a:cs typeface="Cambria" pitchFamily="34" charset="-120"/>
-              </a:rPr>
-              <a:t>05 Public Records / FOIA</a:t>
-            </a:r>
-            <a:endParaRPr lang="en-US" sz="1450" dirty="0"/>
-          </a:p>
-        </p:txBody>
-      </p:sp>
-      <p:sp>
-        <p:nvSpPr>
-          <p:cNvPr id="18" name="Text 16"/>
-          <p:cNvSpPr/>
-          <p:nvPr/>
-        </p:nvSpPr>
-        <p:spPr>
-          <a:xfrm>
-            <a:off x="822960" y="4709160"/>
-            <a:ext cx="2286000" cy="960120"/>
-          </a:xfrm>
-          <a:prstGeom prst="rect">
-            <a:avLst/>
-          </a:prstGeom>
-          <a:noFill/>
-          <a:ln/>
-        </p:spPr>
-        <p:txBody>
-          <a:bodyPr wrap="square" rtlCol="0" anchor="ctr"/>
-          <a:lstStyle/>
-          <a:p>
-            <a:pPr indent="0" marL="0">
-              <a:buNone/>
-            </a:pPr>
-            <a:r>
-              <a:rPr lang="en-US" sz="1200" dirty="0">
-                <a:solidFill>
-                  <a:srgbClr val="1B2440"/>
-                </a:solidFill>
-              </a:rPr>
-              <a:t>Search, classify, redact; release stays human</a:t>
-            </a:r>
-            <a:endParaRPr lang="en-US" sz="1200" dirty="0"/>
-          </a:p>
-        </p:txBody>
-      </p:sp>
-      <p:sp>
-        <p:nvSpPr>
-          <p:cNvPr id="19" name="Shape 17"/>
-          <p:cNvSpPr/>
-          <p:nvPr/>
-        </p:nvSpPr>
-        <p:spPr>
-          <a:xfrm>
-            <a:off x="3429000" y="3931920"/>
-            <a:ext cx="2606040" cy="1874520"/>
-          </a:xfrm>
-          <a:prstGeom prst="roundRect">
-            <a:avLst>
-              <a:gd name="adj" fmla="val 3415"/>
-            </a:avLst>
-          </a:prstGeom>
-          <a:solidFill>
-            <a:srgbClr val="F4F7FE"/>
-          </a:solidFill>
-          <a:ln/>
-          <a:effectLst>
-            <a:outerShdw sx="100000" sy="100000" kx="0" ky="0" algn="bl" rotWithShape="0" blurRad="88900" dist="38100" dir="5400000">
-              <a:srgbClr val="000000">
-                <a:alpha val="16000"/>
-              </a:srgbClr>
-            </a:outerShdw>
-          </a:effectLst>
-        </p:spPr>
-      </p:sp>
-      <p:sp>
-        <p:nvSpPr>
-          <p:cNvPr id="20" name="Text 18"/>
-          <p:cNvSpPr/>
-          <p:nvPr/>
-        </p:nvSpPr>
-        <p:spPr>
-          <a:xfrm>
-            <a:off x="3611880" y="4114800"/>
-            <a:ext cx="2286000" cy="548640"/>
-          </a:xfrm>
-          <a:prstGeom prst="rect">
-            <a:avLst/>
-          </a:prstGeom>
-          <a:noFill/>
-          <a:ln/>
-        </p:spPr>
-        <p:txBody>
-          <a:bodyPr wrap="square" rtlCol="0" anchor="ctr"/>
-          <a:lstStyle/>
-          <a:p>
-            <a:pPr indent="0" marL="0">
-              <a:buNone/>
-            </a:pPr>
-            <a:r>
-              <a:rPr lang="en-US" sz="1450" b="1" dirty="0">
-                <a:solidFill>
-                  <a:srgbClr val="1E2761"/>
-                </a:solidFill>
-                <a:latin typeface="Cambria" pitchFamily="34" charset="0"/>
-                <a:ea typeface="Cambria" pitchFamily="34" charset="-122"/>
-                <a:cs typeface="Cambria" pitchFamily="34" charset="-120"/>
-              </a:rPr>
-              <a:t>06 Procurement &amp; Grants</a:t>
-            </a:r>
-            <a:endParaRPr lang="en-US" sz="1450" dirty="0"/>
-          </a:p>
-        </p:txBody>
-      </p:sp>
-      <p:sp>
-        <p:nvSpPr>
-          <p:cNvPr id="21" name="Text 19"/>
-          <p:cNvSpPr/>
-          <p:nvPr/>
-        </p:nvSpPr>
-        <p:spPr>
-          <a:xfrm>
-            <a:off x="3611880" y="4709160"/>
-            <a:ext cx="2286000" cy="960120"/>
-          </a:xfrm>
-          <a:prstGeom prst="rect">
-            <a:avLst/>
-          </a:prstGeom>
-          <a:noFill/>
-          <a:ln/>
-        </p:spPr>
-        <p:txBody>
-          <a:bodyPr wrap="square" rtlCol="0" anchor="ctr"/>
-          <a:lstStyle/>
-          <a:p>
-            <a:pPr indent="0" marL="0">
-              <a:buNone/>
-            </a:pPr>
-            <a:r>
-              <a:rPr lang="en-US" sz="1200" dirty="0">
-                <a:solidFill>
-                  <a:srgbClr val="1B2440"/>
-                </a:solidFill>
-              </a:rPr>
-              <a:t>Draft RFPs, organize bids; award stays human</a:t>
-            </a:r>
-            <a:endParaRPr lang="en-US" sz="1200" dirty="0"/>
-          </a:p>
-        </p:txBody>
-      </p:sp>
-      <p:sp>
-        <p:nvSpPr>
-          <p:cNvPr id="22" name="Shape 20"/>
-          <p:cNvSpPr/>
-          <p:nvPr/>
-        </p:nvSpPr>
-        <p:spPr>
-          <a:xfrm>
-            <a:off x="6217920" y="3931920"/>
-            <a:ext cx="2606040" cy="1874520"/>
-          </a:xfrm>
-          <a:prstGeom prst="roundRect">
-            <a:avLst>
-              <a:gd name="adj" fmla="val 3415"/>
-            </a:avLst>
-          </a:prstGeom>
-          <a:solidFill>
-            <a:srgbClr val="F4F7FE"/>
-          </a:solidFill>
-          <a:ln/>
-          <a:effectLst>
-            <a:outerShdw sx="100000" sy="100000" kx="0" ky="0" algn="bl" rotWithShape="0" blurRad="88900" dist="38100" dir="5400000">
-              <a:srgbClr val="000000">
-                <a:alpha val="16000"/>
-              </a:srgbClr>
-            </a:outerShdw>
-          </a:effectLst>
-        </p:spPr>
-      </p:sp>
-      <p:sp>
-        <p:nvSpPr>
-          <p:cNvPr id="23" name="Text 21"/>
-          <p:cNvSpPr/>
-          <p:nvPr/>
-        </p:nvSpPr>
-        <p:spPr>
-          <a:xfrm>
-            <a:off x="6400800" y="4114800"/>
-            <a:ext cx="2286000" cy="548640"/>
-          </a:xfrm>
-          <a:prstGeom prst="rect">
-            <a:avLst/>
-          </a:prstGeom>
-          <a:noFill/>
-          <a:ln/>
-        </p:spPr>
-        <p:txBody>
-          <a:bodyPr wrap="square" rtlCol="0" anchor="ctr"/>
-          <a:lstStyle/>
-          <a:p>
-            <a:pPr indent="0" marL="0">
-              <a:buNone/>
-            </a:pPr>
-            <a:r>
-              <a:rPr lang="en-US" sz="1450" b="1" dirty="0">
-                <a:solidFill>
-                  <a:srgbClr val="1E2761"/>
-                </a:solidFill>
-                <a:latin typeface="Cambria" pitchFamily="34" charset="0"/>
-                <a:ea typeface="Cambria" pitchFamily="34" charset="-122"/>
-                <a:cs typeface="Cambria" pitchFamily="34" charset="-120"/>
-              </a:rPr>
-              <a:t>07 GovOps IT Service Desk</a:t>
-            </a:r>
-            <a:endParaRPr lang="en-US" sz="1450" dirty="0"/>
-          </a:p>
-        </p:txBody>
-      </p:sp>
-      <p:sp>
-        <p:nvSpPr>
-          <p:cNvPr id="24" name="Text 22"/>
-          <p:cNvSpPr/>
-          <p:nvPr/>
-        </p:nvSpPr>
-        <p:spPr>
-          <a:xfrm>
-            <a:off x="6400800" y="4709160"/>
-            <a:ext cx="2286000" cy="960120"/>
-          </a:xfrm>
-          <a:prstGeom prst="rect">
-            <a:avLst/>
-          </a:prstGeom>
-          <a:noFill/>
-          <a:ln/>
-        </p:spPr>
-        <p:txBody>
-          <a:bodyPr wrap="square" rtlCol="0" anchor="ctr"/>
-          <a:lstStyle/>
-          <a:p>
-            <a:pPr indent="0" marL="0">
-              <a:buNone/>
-            </a:pPr>
-            <a:r>
-              <a:rPr lang="en-US" sz="1200" dirty="0">
-                <a:solidFill>
-                  <a:srgbClr val="1B2440"/>
-                </a:solidFill>
-              </a:rPr>
-              <a:t>Triage, tickets, runbooks, modernization</a:t>
-            </a:r>
-            <a:endParaRPr lang="en-US" sz="1200" dirty="0"/>
-          </a:p>
-        </p:txBody>
-      </p:sp>
-      <p:sp>
-        <p:nvSpPr>
-          <p:cNvPr id="25" name="Shape 23"/>
-          <p:cNvSpPr/>
-          <p:nvPr/>
-        </p:nvSpPr>
-        <p:spPr>
-          <a:xfrm>
-            <a:off x="9006840" y="3931920"/>
-            <a:ext cx="2606040" cy="1874520"/>
-          </a:xfrm>
-          <a:prstGeom prst="roundRect">
-            <a:avLst>
-              <a:gd name="adj" fmla="val 3415"/>
-            </a:avLst>
-          </a:prstGeom>
-          <a:solidFill>
-            <a:srgbClr val="F4F7FE"/>
-          </a:solidFill>
-          <a:ln/>
-          <a:effectLst>
-            <a:outerShdw sx="100000" sy="100000" kx="0" ky="0" algn="bl" rotWithShape="0" blurRad="88900" dist="38100" dir="5400000">
-              <a:srgbClr val="000000">
-                <a:alpha val="16000"/>
-              </a:srgbClr>
-            </a:outerShdw>
-          </a:effectLst>
-        </p:spPr>
-      </p:sp>
-      <p:sp>
-        <p:nvSpPr>
-          <p:cNvPr id="26" name="Text 24"/>
-          <p:cNvSpPr/>
-          <p:nvPr/>
-        </p:nvSpPr>
-        <p:spPr>
-          <a:xfrm>
-            <a:off x="9189720" y="4114800"/>
-            <a:ext cx="2286000" cy="548640"/>
-          </a:xfrm>
-          <a:prstGeom prst="rect">
-            <a:avLst/>
-          </a:prstGeom>
-          <a:noFill/>
-          <a:ln/>
-        </p:spPr>
-        <p:txBody>
-          <a:bodyPr wrap="square" rtlCol="0" anchor="ctr"/>
-          <a:lstStyle/>
-          <a:p>
-            <a:pPr indent="0" marL="0">
-              <a:buNone/>
-            </a:pPr>
-            <a:r>
-              <a:rPr lang="en-US" sz="1450" b="1" dirty="0">
-                <a:solidFill>
-                  <a:srgbClr val="1E2761"/>
-                </a:solidFill>
-                <a:latin typeface="Cambria" pitchFamily="34" charset="0"/>
-                <a:ea typeface="Cambria" pitchFamily="34" charset="-122"/>
-                <a:cs typeface="Cambria" pitchFamily="34" charset="-120"/>
-              </a:rPr>
-              <a:t>08 Public Safety / Health</a:t>
-            </a:r>
-            <a:endParaRPr lang="en-US" sz="1450" dirty="0"/>
-          </a:p>
-        </p:txBody>
-      </p:sp>
-      <p:sp>
-        <p:nvSpPr>
-          <p:cNvPr id="27" name="Text 25"/>
-          <p:cNvSpPr/>
-          <p:nvPr/>
-        </p:nvSpPr>
-        <p:spPr>
-          <a:xfrm>
-            <a:off x="9189720" y="4709160"/>
-            <a:ext cx="2286000" cy="960120"/>
-          </a:xfrm>
-          <a:prstGeom prst="rect">
-            <a:avLst/>
-          </a:prstGeom>
-          <a:noFill/>
-          <a:ln/>
-        </p:spPr>
-        <p:txBody>
-          <a:bodyPr wrap="square" rtlCol="0" anchor="ctr"/>
-          <a:lstStyle/>
-          <a:p>
-            <a:pPr indent="0" marL="0">
-              <a:buNone/>
-            </a:pPr>
-            <a:r>
-              <a:rPr lang="en-US" sz="1200" dirty="0">
-                <a:solidFill>
-                  <a:srgbClr val="1B2440"/>
-                </a:solidFill>
-              </a:rPr>
-              <a:t>Summaries, reports, validated surveillance queries</a:t>
-            </a:r>
-            <a:endParaRPr lang="en-US" sz="1200" dirty="0"/>
-          </a:p>
-        </p:txBody>
-      </p:sp>
-      <p:sp>
-        <p:nvSpPr>
-          <p:cNvPr id="28" name="Text 26"/>
-          <p:cNvSpPr/>
-          <p:nvPr/>
-        </p:nvSpPr>
-        <p:spPr>
-          <a:xfrm>
-            <a:off x="640080" y="6263640"/>
-            <a:ext cx="10972800" cy="274320"/>
-          </a:xfrm>
-          <a:prstGeom prst="rect">
-            <a:avLst/>
-          </a:prstGeom>
-          <a:noFill/>
-          <a:ln/>
-        </p:spPr>
-        <p:txBody>
-          <a:bodyPr wrap="square" rtlCol="0" anchor="ctr"/>
-          <a:lstStyle/>
-          <a:p>
-            <a:pPr indent="0" marL="0">
-              <a:buNone/>
-            </a:pPr>
-            <a:r>
-              <a:rPr lang="en-US" sz="1200" i="1" dirty="0">
-                <a:solidFill>
-                  <a:srgbClr val="5B6488"/>
-                </a:solidFill>
-              </a:rPr>
-              <a:t>Each agent prepares; a human owns every legally consequential decision — enforced in code.</a:t>
-            </a:r>
-            <a:endParaRPr lang="en-US" sz="1200" dirty="0"/>
+              <a:rPr lang="en-US" sz="830" i="1" dirty="0">
+                <a:solidFill>
+                  <a:srgbClr val="5A6B7B"/>
+                </a:solidFill>
+                <a:latin typeface="Calibri" pitchFamily="34" charset="0"/>
+                <a:ea typeface="Calibri" pitchFamily="34" charset="-122"/>
+                <a:cs typeface="Calibri" pitchFamily="34" charset="-120"/>
+              </a:rPr>
+              <a:t>Sources: NASCIO 2025–2026; GAO-25-107795; ADA.gov 2026 IFR. See DECK-SOURCES.md.</a:t>
+            </a:r>
+            <a:endParaRPr lang="en-US" sz="830" dirty="0"/>
           </a:p>
         </p:txBody>
       </p:sp>
@@ -3099,7 +2918,7 @@
     <p:bg>
       <p:bgPr>
         <a:solidFill>
-          <a:srgbClr val="1E2761"/>
+          <a:srgbClr val="F4F5F7"/>
         </a:solidFill>
       </p:bgPr>
     </p:bg>
@@ -3125,8 +2944,8 @@
         </p:nvSpPr>
         <p:spPr>
           <a:xfrm>
-            <a:off x="731520" y="502920"/>
-            <a:ext cx="10058400" cy="365760"/>
+            <a:off x="822960" y="502920"/>
+            <a:ext cx="10515600" cy="310896"/>
           </a:xfrm>
           <a:prstGeom prst="rect">
             <a:avLst/>
@@ -3142,14 +2961,17 @@
               <a:buNone/>
             </a:pPr>
             <a:r>
-              <a:rPr lang="en-US" sz="1300" b="1" spc="200" kern="0" dirty="0">
-                <a:solidFill>
-                  <a:srgbClr val="2E8BC0"/>
-                </a:solidFill>
-              </a:rPr>
-              <a:t>WHY IT'S DIFFERENT</a:t>
-            </a:r>
-            <a:endParaRPr lang="en-US" sz="1300" dirty="0"/>
+              <a:rPr lang="en-US" sz="1200" b="1" spc="200" kern="0" dirty="0">
+                <a:solidFill>
+                  <a:srgbClr val="ED7100"/>
+                </a:solidFill>
+                <a:latin typeface="Calibri" pitchFamily="34" charset="0"/>
+                <a:ea typeface="Calibri" pitchFamily="34" charset="-122"/>
+                <a:cs typeface="Calibri" pitchFamily="34" charset="-120"/>
+              </a:rPr>
+              <a:t>THE AGENT WORKFLOW — GOVERNED, STEP BY STEP</a:t>
+            </a:r>
+            <a:endParaRPr lang="en-US" sz="1200" dirty="0"/>
           </a:p>
         </p:txBody>
       </p:sp>
@@ -3161,8 +2983,8 @@
         </p:nvSpPr>
         <p:spPr>
           <a:xfrm>
-            <a:off x="731520" y="914400"/>
-            <a:ext cx="10972800" cy="731520"/>
+            <a:off x="822960" y="960120"/>
+            <a:ext cx="10515600" cy="548640"/>
           </a:xfrm>
           <a:prstGeom prst="rect">
             <a:avLst/>
@@ -3178,17 +3000,17 @@
               <a:buNone/>
             </a:pPr>
             <a:r>
-              <a:rPr lang="en-US" sz="2700" b="1" dirty="0">
-                <a:solidFill>
-                  <a:srgbClr val="FFFFFF"/>
-                </a:solidFill>
-                <a:latin typeface="Cambria" pitchFamily="34" charset="0"/>
-                <a:ea typeface="Cambria" pitchFamily="34" charset="-122"/>
-                <a:cs typeface="Cambria" pitchFamily="34" charset="-120"/>
-              </a:rPr>
-              <a:t>The agents are not the product. The governed platform is.</a:t>
-            </a:r>
-            <a:endParaRPr lang="en-US" sz="2700" dirty="0"/>
+              <a:rPr lang="en-US" sz="2400" b="1" dirty="0">
+                <a:solidFill>
+                  <a:srgbClr val="232F3E"/>
+                </a:solidFill>
+                <a:latin typeface="Trebuchet MS" pitchFamily="34" charset="0"/>
+                <a:ea typeface="Trebuchet MS" pitchFamily="34" charset="-122"/>
+                <a:cs typeface="Trebuchet MS" pitchFamily="34" charset="-120"/>
+              </a:rPr>
+              <a:t>One pattern, eight agents: ground → act safely → human gate → audit — reused everywhere.</a:t>
+            </a:r>
+            <a:endParaRPr lang="en-US" sz="2400" dirty="0"/>
           </a:p>
         </p:txBody>
       </p:sp>
@@ -3200,37 +3022,55 @@
         </p:nvSpPr>
         <p:spPr>
           <a:xfrm>
-            <a:off x="731520" y="1828800"/>
-            <a:ext cx="5212080" cy="1737360"/>
+            <a:off x="822960" y="1920240"/>
+            <a:ext cx="1898294" cy="3017520"/>
           </a:xfrm>
           <a:prstGeom prst="roundRect">
             <a:avLst>
-              <a:gd name="adj" fmla="val 3684"/>
+              <a:gd name="adj" fmla="val 3854"/>
             </a:avLst>
           </a:prstGeom>
           <a:solidFill>
-            <a:srgbClr val="2A376E"/>
+            <a:srgbClr val="FFFFFF"/>
           </a:solidFill>
-          <a:ln/>
-          <a:effectLst>
-            <a:outerShdw sx="100000" sy="100000" kx="0" ky="0" algn="bl" rotWithShape="0" blurRad="88900" dist="38100" dir="5400000">
-              <a:srgbClr val="000000">
-                <a:alpha val="16000"/>
-              </a:srgbClr>
-            </a:outerShdw>
-          </a:effectLst>
-        </p:spPr>
-      </p:sp>
-      <p:sp>
-        <p:nvSpPr>
-          <p:cNvPr id="5" name="Text 3"/>
-          <p:cNvSpPr/>
-          <p:nvPr/>
-        </p:nvSpPr>
-        <p:spPr>
-          <a:xfrm>
-            <a:off x="1005840" y="2011680"/>
-            <a:ext cx="4663440" cy="365760"/>
+          <a:ln w="12700">
+            <a:solidFill>
+              <a:srgbClr val="C9D3DC"/>
+            </a:solidFill>
+            <a:prstDash val="solid"/>
+          </a:ln>
+        </p:spPr>
+      </p:sp>
+      <p:sp>
+        <p:nvSpPr>
+          <p:cNvPr id="5" name="Shape 3"/>
+          <p:cNvSpPr/>
+          <p:nvPr/>
+        </p:nvSpPr>
+        <p:spPr>
+          <a:xfrm>
+            <a:off x="987552" y="2103120"/>
+            <a:ext cx="457200" cy="457200"/>
+          </a:xfrm>
+          <a:prstGeom prst="ellipse">
+            <a:avLst/>
+          </a:prstGeom>
+          <a:solidFill>
+            <a:srgbClr val="232F3E"/>
+          </a:solidFill>
+          <a:ln/>
+        </p:spPr>
+      </p:sp>
+      <p:sp>
+        <p:nvSpPr>
+          <p:cNvPr id="6" name="Text 4"/>
+          <p:cNvSpPr/>
+          <p:nvPr/>
+        </p:nvSpPr>
+        <p:spPr>
+          <a:xfrm>
+            <a:off x="987552" y="2103120"/>
+            <a:ext cx="457200" cy="457200"/>
           </a:xfrm>
           <a:prstGeom prst="rect">
             <a:avLst/>
@@ -3242,34 +3082,118 @@
           <a:bodyPr wrap="square" rtlCol="0" anchor="ctr"/>
           <a:lstStyle/>
           <a:p>
-            <a:pPr indent="0" marL="0">
-              <a:buNone/>
-            </a:pPr>
-            <a:r>
-              <a:rPr lang="en-US" sz="1650" b="1" dirty="0">
-                <a:solidFill>
-                  <a:srgbClr val="FFFFFF"/>
-                </a:solidFill>
-                <a:latin typeface="Cambria" pitchFamily="34" charset="0"/>
-                <a:ea typeface="Cambria" pitchFamily="34" charset="-122"/>
-                <a:cs typeface="Cambria" pitchFamily="34" charset="-120"/>
-              </a:rPr>
-              <a:t>Deny-by-default gateway</a:t>
-            </a:r>
-            <a:endParaRPr lang="en-US" sz="1650" dirty="0"/>
-          </a:p>
-        </p:txBody>
-      </p:sp>
-      <p:sp>
-        <p:nvSpPr>
-          <p:cNvPr id="6" name="Text 4"/>
-          <p:cNvSpPr/>
-          <p:nvPr/>
-        </p:nvSpPr>
-        <p:spPr>
-          <a:xfrm>
-            <a:off x="1005840" y="2468880"/>
-            <a:ext cx="4709160" cy="1005840"/>
+            <a:pPr algn="ctr" indent="0" marL="0">
+              <a:buNone/>
+            </a:pPr>
+            <a:r>
+              <a:rPr lang="en-US" sz="1800" b="1" dirty="0">
+                <a:solidFill>
+                  <a:srgbClr val="FF9900"/>
+                </a:solidFill>
+                <a:latin typeface="Trebuchet MS" pitchFamily="34" charset="0"/>
+                <a:ea typeface="Trebuchet MS" pitchFamily="34" charset="-122"/>
+                <a:cs typeface="Trebuchet MS" pitchFamily="34" charset="-120"/>
+              </a:rPr>
+              <a:t>1</a:t>
+            </a:r>
+            <a:endParaRPr lang="en-US" sz="1800" dirty="0"/>
+          </a:p>
+        </p:txBody>
+      </p:sp>
+      <p:sp>
+        <p:nvSpPr>
+          <p:cNvPr id="7" name="Text 5"/>
+          <p:cNvSpPr/>
+          <p:nvPr/>
+        </p:nvSpPr>
+        <p:spPr>
+          <a:xfrm>
+            <a:off x="987552" y="2670048"/>
+            <a:ext cx="1569110" cy="640080"/>
+          </a:xfrm>
+          <a:prstGeom prst="rect">
+            <a:avLst/>
+          </a:prstGeom>
+          <a:noFill/>
+          <a:ln/>
+        </p:spPr>
+        <p:txBody>
+          <a:bodyPr wrap="square" rtlCol="0" anchor="t"/>
+          <a:lstStyle/>
+          <a:p>
+            <a:pPr indent="0" marL="0">
+              <a:lnSpc>
+                <a:spcPct val="98000"/>
+              </a:lnSpc>
+              <a:buNone/>
+            </a:pPr>
+            <a:r>
+              <a:rPr lang="en-US" sz="1350" b="1" dirty="0">
+                <a:solidFill>
+                  <a:srgbClr val="232F3E"/>
+                </a:solidFill>
+                <a:latin typeface="Calibri" pitchFamily="34" charset="0"/>
+                <a:ea typeface="Calibri" pitchFamily="34" charset="-122"/>
+                <a:cs typeface="Calibri" pitchFamily="34" charset="-120"/>
+              </a:rPr>
+              <a:t>Resident-facing</a:t>
+            </a:r>
+            <a:endParaRPr lang="en-US" sz="1350" dirty="0"/>
+          </a:p>
+        </p:txBody>
+      </p:sp>
+      <p:sp>
+        <p:nvSpPr>
+          <p:cNvPr id="8" name="Text 6"/>
+          <p:cNvSpPr/>
+          <p:nvPr/>
+        </p:nvSpPr>
+        <p:spPr>
+          <a:xfrm>
+            <a:off x="987552" y="3310128"/>
+            <a:ext cx="1569110" cy="1280160"/>
+          </a:xfrm>
+          <a:prstGeom prst="rect">
+            <a:avLst/>
+          </a:prstGeom>
+          <a:noFill/>
+          <a:ln/>
+        </p:spPr>
+        <p:txBody>
+          <a:bodyPr wrap="square" rtlCol="0" anchor="t"/>
+          <a:lstStyle/>
+          <a:p>
+            <a:pPr indent="0" marL="0">
+              <a:lnSpc>
+                <a:spcPct val="104000"/>
+              </a:lnSpc>
+              <a:buNone/>
+            </a:pPr>
+            <a:r>
+              <a:rPr lang="en-US" sz="1050" dirty="0">
+                <a:solidFill>
+                  <a:srgbClr val="5A6B7B"/>
+                </a:solidFill>
+                <a:latin typeface="Calibri" pitchFamily="34" charset="0"/>
+                <a:ea typeface="Calibri" pitchFamily="34" charset="-122"/>
+                <a:cs typeface="Calibri" pitchFamily="34" charset="-120"/>
+              </a:rPr>
+              <a:t>311 services and forms/IDP — the front door and the intake.</a:t>
+            </a:r>
+            <a:endParaRPr lang="en-US" sz="1050" dirty="0"/>
+          </a:p>
+        </p:txBody>
+      </p:sp>
+      <p:sp>
+        <p:nvSpPr>
+          <p:cNvPr id="9" name="Text 7"/>
+          <p:cNvSpPr/>
+          <p:nvPr/>
+        </p:nvSpPr>
+        <p:spPr>
+          <a:xfrm>
+            <a:off x="987552" y="4553712"/>
+            <a:ext cx="1569110" cy="310896"/>
           </a:xfrm>
           <a:prstGeom prst="rect">
             <a:avLst/>
@@ -3285,56 +3209,116 @@
               <a:buNone/>
             </a:pPr>
             <a:r>
-              <a:rPr lang="en-US" sz="1300" dirty="0">
-                <a:solidFill>
-                  <a:srgbClr val="CADCFC"/>
-                </a:solidFill>
-              </a:rPr>
-              <a:t>Agent grant ∩ user entitlement — the agent can never exceed the employee. Scoped tokens, masked append-only audit.</a:t>
-            </a:r>
-            <a:endParaRPr lang="en-US" sz="1300" dirty="0"/>
-          </a:p>
-        </p:txBody>
-      </p:sp>
-      <p:sp>
-        <p:nvSpPr>
-          <p:cNvPr id="7" name="Shape 5"/>
-          <p:cNvSpPr/>
-          <p:nvPr/>
-        </p:nvSpPr>
-        <p:spPr>
-          <a:xfrm>
-            <a:off x="6217920" y="1828800"/>
-            <a:ext cx="5212080" cy="1737360"/>
+              <a:rPr lang="en-US" sz="870" b="1" i="1" dirty="0">
+                <a:solidFill>
+                  <a:srgbClr val="ED7100"/>
+                </a:solidFill>
+                <a:latin typeface="Calibri" pitchFamily="34" charset="0"/>
+                <a:ea typeface="Calibri" pitchFamily="34" charset="-122"/>
+                <a:cs typeface="Calibri" pitchFamily="34" charset="-120"/>
+              </a:rPr>
+              <a:t>Agents 01–02</a:t>
+            </a:r>
+            <a:endParaRPr lang="en-US" sz="870" dirty="0"/>
+          </a:p>
+        </p:txBody>
+      </p:sp>
+      <p:sp>
+        <p:nvSpPr>
+          <p:cNvPr id="10" name="Text 8"/>
+          <p:cNvSpPr/>
+          <p:nvPr/>
+        </p:nvSpPr>
+        <p:spPr>
+          <a:xfrm>
+            <a:off x="2702966" y="3246120"/>
+            <a:ext cx="292608" cy="365760"/>
+          </a:xfrm>
+          <a:prstGeom prst="rect">
+            <a:avLst/>
+          </a:prstGeom>
+          <a:noFill/>
+          <a:ln/>
+        </p:spPr>
+        <p:txBody>
+          <a:bodyPr wrap="square" rtlCol="0" anchor="ctr"/>
+          <a:lstStyle/>
+          <a:p>
+            <a:pPr algn="ctr" indent="0" marL="0">
+              <a:buNone/>
+            </a:pPr>
+            <a:r>
+              <a:rPr lang="en-US" sz="1600" b="1" dirty="0">
+                <a:solidFill>
+                  <a:srgbClr val="FF9900"/>
+                </a:solidFill>
+                <a:latin typeface="Calibri" pitchFamily="34" charset="0"/>
+                <a:ea typeface="Calibri" pitchFamily="34" charset="-122"/>
+                <a:cs typeface="Calibri" pitchFamily="34" charset="-120"/>
+              </a:rPr>
+              <a:t>▸</a:t>
+            </a:r>
+            <a:endParaRPr lang="en-US" sz="1600" dirty="0"/>
+          </a:p>
+        </p:txBody>
+      </p:sp>
+      <p:sp>
+        <p:nvSpPr>
+          <p:cNvPr id="11" name="Shape 9"/>
+          <p:cNvSpPr/>
+          <p:nvPr/>
+        </p:nvSpPr>
+        <p:spPr>
+          <a:xfrm>
+            <a:off x="2977286" y="1920240"/>
+            <a:ext cx="1898294" cy="3017520"/>
           </a:xfrm>
           <a:prstGeom prst="roundRect">
             <a:avLst>
-              <a:gd name="adj" fmla="val 3684"/>
+              <a:gd name="adj" fmla="val 3854"/>
             </a:avLst>
           </a:prstGeom>
           <a:solidFill>
-            <a:srgbClr val="2A376E"/>
+            <a:srgbClr val="FFFFFF"/>
           </a:solidFill>
-          <a:ln/>
-          <a:effectLst>
-            <a:outerShdw sx="100000" sy="100000" kx="0" ky="0" algn="bl" rotWithShape="0" blurRad="88900" dist="38100" dir="5400000">
-              <a:srgbClr val="000000">
-                <a:alpha val="16000"/>
-              </a:srgbClr>
-            </a:outerShdw>
-          </a:effectLst>
-        </p:spPr>
-      </p:sp>
-      <p:sp>
-        <p:nvSpPr>
-          <p:cNvPr id="8" name="Text 6"/>
-          <p:cNvSpPr/>
-          <p:nvPr/>
-        </p:nvSpPr>
-        <p:spPr>
-          <a:xfrm>
-            <a:off x="6492240" y="2011680"/>
-            <a:ext cx="4663440" cy="365760"/>
+          <a:ln w="12700">
+            <a:solidFill>
+              <a:srgbClr val="C9D3DC"/>
+            </a:solidFill>
+            <a:prstDash val="solid"/>
+          </a:ln>
+        </p:spPr>
+      </p:sp>
+      <p:sp>
+        <p:nvSpPr>
+          <p:cNvPr id="12" name="Shape 10"/>
+          <p:cNvSpPr/>
+          <p:nvPr/>
+        </p:nvSpPr>
+        <p:spPr>
+          <a:xfrm>
+            <a:off x="3141878" y="2103120"/>
+            <a:ext cx="457200" cy="457200"/>
+          </a:xfrm>
+          <a:prstGeom prst="ellipse">
+            <a:avLst/>
+          </a:prstGeom>
+          <a:solidFill>
+            <a:srgbClr val="232F3E"/>
+          </a:solidFill>
+          <a:ln/>
+        </p:spPr>
+      </p:sp>
+      <p:sp>
+        <p:nvSpPr>
+          <p:cNvPr id="13" name="Text 11"/>
+          <p:cNvSpPr/>
+          <p:nvPr/>
+        </p:nvSpPr>
+        <p:spPr>
+          <a:xfrm>
+            <a:off x="3141878" y="2103120"/>
+            <a:ext cx="457200" cy="457200"/>
           </a:xfrm>
           <a:prstGeom prst="rect">
             <a:avLst/>
@@ -3346,34 +3330,118 @@
           <a:bodyPr wrap="square" rtlCol="0" anchor="ctr"/>
           <a:lstStyle/>
           <a:p>
-            <a:pPr indent="0" marL="0">
-              <a:buNone/>
-            </a:pPr>
-            <a:r>
-              <a:rPr lang="en-US" sz="1650" b="1" dirty="0">
-                <a:solidFill>
-                  <a:srgbClr val="FFFFFF"/>
-                </a:solidFill>
-                <a:latin typeface="Cambria" pitchFamily="34" charset="0"/>
-                <a:ea typeface="Cambria" pitchFamily="34" charset="-122"/>
-                <a:cs typeface="Cambria" pitchFamily="34" charset="-120"/>
-              </a:rPr>
-              <a:t>Human-in-the-loop, enforced</a:t>
-            </a:r>
-            <a:endParaRPr lang="en-US" sz="1650" dirty="0"/>
-          </a:p>
-        </p:txBody>
-      </p:sp>
-      <p:sp>
-        <p:nvSpPr>
-          <p:cNvPr id="9" name="Text 7"/>
-          <p:cNvSpPr/>
-          <p:nvPr/>
-        </p:nvSpPr>
-        <p:spPr>
-          <a:xfrm>
-            <a:off x="6492240" y="2468880"/>
-            <a:ext cx="4709160" cy="1005840"/>
+            <a:pPr algn="ctr" indent="0" marL="0">
+              <a:buNone/>
+            </a:pPr>
+            <a:r>
+              <a:rPr lang="en-US" sz="1800" b="1" dirty="0">
+                <a:solidFill>
+                  <a:srgbClr val="FF9900"/>
+                </a:solidFill>
+                <a:latin typeface="Trebuchet MS" pitchFamily="34" charset="0"/>
+                <a:ea typeface="Trebuchet MS" pitchFamily="34" charset="-122"/>
+                <a:cs typeface="Trebuchet MS" pitchFamily="34" charset="-120"/>
+              </a:rPr>
+              <a:t>2</a:t>
+            </a:r>
+            <a:endParaRPr lang="en-US" sz="1800" dirty="0"/>
+          </a:p>
+        </p:txBody>
+      </p:sp>
+      <p:sp>
+        <p:nvSpPr>
+          <p:cNvPr id="14" name="Text 12"/>
+          <p:cNvSpPr/>
+          <p:nvPr/>
+        </p:nvSpPr>
+        <p:spPr>
+          <a:xfrm>
+            <a:off x="3141878" y="2670048"/>
+            <a:ext cx="1569110" cy="640080"/>
+          </a:xfrm>
+          <a:prstGeom prst="rect">
+            <a:avLst/>
+          </a:prstGeom>
+          <a:noFill/>
+          <a:ln/>
+        </p:spPr>
+        <p:txBody>
+          <a:bodyPr wrap="square" rtlCol="0" anchor="t"/>
+          <a:lstStyle/>
+          <a:p>
+            <a:pPr indent="0" marL="0">
+              <a:lnSpc>
+                <a:spcPct val="98000"/>
+              </a:lnSpc>
+              <a:buNone/>
+            </a:pPr>
+            <a:r>
+              <a:rPr lang="en-US" sz="1350" b="1" dirty="0">
+                <a:solidFill>
+                  <a:srgbClr val="232F3E"/>
+                </a:solidFill>
+                <a:latin typeface="Calibri" pitchFamily="34" charset="0"/>
+                <a:ea typeface="Calibri" pitchFamily="34" charset="-122"/>
+                <a:cs typeface="Calibri" pitchFamily="34" charset="-120"/>
+              </a:rPr>
+              <a:t>Casework</a:t>
+            </a:r>
+            <a:endParaRPr lang="en-US" sz="1350" dirty="0"/>
+          </a:p>
+        </p:txBody>
+      </p:sp>
+      <p:sp>
+        <p:nvSpPr>
+          <p:cNvPr id="15" name="Text 13"/>
+          <p:cNvSpPr/>
+          <p:nvPr/>
+        </p:nvSpPr>
+        <p:spPr>
+          <a:xfrm>
+            <a:off x="3141878" y="3310128"/>
+            <a:ext cx="1569110" cy="1280160"/>
+          </a:xfrm>
+          <a:prstGeom prst="rect">
+            <a:avLst/>
+          </a:prstGeom>
+          <a:noFill/>
+          <a:ln/>
+        </p:spPr>
+        <p:txBody>
+          <a:bodyPr wrap="square" rtlCol="0" anchor="t"/>
+          <a:lstStyle/>
+          <a:p>
+            <a:pPr indent="0" marL="0">
+              <a:lnSpc>
+                <a:spcPct val="104000"/>
+              </a:lnSpc>
+              <a:buNone/>
+            </a:pPr>
+            <a:r>
+              <a:rPr lang="en-US" sz="1050" dirty="0">
+                <a:solidFill>
+                  <a:srgbClr val="5A6B7B"/>
+                </a:solidFill>
+                <a:latin typeface="Calibri" pitchFamily="34" charset="0"/>
+                <a:ea typeface="Calibri" pitchFamily="34" charset="-122"/>
+                <a:cs typeface="Calibri" pitchFamily="34" charset="-120"/>
+              </a:rPr>
+              <a:t>Permitting, benefits, records, procurement — governed decisions.</a:t>
+            </a:r>
+            <a:endParaRPr lang="en-US" sz="1050" dirty="0"/>
+          </a:p>
+        </p:txBody>
+      </p:sp>
+      <p:sp>
+        <p:nvSpPr>
+          <p:cNvPr id="16" name="Text 14"/>
+          <p:cNvSpPr/>
+          <p:nvPr/>
+        </p:nvSpPr>
+        <p:spPr>
+          <a:xfrm>
+            <a:off x="3141878" y="4553712"/>
+            <a:ext cx="1569110" cy="310896"/>
           </a:xfrm>
           <a:prstGeom prst="rect">
             <a:avLst/>
@@ -3389,56 +3457,116 @@
               <a:buNone/>
             </a:pPr>
             <a:r>
-              <a:rPr lang="en-US" sz="1300" dirty="0">
-                <a:solidFill>
-                  <a:srgbClr val="CADCFC"/>
-                </a:solidFill>
-              </a:rPr>
-              <a:t>High-risk writes block until a verified reviewer approves — framework-enforced, not documented.</a:t>
-            </a:r>
-            <a:endParaRPr lang="en-US" sz="1300" dirty="0"/>
-          </a:p>
-        </p:txBody>
-      </p:sp>
-      <p:sp>
-        <p:nvSpPr>
-          <p:cNvPr id="10" name="Shape 8"/>
-          <p:cNvSpPr/>
-          <p:nvPr/>
-        </p:nvSpPr>
-        <p:spPr>
-          <a:xfrm>
-            <a:off x="731520" y="3794760"/>
-            <a:ext cx="5212080" cy="1737360"/>
+              <a:rPr lang="en-US" sz="870" b="1" i="1" dirty="0">
+                <a:solidFill>
+                  <a:srgbClr val="ED7100"/>
+                </a:solidFill>
+                <a:latin typeface="Calibri" pitchFamily="34" charset="0"/>
+                <a:ea typeface="Calibri" pitchFamily="34" charset="-122"/>
+                <a:cs typeface="Calibri" pitchFamily="34" charset="-120"/>
+              </a:rPr>
+              <a:t>Agents 03–06</a:t>
+            </a:r>
+            <a:endParaRPr lang="en-US" sz="870" dirty="0"/>
+          </a:p>
+        </p:txBody>
+      </p:sp>
+      <p:sp>
+        <p:nvSpPr>
+          <p:cNvPr id="17" name="Text 15"/>
+          <p:cNvSpPr/>
+          <p:nvPr/>
+        </p:nvSpPr>
+        <p:spPr>
+          <a:xfrm>
+            <a:off x="4857293" y="3246120"/>
+            <a:ext cx="292608" cy="365760"/>
+          </a:xfrm>
+          <a:prstGeom prst="rect">
+            <a:avLst/>
+          </a:prstGeom>
+          <a:noFill/>
+          <a:ln/>
+        </p:spPr>
+        <p:txBody>
+          <a:bodyPr wrap="square" rtlCol="0" anchor="ctr"/>
+          <a:lstStyle/>
+          <a:p>
+            <a:pPr algn="ctr" indent="0" marL="0">
+              <a:buNone/>
+            </a:pPr>
+            <a:r>
+              <a:rPr lang="en-US" sz="1600" b="1" dirty="0">
+                <a:solidFill>
+                  <a:srgbClr val="FF9900"/>
+                </a:solidFill>
+                <a:latin typeface="Calibri" pitchFamily="34" charset="0"/>
+                <a:ea typeface="Calibri" pitchFamily="34" charset="-122"/>
+                <a:cs typeface="Calibri" pitchFamily="34" charset="-120"/>
+              </a:rPr>
+              <a:t>▸</a:t>
+            </a:r>
+            <a:endParaRPr lang="en-US" sz="1600" dirty="0"/>
+          </a:p>
+        </p:txBody>
+      </p:sp>
+      <p:sp>
+        <p:nvSpPr>
+          <p:cNvPr id="18" name="Shape 16"/>
+          <p:cNvSpPr/>
+          <p:nvPr/>
+        </p:nvSpPr>
+        <p:spPr>
+          <a:xfrm>
+            <a:off x="5131613" y="1920240"/>
+            <a:ext cx="1898294" cy="3017520"/>
           </a:xfrm>
           <a:prstGeom prst="roundRect">
             <a:avLst>
-              <a:gd name="adj" fmla="val 3684"/>
+              <a:gd name="adj" fmla="val 3854"/>
             </a:avLst>
           </a:prstGeom>
           <a:solidFill>
-            <a:srgbClr val="2A376E"/>
+            <a:srgbClr val="FFFFFF"/>
           </a:solidFill>
-          <a:ln/>
-          <a:effectLst>
-            <a:outerShdw sx="100000" sy="100000" kx="0" ky="0" algn="bl" rotWithShape="0" blurRad="88900" dist="38100" dir="5400000">
-              <a:srgbClr val="000000">
-                <a:alpha val="16000"/>
-              </a:srgbClr>
-            </a:outerShdw>
-          </a:effectLst>
-        </p:spPr>
-      </p:sp>
-      <p:sp>
-        <p:nvSpPr>
-          <p:cNvPr id="11" name="Text 9"/>
-          <p:cNvSpPr/>
-          <p:nvPr/>
-        </p:nvSpPr>
-        <p:spPr>
-          <a:xfrm>
-            <a:off x="1005840" y="3977640"/>
-            <a:ext cx="4663440" cy="365760"/>
+          <a:ln w="12700">
+            <a:solidFill>
+              <a:srgbClr val="C9D3DC"/>
+            </a:solidFill>
+            <a:prstDash val="solid"/>
+          </a:ln>
+        </p:spPr>
+      </p:sp>
+      <p:sp>
+        <p:nvSpPr>
+          <p:cNvPr id="19" name="Shape 17"/>
+          <p:cNvSpPr/>
+          <p:nvPr/>
+        </p:nvSpPr>
+        <p:spPr>
+          <a:xfrm>
+            <a:off x="5296205" y="2103120"/>
+            <a:ext cx="457200" cy="457200"/>
+          </a:xfrm>
+          <a:prstGeom prst="ellipse">
+            <a:avLst/>
+          </a:prstGeom>
+          <a:solidFill>
+            <a:srgbClr val="232F3E"/>
+          </a:solidFill>
+          <a:ln/>
+        </p:spPr>
+      </p:sp>
+      <p:sp>
+        <p:nvSpPr>
+          <p:cNvPr id="20" name="Text 18"/>
+          <p:cNvSpPr/>
+          <p:nvPr/>
+        </p:nvSpPr>
+        <p:spPr>
+          <a:xfrm>
+            <a:off x="5296205" y="2103120"/>
+            <a:ext cx="457200" cy="457200"/>
           </a:xfrm>
           <a:prstGeom prst="rect">
             <a:avLst/>
@@ -3450,34 +3578,118 @@
           <a:bodyPr wrap="square" rtlCol="0" anchor="ctr"/>
           <a:lstStyle/>
           <a:p>
-            <a:pPr indent="0" marL="0">
-              <a:buNone/>
-            </a:pPr>
-            <a:r>
-              <a:rPr lang="en-US" sz="1650" b="1" dirty="0">
-                <a:solidFill>
-                  <a:srgbClr val="FFFFFF"/>
-                </a:solidFill>
-                <a:latin typeface="Cambria" pitchFamily="34" charset="0"/>
-                <a:ea typeface="Cambria" pitchFamily="34" charset="-122"/>
-                <a:cs typeface="Cambria" pitchFamily="34" charset="-120"/>
-              </a:rPr>
-              <a:t>Regulated by design</a:t>
-            </a:r>
-            <a:endParaRPr lang="en-US" sz="1650" dirty="0"/>
-          </a:p>
-        </p:txBody>
-      </p:sp>
-      <p:sp>
-        <p:nvSpPr>
-          <p:cNvPr id="12" name="Text 10"/>
-          <p:cNvSpPr/>
-          <p:nvPr/>
-        </p:nvSpPr>
-        <p:spPr>
-          <a:xfrm>
-            <a:off x="1005840" y="4434840"/>
-            <a:ext cx="4709160" cy="1005840"/>
+            <a:pPr algn="ctr" indent="0" marL="0">
+              <a:buNone/>
+            </a:pPr>
+            <a:r>
+              <a:rPr lang="en-US" sz="1800" b="1" dirty="0">
+                <a:solidFill>
+                  <a:srgbClr val="FF9900"/>
+                </a:solidFill>
+                <a:latin typeface="Trebuchet MS" pitchFamily="34" charset="0"/>
+                <a:ea typeface="Trebuchet MS" pitchFamily="34" charset="-122"/>
+                <a:cs typeface="Trebuchet MS" pitchFamily="34" charset="-120"/>
+              </a:rPr>
+              <a:t>3</a:t>
+            </a:r>
+            <a:endParaRPr lang="en-US" sz="1800" dirty="0"/>
+          </a:p>
+        </p:txBody>
+      </p:sp>
+      <p:sp>
+        <p:nvSpPr>
+          <p:cNvPr id="21" name="Text 19"/>
+          <p:cNvSpPr/>
+          <p:nvPr/>
+        </p:nvSpPr>
+        <p:spPr>
+          <a:xfrm>
+            <a:off x="5296205" y="2670048"/>
+            <a:ext cx="1569110" cy="640080"/>
+          </a:xfrm>
+          <a:prstGeom prst="rect">
+            <a:avLst/>
+          </a:prstGeom>
+          <a:noFill/>
+          <a:ln/>
+        </p:spPr>
+        <p:txBody>
+          <a:bodyPr wrap="square" rtlCol="0" anchor="t"/>
+          <a:lstStyle/>
+          <a:p>
+            <a:pPr indent="0" marL="0">
+              <a:lnSpc>
+                <a:spcPct val="98000"/>
+              </a:lnSpc>
+              <a:buNone/>
+            </a:pPr>
+            <a:r>
+              <a:rPr lang="en-US" sz="1350" b="1" dirty="0">
+                <a:solidFill>
+                  <a:srgbClr val="232F3E"/>
+                </a:solidFill>
+                <a:latin typeface="Calibri" pitchFamily="34" charset="0"/>
+                <a:ea typeface="Calibri" pitchFamily="34" charset="-122"/>
+                <a:cs typeface="Calibri" pitchFamily="34" charset="-120"/>
+              </a:rPr>
+              <a:t>Operations</a:t>
+            </a:r>
+            <a:endParaRPr lang="en-US" sz="1350" dirty="0"/>
+          </a:p>
+        </p:txBody>
+      </p:sp>
+      <p:sp>
+        <p:nvSpPr>
+          <p:cNvPr id="22" name="Text 20"/>
+          <p:cNvSpPr/>
+          <p:nvPr/>
+        </p:nvSpPr>
+        <p:spPr>
+          <a:xfrm>
+            <a:off x="5296205" y="3310128"/>
+            <a:ext cx="1569110" cy="1280160"/>
+          </a:xfrm>
+          <a:prstGeom prst="rect">
+            <a:avLst/>
+          </a:prstGeom>
+          <a:noFill/>
+          <a:ln/>
+        </p:spPr>
+        <p:txBody>
+          <a:bodyPr wrap="square" rtlCol="0" anchor="t"/>
+          <a:lstStyle/>
+          <a:p>
+            <a:pPr indent="0" marL="0">
+              <a:lnSpc>
+                <a:spcPct val="104000"/>
+              </a:lnSpc>
+              <a:buNone/>
+            </a:pPr>
+            <a:r>
+              <a:rPr lang="en-US" sz="1050" dirty="0">
+                <a:solidFill>
+                  <a:srgbClr val="5A6B7B"/>
+                </a:solidFill>
+                <a:latin typeface="Calibri" pitchFamily="34" charset="0"/>
+                <a:ea typeface="Calibri" pitchFamily="34" charset="-122"/>
+                <a:cs typeface="Calibri" pitchFamily="34" charset="-120"/>
+              </a:rPr>
+              <a:t>IT service desk and public safety/health acceleration.</a:t>
+            </a:r>
+            <a:endParaRPr lang="en-US" sz="1050" dirty="0"/>
+          </a:p>
+        </p:txBody>
+      </p:sp>
+      <p:sp>
+        <p:nvSpPr>
+          <p:cNvPr id="23" name="Text 21"/>
+          <p:cNvSpPr/>
+          <p:nvPr/>
+        </p:nvSpPr>
+        <p:spPr>
+          <a:xfrm>
+            <a:off x="5296205" y="4553712"/>
+            <a:ext cx="1569110" cy="310896"/>
           </a:xfrm>
           <a:prstGeom prst="rect">
             <a:avLst/>
@@ -3493,56 +3705,116 @@
               <a:buNone/>
             </a:pPr>
             <a:r>
-              <a:rPr lang="en-US" sz="1300" dirty="0">
-                <a:solidFill>
-                  <a:srgbClr val="CADCFC"/>
-                </a:solidFill>
-              </a:rPr>
-              <a:t>WORM retention, KMS, data-class isolation; mapped to CJIS, IRS 1075, HIPAA, FERPA, DPPA, ADA, GovRAMP, NIST AI RMF.</a:t>
-            </a:r>
-            <a:endParaRPr lang="en-US" sz="1300" dirty="0"/>
-          </a:p>
-        </p:txBody>
-      </p:sp>
-      <p:sp>
-        <p:nvSpPr>
-          <p:cNvPr id="13" name="Shape 11"/>
-          <p:cNvSpPr/>
-          <p:nvPr/>
-        </p:nvSpPr>
-        <p:spPr>
-          <a:xfrm>
-            <a:off x="6217920" y="3794760"/>
-            <a:ext cx="5212080" cy="1737360"/>
+              <a:rPr lang="en-US" sz="870" b="1" i="1" dirty="0">
+                <a:solidFill>
+                  <a:srgbClr val="ED7100"/>
+                </a:solidFill>
+                <a:latin typeface="Calibri" pitchFamily="34" charset="0"/>
+                <a:ea typeface="Calibri" pitchFamily="34" charset="-122"/>
+                <a:cs typeface="Calibri" pitchFamily="34" charset="-120"/>
+              </a:rPr>
+              <a:t>Agents 07–08</a:t>
+            </a:r>
+            <a:endParaRPr lang="en-US" sz="870" dirty="0"/>
+          </a:p>
+        </p:txBody>
+      </p:sp>
+      <p:sp>
+        <p:nvSpPr>
+          <p:cNvPr id="24" name="Text 22"/>
+          <p:cNvSpPr/>
+          <p:nvPr/>
+        </p:nvSpPr>
+        <p:spPr>
+          <a:xfrm>
+            <a:off x="7011619" y="3246120"/>
+            <a:ext cx="292608" cy="365760"/>
+          </a:xfrm>
+          <a:prstGeom prst="rect">
+            <a:avLst/>
+          </a:prstGeom>
+          <a:noFill/>
+          <a:ln/>
+        </p:spPr>
+        <p:txBody>
+          <a:bodyPr wrap="square" rtlCol="0" anchor="ctr"/>
+          <a:lstStyle/>
+          <a:p>
+            <a:pPr algn="ctr" indent="0" marL="0">
+              <a:buNone/>
+            </a:pPr>
+            <a:r>
+              <a:rPr lang="en-US" sz="1600" b="1" dirty="0">
+                <a:solidFill>
+                  <a:srgbClr val="FF9900"/>
+                </a:solidFill>
+                <a:latin typeface="Calibri" pitchFamily="34" charset="0"/>
+                <a:ea typeface="Calibri" pitchFamily="34" charset="-122"/>
+                <a:cs typeface="Calibri" pitchFamily="34" charset="-120"/>
+              </a:rPr>
+              <a:t>▸</a:t>
+            </a:r>
+            <a:endParaRPr lang="en-US" sz="1600" dirty="0"/>
+          </a:p>
+        </p:txBody>
+      </p:sp>
+      <p:sp>
+        <p:nvSpPr>
+          <p:cNvPr id="25" name="Shape 23"/>
+          <p:cNvSpPr/>
+          <p:nvPr/>
+        </p:nvSpPr>
+        <p:spPr>
+          <a:xfrm>
+            <a:off x="7285939" y="1920240"/>
+            <a:ext cx="1898294" cy="3017520"/>
           </a:xfrm>
           <a:prstGeom prst="roundRect">
             <a:avLst>
-              <a:gd name="adj" fmla="val 3684"/>
+              <a:gd name="adj" fmla="val 3854"/>
             </a:avLst>
           </a:prstGeom>
           <a:solidFill>
-            <a:srgbClr val="2A376E"/>
+            <a:srgbClr val="01A88D"/>
           </a:solidFill>
-          <a:ln/>
-          <a:effectLst>
-            <a:outerShdw sx="100000" sy="100000" kx="0" ky="0" algn="bl" rotWithShape="0" blurRad="88900" dist="38100" dir="5400000">
-              <a:srgbClr val="000000">
-                <a:alpha val="16000"/>
-              </a:srgbClr>
-            </a:outerShdw>
-          </a:effectLst>
-        </p:spPr>
-      </p:sp>
-      <p:sp>
-        <p:nvSpPr>
-          <p:cNvPr id="14" name="Text 12"/>
-          <p:cNvSpPr/>
-          <p:nvPr/>
-        </p:nvSpPr>
-        <p:spPr>
-          <a:xfrm>
-            <a:off x="6492240" y="3977640"/>
-            <a:ext cx="4663440" cy="365760"/>
+          <a:ln w="12700">
+            <a:solidFill>
+              <a:srgbClr val="0E7C68"/>
+            </a:solidFill>
+            <a:prstDash val="solid"/>
+          </a:ln>
+        </p:spPr>
+      </p:sp>
+      <p:sp>
+        <p:nvSpPr>
+          <p:cNvPr id="26" name="Shape 24"/>
+          <p:cNvSpPr/>
+          <p:nvPr/>
+        </p:nvSpPr>
+        <p:spPr>
+          <a:xfrm>
+            <a:off x="7450531" y="2103120"/>
+            <a:ext cx="457200" cy="457200"/>
+          </a:xfrm>
+          <a:prstGeom prst="ellipse">
+            <a:avLst/>
+          </a:prstGeom>
+          <a:solidFill>
+            <a:srgbClr val="FFFFFF"/>
+          </a:solidFill>
+          <a:ln/>
+        </p:spPr>
+      </p:sp>
+      <p:sp>
+        <p:nvSpPr>
+          <p:cNvPr id="27" name="Text 25"/>
+          <p:cNvSpPr/>
+          <p:nvPr/>
+        </p:nvSpPr>
+        <p:spPr>
+          <a:xfrm>
+            <a:off x="7450531" y="2103120"/>
+            <a:ext cx="457200" cy="457200"/>
           </a:xfrm>
           <a:prstGeom prst="rect">
             <a:avLst/>
@@ -3554,34 +3826,157 @@
           <a:bodyPr wrap="square" rtlCol="0" anchor="ctr"/>
           <a:lstStyle/>
           <a:p>
-            <a:pPr indent="0" marL="0">
-              <a:buNone/>
-            </a:pPr>
-            <a:r>
-              <a:rPr lang="en-US" sz="1650" b="1" dirty="0">
+            <a:pPr algn="ctr" indent="0" marL="0">
+              <a:buNone/>
+            </a:pPr>
+            <a:r>
+              <a:rPr lang="en-US" sz="1800" b="1" dirty="0">
+                <a:solidFill>
+                  <a:srgbClr val="01A88D"/>
+                </a:solidFill>
+                <a:latin typeface="Trebuchet MS" pitchFamily="34" charset="0"/>
+                <a:ea typeface="Trebuchet MS" pitchFamily="34" charset="-122"/>
+                <a:cs typeface="Trebuchet MS" pitchFamily="34" charset="-120"/>
+              </a:rPr>
+              <a:t>4</a:t>
+            </a:r>
+            <a:endParaRPr lang="en-US" sz="1800" dirty="0"/>
+          </a:p>
+        </p:txBody>
+      </p:sp>
+      <p:sp>
+        <p:nvSpPr>
+          <p:cNvPr id="28" name="Text 26"/>
+          <p:cNvSpPr/>
+          <p:nvPr/>
+        </p:nvSpPr>
+        <p:spPr>
+          <a:xfrm>
+            <a:off x="7971739" y="2167128"/>
+            <a:ext cx="1121054" cy="329184"/>
+          </a:xfrm>
+          <a:prstGeom prst="rect">
+            <a:avLst/>
+          </a:prstGeom>
+          <a:noFill/>
+          <a:ln/>
+        </p:spPr>
+        <p:txBody>
+          <a:bodyPr wrap="square" rtlCol="0" anchor="ctr"/>
+          <a:lstStyle/>
+          <a:p>
+            <a:pPr indent="0" marL="0">
+              <a:buNone/>
+            </a:pPr>
+            <a:r>
+              <a:rPr lang="en-US" sz="950" b="1" spc="100" kern="0" dirty="0">
                 <a:solidFill>
                   <a:srgbClr val="FFFFFF"/>
                 </a:solidFill>
-                <a:latin typeface="Cambria" pitchFamily="34" charset="0"/>
-                <a:ea typeface="Cambria" pitchFamily="34" charset="-122"/>
-                <a:cs typeface="Cambria" pitchFamily="34" charset="-120"/>
-              </a:rPr>
-              <a:t>Deploys on AWS, incl. GovCloud</a:t>
-            </a:r>
-            <a:endParaRPr lang="en-US" sz="1650" dirty="0"/>
-          </a:p>
-        </p:txBody>
-      </p:sp>
-      <p:sp>
-        <p:nvSpPr>
-          <p:cNvPr id="15" name="Text 13"/>
-          <p:cNvSpPr/>
-          <p:nvPr/>
-        </p:nvSpPr>
-        <p:spPr>
-          <a:xfrm>
-            <a:off x="6492240" y="4434840"/>
-            <a:ext cx="4709160" cy="1005840"/>
+                <a:latin typeface="Calibri" pitchFamily="34" charset="0"/>
+                <a:ea typeface="Calibri" pitchFamily="34" charset="-122"/>
+                <a:cs typeface="Calibri" pitchFamily="34" charset="-120"/>
+              </a:rPr>
+              <a:t>HUMAN</a:t>
+            </a:r>
+            <a:endParaRPr lang="en-US" sz="950" dirty="0"/>
+          </a:p>
+        </p:txBody>
+      </p:sp>
+      <p:sp>
+        <p:nvSpPr>
+          <p:cNvPr id="29" name="Text 27"/>
+          <p:cNvSpPr/>
+          <p:nvPr/>
+        </p:nvSpPr>
+        <p:spPr>
+          <a:xfrm>
+            <a:off x="7450531" y="2670048"/>
+            <a:ext cx="1569110" cy="640080"/>
+          </a:xfrm>
+          <a:prstGeom prst="rect">
+            <a:avLst/>
+          </a:prstGeom>
+          <a:noFill/>
+          <a:ln/>
+        </p:spPr>
+        <p:txBody>
+          <a:bodyPr wrap="square" rtlCol="0" anchor="t"/>
+          <a:lstStyle/>
+          <a:p>
+            <a:pPr indent="0" marL="0">
+              <a:lnSpc>
+                <a:spcPct val="98000"/>
+              </a:lnSpc>
+              <a:buNone/>
+            </a:pPr>
+            <a:r>
+              <a:rPr lang="en-US" sz="1350" b="1" dirty="0">
+                <a:solidFill>
+                  <a:srgbClr val="FFFFFF"/>
+                </a:solidFill>
+                <a:latin typeface="Calibri" pitchFamily="34" charset="0"/>
+                <a:ea typeface="Calibri" pitchFamily="34" charset="-122"/>
+                <a:cs typeface="Calibri" pitchFamily="34" charset="-120"/>
+              </a:rPr>
+              <a:t>Human gates everywhere</a:t>
+            </a:r>
+            <a:endParaRPr lang="en-US" sz="1350" dirty="0"/>
+          </a:p>
+        </p:txBody>
+      </p:sp>
+      <p:sp>
+        <p:nvSpPr>
+          <p:cNvPr id="30" name="Text 28"/>
+          <p:cNvSpPr/>
+          <p:nvPr/>
+        </p:nvSpPr>
+        <p:spPr>
+          <a:xfrm>
+            <a:off x="7450531" y="3310128"/>
+            <a:ext cx="1569110" cy="1280160"/>
+          </a:xfrm>
+          <a:prstGeom prst="rect">
+            <a:avLst/>
+          </a:prstGeom>
+          <a:noFill/>
+          <a:ln/>
+        </p:spPr>
+        <p:txBody>
+          <a:bodyPr wrap="square" rtlCol="0" anchor="t"/>
+          <a:lstStyle/>
+          <a:p>
+            <a:pPr indent="0" marL="0">
+              <a:lnSpc>
+                <a:spcPct val="104000"/>
+              </a:lnSpc>
+              <a:buNone/>
+            </a:pPr>
+            <a:r>
+              <a:rPr lang="en-US" sz="1050" dirty="0">
+                <a:solidFill>
+                  <a:srgbClr val="E6FBF6"/>
+                </a:solidFill>
+                <a:latin typeface="Calibri" pitchFamily="34" charset="0"/>
+                <a:ea typeface="Calibri" pitchFamily="34" charset="-122"/>
+                <a:cs typeface="Calibri" pitchFamily="34" charset="-120"/>
+              </a:rPr>
+              <a:t>Every consequential action is withheld in code until approved.</a:t>
+            </a:r>
+            <a:endParaRPr lang="en-US" sz="1050" dirty="0"/>
+          </a:p>
+        </p:txBody>
+      </p:sp>
+      <p:sp>
+        <p:nvSpPr>
+          <p:cNvPr id="31" name="Text 29"/>
+          <p:cNvSpPr/>
+          <p:nvPr/>
+        </p:nvSpPr>
+        <p:spPr>
+          <a:xfrm>
+            <a:off x="7450531" y="4553712"/>
+            <a:ext cx="1569110" cy="310896"/>
           </a:xfrm>
           <a:prstGeom prst="rect">
             <a:avLst/>
@@ -3597,14 +3992,410 @@
               <a:buNone/>
             </a:pPr>
             <a:r>
-              <a:rPr lang="en-US" sz="1300" dirty="0">
-                <a:solidFill>
-                  <a:srgbClr val="CADCFC"/>
-                </a:solidFill>
-              </a:rPr>
-              <a:t>Bedrock AgentCore / Strands; CloudFormation + Terraform; commercial &amp; GovCloud parity.</a:t>
-            </a:r>
-            <a:endParaRPr lang="en-US" sz="1300" dirty="0"/>
+              <a:rPr lang="en-US" sz="870" b="1" i="1" dirty="0">
+                <a:solidFill>
+                  <a:srgbClr val="E6FBF6"/>
+                </a:solidFill>
+                <a:latin typeface="Calibri" pitchFamily="34" charset="0"/>
+                <a:ea typeface="Calibri" pitchFamily="34" charset="-122"/>
+                <a:cs typeface="Calibri" pitchFamily="34" charset="-120"/>
+              </a:rPr>
+              <a:t>Across all agents</a:t>
+            </a:r>
+            <a:endParaRPr lang="en-US" sz="870" dirty="0"/>
+          </a:p>
+        </p:txBody>
+      </p:sp>
+      <p:sp>
+        <p:nvSpPr>
+          <p:cNvPr id="32" name="Text 30"/>
+          <p:cNvSpPr/>
+          <p:nvPr/>
+        </p:nvSpPr>
+        <p:spPr>
+          <a:xfrm>
+            <a:off x="9165946" y="3246120"/>
+            <a:ext cx="292608" cy="365760"/>
+          </a:xfrm>
+          <a:prstGeom prst="rect">
+            <a:avLst/>
+          </a:prstGeom>
+          <a:noFill/>
+          <a:ln/>
+        </p:spPr>
+        <p:txBody>
+          <a:bodyPr wrap="square" rtlCol="0" anchor="ctr"/>
+          <a:lstStyle/>
+          <a:p>
+            <a:pPr algn="ctr" indent="0" marL="0">
+              <a:buNone/>
+            </a:pPr>
+            <a:r>
+              <a:rPr lang="en-US" sz="1600" b="1" dirty="0">
+                <a:solidFill>
+                  <a:srgbClr val="FF9900"/>
+                </a:solidFill>
+                <a:latin typeface="Calibri" pitchFamily="34" charset="0"/>
+                <a:ea typeface="Calibri" pitchFamily="34" charset="-122"/>
+                <a:cs typeface="Calibri" pitchFamily="34" charset="-120"/>
+              </a:rPr>
+              <a:t>▸</a:t>
+            </a:r>
+            <a:endParaRPr lang="en-US" sz="1600" dirty="0"/>
+          </a:p>
+        </p:txBody>
+      </p:sp>
+      <p:sp>
+        <p:nvSpPr>
+          <p:cNvPr id="33" name="Shape 31"/>
+          <p:cNvSpPr/>
+          <p:nvPr/>
+        </p:nvSpPr>
+        <p:spPr>
+          <a:xfrm>
+            <a:off x="9440266" y="1920240"/>
+            <a:ext cx="1898294" cy="3017520"/>
+          </a:xfrm>
+          <a:prstGeom prst="roundRect">
+            <a:avLst>
+              <a:gd name="adj" fmla="val 3854"/>
+            </a:avLst>
+          </a:prstGeom>
+          <a:solidFill>
+            <a:srgbClr val="FFFFFF"/>
+          </a:solidFill>
+          <a:ln w="12700">
+            <a:solidFill>
+              <a:srgbClr val="C9D3DC"/>
+            </a:solidFill>
+            <a:prstDash val="solid"/>
+          </a:ln>
+        </p:spPr>
+      </p:sp>
+      <p:sp>
+        <p:nvSpPr>
+          <p:cNvPr id="34" name="Shape 32"/>
+          <p:cNvSpPr/>
+          <p:nvPr/>
+        </p:nvSpPr>
+        <p:spPr>
+          <a:xfrm>
+            <a:off x="9604858" y="2103120"/>
+            <a:ext cx="457200" cy="457200"/>
+          </a:xfrm>
+          <a:prstGeom prst="ellipse">
+            <a:avLst/>
+          </a:prstGeom>
+          <a:solidFill>
+            <a:srgbClr val="232F3E"/>
+          </a:solidFill>
+          <a:ln/>
+        </p:spPr>
+      </p:sp>
+      <p:sp>
+        <p:nvSpPr>
+          <p:cNvPr id="35" name="Text 33"/>
+          <p:cNvSpPr/>
+          <p:nvPr/>
+        </p:nvSpPr>
+        <p:spPr>
+          <a:xfrm>
+            <a:off x="9604858" y="2103120"/>
+            <a:ext cx="457200" cy="457200"/>
+          </a:xfrm>
+          <a:prstGeom prst="rect">
+            <a:avLst/>
+          </a:prstGeom>
+          <a:noFill/>
+          <a:ln/>
+        </p:spPr>
+        <p:txBody>
+          <a:bodyPr wrap="square" rtlCol="0" anchor="ctr"/>
+          <a:lstStyle/>
+          <a:p>
+            <a:pPr algn="ctr" indent="0" marL="0">
+              <a:buNone/>
+            </a:pPr>
+            <a:r>
+              <a:rPr lang="en-US" sz="1800" b="1" dirty="0">
+                <a:solidFill>
+                  <a:srgbClr val="FF9900"/>
+                </a:solidFill>
+                <a:latin typeface="Trebuchet MS" pitchFamily="34" charset="0"/>
+                <a:ea typeface="Trebuchet MS" pitchFamily="34" charset="-122"/>
+                <a:cs typeface="Trebuchet MS" pitchFamily="34" charset="-120"/>
+              </a:rPr>
+              <a:t>5</a:t>
+            </a:r>
+            <a:endParaRPr lang="en-US" sz="1800" dirty="0"/>
+          </a:p>
+        </p:txBody>
+      </p:sp>
+      <p:sp>
+        <p:nvSpPr>
+          <p:cNvPr id="36" name="Text 34"/>
+          <p:cNvSpPr/>
+          <p:nvPr/>
+        </p:nvSpPr>
+        <p:spPr>
+          <a:xfrm>
+            <a:off x="9604858" y="2670048"/>
+            <a:ext cx="1569110" cy="640080"/>
+          </a:xfrm>
+          <a:prstGeom prst="rect">
+            <a:avLst/>
+          </a:prstGeom>
+          <a:noFill/>
+          <a:ln/>
+        </p:spPr>
+        <p:txBody>
+          <a:bodyPr wrap="square" rtlCol="0" anchor="t"/>
+          <a:lstStyle/>
+          <a:p>
+            <a:pPr indent="0" marL="0">
+              <a:lnSpc>
+                <a:spcPct val="98000"/>
+              </a:lnSpc>
+              <a:buNone/>
+            </a:pPr>
+            <a:r>
+              <a:rPr lang="en-US" sz="1350" b="1" dirty="0">
+                <a:solidFill>
+                  <a:srgbClr val="232F3E"/>
+                </a:solidFill>
+                <a:latin typeface="Calibri" pitchFamily="34" charset="0"/>
+                <a:ea typeface="Calibri" pitchFamily="34" charset="-122"/>
+                <a:cs typeface="Calibri" pitchFamily="34" charset="-120"/>
+              </a:rPr>
+              <a:t>One platform</a:t>
+            </a:r>
+            <a:endParaRPr lang="en-US" sz="1350" dirty="0"/>
+          </a:p>
+        </p:txBody>
+      </p:sp>
+      <p:sp>
+        <p:nvSpPr>
+          <p:cNvPr id="37" name="Text 35"/>
+          <p:cNvSpPr/>
+          <p:nvPr/>
+        </p:nvSpPr>
+        <p:spPr>
+          <a:xfrm>
+            <a:off x="9604858" y="3310128"/>
+            <a:ext cx="1569110" cy="1280160"/>
+          </a:xfrm>
+          <a:prstGeom prst="rect">
+            <a:avLst/>
+          </a:prstGeom>
+          <a:noFill/>
+          <a:ln/>
+        </p:spPr>
+        <p:txBody>
+          <a:bodyPr wrap="square" rtlCol="0" anchor="t"/>
+          <a:lstStyle/>
+          <a:p>
+            <a:pPr indent="0" marL="0">
+              <a:lnSpc>
+                <a:spcPct val="104000"/>
+              </a:lnSpc>
+              <a:buNone/>
+            </a:pPr>
+            <a:r>
+              <a:rPr lang="en-US" sz="1050" dirty="0">
+                <a:solidFill>
+                  <a:srgbClr val="5A6B7B"/>
+                </a:solidFill>
+                <a:latin typeface="Calibri" pitchFamily="34" charset="0"/>
+                <a:ea typeface="Calibri" pitchFamily="34" charset="-122"/>
+                <a:cs typeface="Calibri" pitchFamily="34" charset="-120"/>
+              </a:rPr>
+              <a:t>Shared governance, canonical data, audit and compliance events.</a:t>
+            </a:r>
+            <a:endParaRPr lang="en-US" sz="1050" dirty="0"/>
+          </a:p>
+        </p:txBody>
+      </p:sp>
+      <p:sp>
+        <p:nvSpPr>
+          <p:cNvPr id="38" name="Text 36"/>
+          <p:cNvSpPr/>
+          <p:nvPr/>
+        </p:nvSpPr>
+        <p:spPr>
+          <a:xfrm>
+            <a:off x="9604858" y="4553712"/>
+            <a:ext cx="1569110" cy="310896"/>
+          </a:xfrm>
+          <a:prstGeom prst="rect">
+            <a:avLst/>
+          </a:prstGeom>
+          <a:noFill/>
+          <a:ln/>
+        </p:spPr>
+        <p:txBody>
+          <a:bodyPr wrap="square" rtlCol="0" anchor="ctr"/>
+          <a:lstStyle/>
+          <a:p>
+            <a:pPr indent="0" marL="0">
+              <a:buNone/>
+            </a:pPr>
+            <a:r>
+              <a:rPr lang="en-US" sz="870" b="1" i="1" dirty="0">
+                <a:solidFill>
+                  <a:srgbClr val="ED7100"/>
+                </a:solidFill>
+                <a:latin typeface="Calibri" pitchFamily="34" charset="0"/>
+                <a:ea typeface="Calibri" pitchFamily="34" charset="-122"/>
+                <a:cs typeface="Calibri" pitchFamily="34" charset="-120"/>
+              </a:rPr>
+              <a:t>WoG platform</a:t>
+            </a:r>
+            <a:endParaRPr lang="en-US" sz="870" dirty="0"/>
+          </a:p>
+        </p:txBody>
+      </p:sp>
+      <p:sp>
+        <p:nvSpPr>
+          <p:cNvPr id="39" name="Shape 37"/>
+          <p:cNvSpPr/>
+          <p:nvPr/>
+        </p:nvSpPr>
+        <p:spPr>
+          <a:xfrm>
+            <a:off x="822960" y="5166360"/>
+            <a:ext cx="10515600" cy="868680"/>
+          </a:xfrm>
+          <a:prstGeom prst="roundRect">
+            <a:avLst>
+              <a:gd name="adj" fmla="val 6316"/>
+            </a:avLst>
+          </a:prstGeom>
+          <a:solidFill>
+            <a:srgbClr val="EAEFF4"/>
+          </a:solidFill>
+          <a:ln w="12700">
+            <a:solidFill>
+              <a:srgbClr val="C9D3DC"/>
+            </a:solidFill>
+            <a:prstDash val="solid"/>
+          </a:ln>
+        </p:spPr>
+      </p:sp>
+      <p:sp>
+        <p:nvSpPr>
+          <p:cNvPr id="40" name="Shape 38"/>
+          <p:cNvSpPr/>
+          <p:nvPr/>
+        </p:nvSpPr>
+        <p:spPr>
+          <a:xfrm>
+            <a:off x="1005840" y="5358384"/>
+            <a:ext cx="457200" cy="457200"/>
+          </a:xfrm>
+          <a:prstGeom prst="ellipse">
+            <a:avLst/>
+          </a:prstGeom>
+          <a:solidFill>
+            <a:srgbClr val="01A88D"/>
+          </a:solidFill>
+          <a:ln/>
+        </p:spPr>
+      </p:sp>
+      <p:sp>
+        <p:nvSpPr>
+          <p:cNvPr id="41" name="Text 39"/>
+          <p:cNvSpPr/>
+          <p:nvPr/>
+        </p:nvSpPr>
+        <p:spPr>
+          <a:xfrm>
+            <a:off x="1005840" y="5358384"/>
+            <a:ext cx="457200" cy="457200"/>
+          </a:xfrm>
+          <a:prstGeom prst="rect">
+            <a:avLst/>
+          </a:prstGeom>
+          <a:noFill/>
+          <a:ln/>
+        </p:spPr>
+        <p:txBody>
+          <a:bodyPr wrap="square" rtlCol="0" anchor="ctr"/>
+          <a:lstStyle/>
+          <a:p>
+            <a:pPr algn="ctr" indent="0" marL="0">
+              <a:buNone/>
+            </a:pPr>
+            <a:r>
+              <a:rPr lang="en-US" sz="1800" b="1" dirty="0">
+                <a:solidFill>
+                  <a:srgbClr val="FFFFFF"/>
+                </a:solidFill>
+                <a:latin typeface="Calibri" pitchFamily="34" charset="0"/>
+                <a:ea typeface="Calibri" pitchFamily="34" charset="-122"/>
+                <a:cs typeface="Calibri" pitchFamily="34" charset="-120"/>
+              </a:rPr>
+              <a:t>✓</a:t>
+            </a:r>
+            <a:endParaRPr lang="en-US" sz="1800" dirty="0"/>
+          </a:p>
+        </p:txBody>
+      </p:sp>
+      <p:sp>
+        <p:nvSpPr>
+          <p:cNvPr id="42" name="Text 40"/>
+          <p:cNvSpPr/>
+          <p:nvPr/>
+        </p:nvSpPr>
+        <p:spPr>
+          <a:xfrm>
+            <a:off x="1600200" y="5230368"/>
+            <a:ext cx="9601200" cy="749808"/>
+          </a:xfrm>
+          <a:prstGeom prst="rect">
+            <a:avLst/>
+          </a:prstGeom>
+          <a:noFill/>
+          <a:ln/>
+        </p:spPr>
+        <p:txBody>
+          <a:bodyPr wrap="square" rtlCol="0" anchor="ctr"/>
+          <a:lstStyle/>
+          <a:p>
+            <a:pPr indent="0" marL="0">
+              <a:lnSpc>
+                <a:spcPct val="102000"/>
+              </a:lnSpc>
+              <a:buNone/>
+            </a:pPr>
+            <a:r>
+              <a:rPr lang="en-US" sz="1150" b="1" dirty="0">
+                <a:solidFill>
+                  <a:srgbClr val="232F3E"/>
+                </a:solidFill>
+                <a:latin typeface="Calibri" pitchFamily="34" charset="0"/>
+                <a:ea typeface="Calibri" pitchFamily="34" charset="-122"/>
+                <a:cs typeface="Calibri" pitchFamily="34" charset="-120"/>
+              </a:rPr>
+              <a:t>The consequential action is withheld in code until a human approves.  </a:t>
+            </a:r>
+            <a:pPr indent="0" marL="0">
+              <a:lnSpc>
+                <a:spcPct val="102000"/>
+              </a:lnSpc>
+              <a:buNone/>
+            </a:pPr>
+            <a:r>
+              <a:rPr lang="en-US" sz="1150" dirty="0">
+                <a:solidFill>
+                  <a:srgbClr val="5A6B7B"/>
+                </a:solidFill>
+                <a:latin typeface="Calibri" pitchFamily="34" charset="0"/>
+                <a:ea typeface="Calibri" pitchFamily="34" charset="-122"/>
+                <a:cs typeface="Calibri" pitchFamily="34" charset="-120"/>
+              </a:rPr>
+              <a:t>Each agent withholds its consequential action — issue, adjudicate, release, award — verified by tests.</a:t>
+            </a:r>
+            <a:endParaRPr lang="en-US" sz="1150" dirty="0"/>
           </a:p>
         </p:txBody>
       </p:sp>
@@ -3622,7 +4413,7 @@
     <p:bg>
       <p:bgPr>
         <a:solidFill>
-          <a:srgbClr val="FFFFFF"/>
+          <a:srgbClr val="1A232E"/>
         </a:solidFill>
       </p:bgPr>
     </p:bg>
@@ -3648,8 +4439,8 @@
         </p:nvSpPr>
         <p:spPr>
           <a:xfrm>
-            <a:off x="640080" y="457200"/>
-            <a:ext cx="10058400" cy="274320"/>
+            <a:off x="822960" y="502920"/>
+            <a:ext cx="10515600" cy="310896"/>
           </a:xfrm>
           <a:prstGeom prst="rect">
             <a:avLst/>
@@ -3665,14 +4456,17 @@
               <a:buNone/>
             </a:pPr>
             <a:r>
-              <a:rPr lang="en-US" sz="1300" b="1" spc="200" kern="0" dirty="0">
-                <a:solidFill>
-                  <a:srgbClr val="2E8BC0"/>
-                </a:solidFill>
-              </a:rPr>
-              <a:t>THE STRATEGIC LAYER</a:t>
-            </a:r>
-            <a:endParaRPr lang="en-US" sz="1300" dirty="0"/>
+              <a:rPr lang="en-US" sz="1200" b="1" spc="200" kern="0" dirty="0">
+                <a:solidFill>
+                  <a:srgbClr val="FF9900"/>
+                </a:solidFill>
+                <a:latin typeface="Calibri" pitchFamily="34" charset="0"/>
+                <a:ea typeface="Calibri" pitchFamily="34" charset="-122"/>
+                <a:cs typeface="Calibri" pitchFamily="34" charset="-120"/>
+              </a:rPr>
+              <a:t>AWS REFERENCE ARCHITECTURE — BUILT FOR A REGULATED ENVIRONMENT</a:t>
+            </a:r>
+            <a:endParaRPr lang="en-US" sz="1200" dirty="0"/>
           </a:p>
         </p:txBody>
       </p:sp>
@@ -3684,8 +4478,8 @@
         </p:nvSpPr>
         <p:spPr>
           <a:xfrm>
-            <a:off x="640080" y="731520"/>
-            <a:ext cx="10972800" cy="731520"/>
+            <a:off x="822960" y="914400"/>
+            <a:ext cx="10515600" cy="457200"/>
           </a:xfrm>
           <a:prstGeom prst="rect">
             <a:avLst/>
@@ -3701,83 +4495,65 @@
               <a:buNone/>
             </a:pPr>
             <a:r>
-              <a:rPr lang="en-US" sz="2900" b="1" dirty="0">
-                <a:solidFill>
-                  <a:srgbClr val="1B2440"/>
-                </a:solidFill>
-                <a:latin typeface="Cambria" pitchFamily="34" charset="0"/>
-                <a:ea typeface="Cambria" pitchFamily="34" charset="-122"/>
-                <a:cs typeface="Cambria" pitchFamily="34" charset="-120"/>
-              </a:rPr>
-              <a:t>Whole-of-Government Orchestration</a:t>
-            </a:r>
-            <a:endParaRPr lang="en-US" sz="2900" dirty="0"/>
-          </a:p>
-        </p:txBody>
-      </p:sp>
-      <p:sp>
-        <p:nvSpPr>
-          <p:cNvPr id="4" name="Text 2"/>
-          <p:cNvSpPr/>
-          <p:nvPr/>
-        </p:nvSpPr>
-        <p:spPr>
-          <a:xfrm>
-            <a:off x="640080" y="1600200"/>
-            <a:ext cx="10972800" cy="731520"/>
-          </a:xfrm>
-          <a:prstGeom prst="rect">
-            <a:avLst/>
-          </a:prstGeom>
-          <a:noFill/>
-          <a:ln/>
-        </p:spPr>
-        <p:txBody>
-          <a:bodyPr wrap="square" rtlCol="0" anchor="ctr"/>
-          <a:lstStyle/>
-          <a:p>
-            <a:pPr indent="0" marL="0">
-              <a:buNone/>
-            </a:pPr>
-            <a:r>
-              <a:rPr lang="en-US" sz="1600" dirty="0">
-                <a:solidFill>
-                  <a:srgbClr val="1B2440"/>
-                </a:solidFill>
-              </a:rPr>
-              <a:t>Move from dozens of isolated chatbots to governed digital workers coordinated across agencies — organized around life events, not org charts.</a:t>
-            </a:r>
-            <a:endParaRPr lang="en-US" sz="1600" dirty="0"/>
-          </a:p>
-        </p:txBody>
-      </p:sp>
-      <p:sp>
-        <p:nvSpPr>
-          <p:cNvPr id="5" name="Shape 3"/>
-          <p:cNvSpPr/>
-          <p:nvPr/>
-        </p:nvSpPr>
-        <p:spPr>
-          <a:xfrm>
-            <a:off x="640080" y="2468880"/>
-            <a:ext cx="5303520" cy="1554480"/>
+              <a:rPr lang="en-US" sz="2100" b="1" dirty="0">
+                <a:solidFill>
+                  <a:srgbClr val="FFFFFF"/>
+                </a:solidFill>
+                <a:latin typeface="Trebuchet MS" pitchFamily="34" charset="0"/>
+                <a:ea typeface="Trebuchet MS" pitchFamily="34" charset="-122"/>
+                <a:cs typeface="Trebuchet MS" pitchFamily="34" charset="-120"/>
+              </a:rPr>
+              <a:t>One governed AWS backbone shared by all eight agents and the platform.</a:t>
+            </a:r>
+            <a:endParaRPr lang="en-US" sz="2100" dirty="0"/>
+          </a:p>
+        </p:txBody>
+      </p:sp>
+      <p:sp>
+        <p:nvSpPr>
+          <p:cNvPr id="4" name="Shape 2"/>
+          <p:cNvSpPr/>
+          <p:nvPr/>
+        </p:nvSpPr>
+        <p:spPr>
+          <a:xfrm>
+            <a:off x="822960" y="1600200"/>
+            <a:ext cx="1345474" cy="1417320"/>
           </a:xfrm>
           <a:prstGeom prst="roundRect">
             <a:avLst>
-              <a:gd name="adj" fmla="val 4118"/>
+              <a:gd name="adj" fmla="val 4078"/>
             </a:avLst>
           </a:prstGeom>
           <a:solidFill>
-            <a:srgbClr val="F4F7FE"/>
+            <a:srgbClr val="2C3B4E"/>
           </a:solidFill>
-          <a:ln/>
-          <a:effectLst>
-            <a:outerShdw sx="100000" sy="100000" kx="0" ky="0" algn="bl" rotWithShape="0" blurRad="88900" dist="38100" dir="5400000">
-              <a:srgbClr val="000000">
-                <a:alpha val="16000"/>
-              </a:srgbClr>
-            </a:outerShdw>
-          </a:effectLst>
+          <a:ln w="19050">
+            <a:solidFill>
+              <a:srgbClr val="147EBA"/>
+            </a:solidFill>
+            <a:prstDash val="solid"/>
+          </a:ln>
+        </p:spPr>
+      </p:sp>
+      <p:sp>
+        <p:nvSpPr>
+          <p:cNvPr id="5" name="Shape 3"/>
+          <p:cNvSpPr/>
+          <p:nvPr/>
+        </p:nvSpPr>
+        <p:spPr>
+          <a:xfrm>
+            <a:off x="914400" y="1691640"/>
+            <a:ext cx="310896" cy="310896"/>
+          </a:xfrm>
+          <a:prstGeom prst="ellipse">
+            <a:avLst/>
+          </a:prstGeom>
+          <a:solidFill>
+            <a:srgbClr val="147EBA"/>
+          </a:solidFill>
+          <a:ln/>
         </p:spPr>
       </p:sp>
       <p:sp>
@@ -3788,8 +4564,8 @@
         </p:nvSpPr>
         <p:spPr>
           <a:xfrm>
-            <a:off x="914400" y="2651760"/>
-            <a:ext cx="4754880" cy="365760"/>
+            <a:off x="914400" y="1691640"/>
+            <a:ext cx="310896" cy="310896"/>
           </a:xfrm>
           <a:prstGeom prst="rect">
             <a:avLst/>
@@ -3801,21 +4577,21 @@
           <a:bodyPr wrap="square" rtlCol="0" anchor="ctr"/>
           <a:lstStyle/>
           <a:p>
-            <a:pPr indent="0" marL="0">
-              <a:buNone/>
-            </a:pPr>
-            <a:r>
-              <a:rPr lang="en-US" sz="1650" b="1" dirty="0">
-                <a:solidFill>
-                  <a:srgbClr val="1E2761"/>
-                </a:solidFill>
-                <a:latin typeface="Cambria" pitchFamily="34" charset="0"/>
-                <a:ea typeface="Cambria" pitchFamily="34" charset="-122"/>
-                <a:cs typeface="Cambria" pitchFamily="34" charset="-120"/>
-              </a:rPr>
-              <a:t>Canonical data</a:t>
-            </a:r>
-            <a:endParaRPr lang="en-US" sz="1650" dirty="0"/>
+            <a:pPr algn="ctr" indent="0" marL="0">
+              <a:buNone/>
+            </a:pPr>
+            <a:r>
+              <a:rPr lang="en-US" sz="1200" b="1" dirty="0">
+                <a:solidFill>
+                  <a:srgbClr val="FFFFFF"/>
+                </a:solidFill>
+                <a:latin typeface="Trebuchet MS" pitchFamily="34" charset="0"/>
+                <a:ea typeface="Trebuchet MS" pitchFamily="34" charset="-122"/>
+                <a:cs typeface="Trebuchet MS" pitchFamily="34" charset="-120"/>
+              </a:rPr>
+              <a:t>1</a:t>
+            </a:r>
+            <a:endParaRPr lang="en-US" sz="1200" dirty="0"/>
           </a:p>
         </p:txBody>
       </p:sp>
@@ -3827,8 +4603,92 @@
         </p:nvSpPr>
         <p:spPr>
           <a:xfrm>
-            <a:off x="914400" y="3108960"/>
-            <a:ext cx="4800600" cy="822960"/>
+            <a:off x="932688" y="2057400"/>
+            <a:ext cx="1126018" cy="502920"/>
+          </a:xfrm>
+          <a:prstGeom prst="rect">
+            <a:avLst/>
+          </a:prstGeom>
+          <a:noFill/>
+          <a:ln/>
+        </p:spPr>
+        <p:txBody>
+          <a:bodyPr wrap="square" rtlCol="0" anchor="t"/>
+          <a:lstStyle/>
+          <a:p>
+            <a:pPr indent="0" marL="0">
+              <a:lnSpc>
+                <a:spcPct val="95000"/>
+              </a:lnSpc>
+              <a:buNone/>
+            </a:pPr>
+            <a:r>
+              <a:rPr lang="en-US" sz="1100" b="1" dirty="0">
+                <a:solidFill>
+                  <a:srgbClr val="FFFFFF"/>
+                </a:solidFill>
+                <a:latin typeface="Calibri" pitchFamily="34" charset="0"/>
+                <a:ea typeface="Calibri" pitchFamily="34" charset="-122"/>
+                <a:cs typeface="Calibri" pitchFamily="34" charset="-120"/>
+              </a:rPr>
+              <a:t>Resident / Staff channel</a:t>
+            </a:r>
+            <a:endParaRPr lang="en-US" sz="1100" dirty="0"/>
+          </a:p>
+        </p:txBody>
+      </p:sp>
+      <p:sp>
+        <p:nvSpPr>
+          <p:cNvPr id="8" name="Text 6"/>
+          <p:cNvSpPr/>
+          <p:nvPr/>
+        </p:nvSpPr>
+        <p:spPr>
+          <a:xfrm>
+            <a:off x="932688" y="2532888"/>
+            <a:ext cx="1126018" cy="438912"/>
+          </a:xfrm>
+          <a:prstGeom prst="rect">
+            <a:avLst/>
+          </a:prstGeom>
+          <a:noFill/>
+          <a:ln/>
+        </p:spPr>
+        <p:txBody>
+          <a:bodyPr wrap="square" rtlCol="0" anchor="t"/>
+          <a:lstStyle/>
+          <a:p>
+            <a:pPr indent="0" marL="0">
+              <a:lnSpc>
+                <a:spcPct val="98000"/>
+              </a:lnSpc>
+              <a:buNone/>
+            </a:pPr>
+            <a:r>
+              <a:rPr lang="en-US" sz="860" dirty="0">
+                <a:solidFill>
+                  <a:srgbClr val="8FA1B3"/>
+                </a:solidFill>
+                <a:latin typeface="Calibri" pitchFamily="34" charset="0"/>
+                <a:ea typeface="Calibri" pitchFamily="34" charset="-122"/>
+                <a:cs typeface="Calibri" pitchFamily="34" charset="-120"/>
+              </a:rPr>
+              <a:t>Web · mobile · phone · kiosk</a:t>
+            </a:r>
+            <a:endParaRPr lang="en-US" sz="860" dirty="0"/>
+          </a:p>
+        </p:txBody>
+      </p:sp>
+      <p:sp>
+        <p:nvSpPr>
+          <p:cNvPr id="9" name="Text 7"/>
+          <p:cNvSpPr/>
+          <p:nvPr/>
+        </p:nvSpPr>
+        <p:spPr>
+          <a:xfrm>
+            <a:off x="2150146" y="2144268"/>
+            <a:ext cx="219456" cy="329184"/>
           </a:xfrm>
           <a:prstGeom prst="rect">
             <a:avLst/>
@@ -3840,60 +4700,81 @@
           <a:bodyPr wrap="square" rtlCol="0" anchor="ctr"/>
           <a:lstStyle/>
           <a:p>
-            <a:pPr indent="0" marL="0">
-              <a:buNone/>
-            </a:pPr>
-            <a:r>
-              <a:rPr lang="en-US" sz="1350" dirty="0">
-                <a:solidFill>
-                  <a:srgbClr val="1B2440"/>
-                </a:solidFill>
-              </a:rPr>
-              <a:t>One resident, one address, one case — shared across agencies.</a:t>
-            </a:r>
-            <a:endParaRPr lang="en-US" sz="1350" dirty="0"/>
-          </a:p>
-        </p:txBody>
-      </p:sp>
-      <p:sp>
-        <p:nvSpPr>
-          <p:cNvPr id="8" name="Shape 6"/>
-          <p:cNvSpPr/>
-          <p:nvPr/>
-        </p:nvSpPr>
-        <p:spPr>
-          <a:xfrm>
-            <a:off x="6217920" y="2468880"/>
-            <a:ext cx="5303520" cy="1554480"/>
+            <a:pPr algn="ctr" indent="0" marL="0">
+              <a:buNone/>
+            </a:pPr>
+            <a:r>
+              <a:rPr lang="en-US" sz="1300" b="1" dirty="0">
+                <a:solidFill>
+                  <a:srgbClr val="FF9900"/>
+                </a:solidFill>
+                <a:latin typeface="Calibri" pitchFamily="34" charset="0"/>
+                <a:ea typeface="Calibri" pitchFamily="34" charset="-122"/>
+                <a:cs typeface="Calibri" pitchFamily="34" charset="-120"/>
+              </a:rPr>
+              <a:t>→</a:t>
+            </a:r>
+            <a:endParaRPr lang="en-US" sz="1300" dirty="0"/>
+          </a:p>
+        </p:txBody>
+      </p:sp>
+      <p:sp>
+        <p:nvSpPr>
+          <p:cNvPr id="10" name="Shape 8"/>
+          <p:cNvSpPr/>
+          <p:nvPr/>
+        </p:nvSpPr>
+        <p:spPr>
+          <a:xfrm>
+            <a:off x="2351314" y="1600200"/>
+            <a:ext cx="1345474" cy="1417320"/>
           </a:xfrm>
           <a:prstGeom prst="roundRect">
             <a:avLst>
-              <a:gd name="adj" fmla="val 4118"/>
+              <a:gd name="adj" fmla="val 4078"/>
             </a:avLst>
           </a:prstGeom>
           <a:solidFill>
-            <a:srgbClr val="F4F7FE"/>
+            <a:srgbClr val="2C3B4E"/>
           </a:solidFill>
-          <a:ln/>
-          <a:effectLst>
-            <a:outerShdw sx="100000" sy="100000" kx="0" ky="0" algn="bl" rotWithShape="0" blurRad="88900" dist="38100" dir="5400000">
-              <a:srgbClr val="000000">
-                <a:alpha val="16000"/>
-              </a:srgbClr>
-            </a:outerShdw>
-          </a:effectLst>
-        </p:spPr>
-      </p:sp>
-      <p:sp>
-        <p:nvSpPr>
-          <p:cNvPr id="9" name="Text 7"/>
-          <p:cNvSpPr/>
-          <p:nvPr/>
-        </p:nvSpPr>
-        <p:spPr>
-          <a:xfrm>
-            <a:off x="6492240" y="2651760"/>
-            <a:ext cx="4754880" cy="365760"/>
+          <a:ln w="19050">
+            <a:solidFill>
+              <a:srgbClr val="DD344C"/>
+            </a:solidFill>
+            <a:prstDash val="solid"/>
+          </a:ln>
+        </p:spPr>
+      </p:sp>
+      <p:sp>
+        <p:nvSpPr>
+          <p:cNvPr id="11" name="Shape 9"/>
+          <p:cNvSpPr/>
+          <p:nvPr/>
+        </p:nvSpPr>
+        <p:spPr>
+          <a:xfrm>
+            <a:off x="2442754" y="1691640"/>
+            <a:ext cx="310896" cy="310896"/>
+          </a:xfrm>
+          <a:prstGeom prst="ellipse">
+            <a:avLst/>
+          </a:prstGeom>
+          <a:solidFill>
+            <a:srgbClr val="DD344C"/>
+          </a:solidFill>
+          <a:ln/>
+        </p:spPr>
+      </p:sp>
+      <p:sp>
+        <p:nvSpPr>
+          <p:cNvPr id="12" name="Text 10"/>
+          <p:cNvSpPr/>
+          <p:nvPr/>
+        </p:nvSpPr>
+        <p:spPr>
+          <a:xfrm>
+            <a:off x="2442754" y="1691640"/>
+            <a:ext cx="310896" cy="310896"/>
           </a:xfrm>
           <a:prstGeom prst="rect">
             <a:avLst/>
@@ -3905,34 +4786,118 @@
           <a:bodyPr wrap="square" rtlCol="0" anchor="ctr"/>
           <a:lstStyle/>
           <a:p>
-            <a:pPr indent="0" marL="0">
-              <a:buNone/>
-            </a:pPr>
-            <a:r>
-              <a:rPr lang="en-US" sz="1650" b="1" dirty="0">
-                <a:solidFill>
-                  <a:srgbClr val="1E2761"/>
-                </a:solidFill>
-                <a:latin typeface="Cambria" pitchFamily="34" charset="0"/>
-                <a:ea typeface="Cambria" pitchFamily="34" charset="-122"/>
-                <a:cs typeface="Cambria" pitchFamily="34" charset="-120"/>
-              </a:rPr>
-              <a:t>Consent &amp; identity</a:t>
-            </a:r>
-            <a:endParaRPr lang="en-US" sz="1650" dirty="0"/>
-          </a:p>
-        </p:txBody>
-      </p:sp>
-      <p:sp>
-        <p:nvSpPr>
-          <p:cNvPr id="10" name="Text 8"/>
-          <p:cNvSpPr/>
-          <p:nvPr/>
-        </p:nvSpPr>
-        <p:spPr>
-          <a:xfrm>
-            <a:off x="6492240" y="3108960"/>
-            <a:ext cx="4800600" cy="822960"/>
+            <a:pPr algn="ctr" indent="0" marL="0">
+              <a:buNone/>
+            </a:pPr>
+            <a:r>
+              <a:rPr lang="en-US" sz="1200" b="1" dirty="0">
+                <a:solidFill>
+                  <a:srgbClr val="FFFFFF"/>
+                </a:solidFill>
+                <a:latin typeface="Trebuchet MS" pitchFamily="34" charset="0"/>
+                <a:ea typeface="Trebuchet MS" pitchFamily="34" charset="-122"/>
+                <a:cs typeface="Trebuchet MS" pitchFamily="34" charset="-120"/>
+              </a:rPr>
+              <a:t>2</a:t>
+            </a:r>
+            <a:endParaRPr lang="en-US" sz="1200" dirty="0"/>
+          </a:p>
+        </p:txBody>
+      </p:sp>
+      <p:sp>
+        <p:nvSpPr>
+          <p:cNvPr id="13" name="Text 11"/>
+          <p:cNvSpPr/>
+          <p:nvPr/>
+        </p:nvSpPr>
+        <p:spPr>
+          <a:xfrm>
+            <a:off x="2461042" y="2057400"/>
+            <a:ext cx="1126018" cy="502920"/>
+          </a:xfrm>
+          <a:prstGeom prst="rect">
+            <a:avLst/>
+          </a:prstGeom>
+          <a:noFill/>
+          <a:ln/>
+        </p:spPr>
+        <p:txBody>
+          <a:bodyPr wrap="square" rtlCol="0" anchor="t"/>
+          <a:lstStyle/>
+          <a:p>
+            <a:pPr indent="0" marL="0">
+              <a:lnSpc>
+                <a:spcPct val="95000"/>
+              </a:lnSpc>
+              <a:buNone/>
+            </a:pPr>
+            <a:r>
+              <a:rPr lang="en-US" sz="1100" b="1" dirty="0">
+                <a:solidFill>
+                  <a:srgbClr val="FFFFFF"/>
+                </a:solidFill>
+                <a:latin typeface="Calibri" pitchFamily="34" charset="0"/>
+                <a:ea typeface="Calibri" pitchFamily="34" charset="-122"/>
+                <a:cs typeface="Calibri" pitchFamily="34" charset="-120"/>
+              </a:rPr>
+              <a:t>Edge protection</a:t>
+            </a:r>
+            <a:endParaRPr lang="en-US" sz="1100" dirty="0"/>
+          </a:p>
+        </p:txBody>
+      </p:sp>
+      <p:sp>
+        <p:nvSpPr>
+          <p:cNvPr id="14" name="Text 12"/>
+          <p:cNvSpPr/>
+          <p:nvPr/>
+        </p:nvSpPr>
+        <p:spPr>
+          <a:xfrm>
+            <a:off x="2461042" y="2532888"/>
+            <a:ext cx="1126018" cy="438912"/>
+          </a:xfrm>
+          <a:prstGeom prst="rect">
+            <a:avLst/>
+          </a:prstGeom>
+          <a:noFill/>
+          <a:ln/>
+        </p:spPr>
+        <p:txBody>
+          <a:bodyPr wrap="square" rtlCol="0" anchor="t"/>
+          <a:lstStyle/>
+          <a:p>
+            <a:pPr indent="0" marL="0">
+              <a:lnSpc>
+                <a:spcPct val="98000"/>
+              </a:lnSpc>
+              <a:buNone/>
+            </a:pPr>
+            <a:r>
+              <a:rPr lang="en-US" sz="860" dirty="0">
+                <a:solidFill>
+                  <a:srgbClr val="8FA1B3"/>
+                </a:solidFill>
+                <a:latin typeface="Calibri" pitchFamily="34" charset="0"/>
+                <a:ea typeface="Calibri" pitchFamily="34" charset="-122"/>
+                <a:cs typeface="Calibri" pitchFamily="34" charset="-120"/>
+              </a:rPr>
+              <a:t>CloudFront + WAF + Shield</a:t>
+            </a:r>
+            <a:endParaRPr lang="en-US" sz="860" dirty="0"/>
+          </a:p>
+        </p:txBody>
+      </p:sp>
+      <p:sp>
+        <p:nvSpPr>
+          <p:cNvPr id="15" name="Text 13"/>
+          <p:cNvSpPr/>
+          <p:nvPr/>
+        </p:nvSpPr>
+        <p:spPr>
+          <a:xfrm>
+            <a:off x="3678501" y="2144268"/>
+            <a:ext cx="219456" cy="329184"/>
           </a:xfrm>
           <a:prstGeom prst="rect">
             <a:avLst/>
@@ -3944,60 +4909,81 @@
           <a:bodyPr wrap="square" rtlCol="0" anchor="ctr"/>
           <a:lstStyle/>
           <a:p>
-            <a:pPr indent="0" marL="0">
-              <a:buNone/>
-            </a:pPr>
-            <a:r>
-              <a:rPr lang="en-US" sz="1350" dirty="0">
-                <a:solidFill>
-                  <a:srgbClr val="1B2440"/>
-                </a:solidFill>
-              </a:rPr>
-              <a:t>AAL-gated consent ledger; no cross-agency use without recorded consent.</a:t>
-            </a:r>
-            <a:endParaRPr lang="en-US" sz="1350" dirty="0"/>
-          </a:p>
-        </p:txBody>
-      </p:sp>
-      <p:sp>
-        <p:nvSpPr>
-          <p:cNvPr id="11" name="Shape 9"/>
-          <p:cNvSpPr/>
-          <p:nvPr/>
-        </p:nvSpPr>
-        <p:spPr>
-          <a:xfrm>
-            <a:off x="640080" y="4251960"/>
-            <a:ext cx="5303520" cy="1554480"/>
+            <a:pPr algn="ctr" indent="0" marL="0">
+              <a:buNone/>
+            </a:pPr>
+            <a:r>
+              <a:rPr lang="en-US" sz="1300" b="1" dirty="0">
+                <a:solidFill>
+                  <a:srgbClr val="FF9900"/>
+                </a:solidFill>
+                <a:latin typeface="Calibri" pitchFamily="34" charset="0"/>
+                <a:ea typeface="Calibri" pitchFamily="34" charset="-122"/>
+                <a:cs typeface="Calibri" pitchFamily="34" charset="-120"/>
+              </a:rPr>
+              <a:t>→</a:t>
+            </a:r>
+            <a:endParaRPr lang="en-US" sz="1300" dirty="0"/>
+          </a:p>
+        </p:txBody>
+      </p:sp>
+      <p:sp>
+        <p:nvSpPr>
+          <p:cNvPr id="16" name="Shape 14"/>
+          <p:cNvSpPr/>
+          <p:nvPr/>
+        </p:nvSpPr>
+        <p:spPr>
+          <a:xfrm>
+            <a:off x="3879669" y="1600200"/>
+            <a:ext cx="1345474" cy="1417320"/>
           </a:xfrm>
           <a:prstGeom prst="roundRect">
             <a:avLst>
-              <a:gd name="adj" fmla="val 4118"/>
+              <a:gd name="adj" fmla="val 4078"/>
             </a:avLst>
           </a:prstGeom>
           <a:solidFill>
-            <a:srgbClr val="F4F7FE"/>
+            <a:srgbClr val="2C3B4E"/>
           </a:solidFill>
-          <a:ln/>
-          <a:effectLst>
-            <a:outerShdw sx="100000" sy="100000" kx="0" ky="0" algn="bl" rotWithShape="0" blurRad="88900" dist="38100" dir="5400000">
-              <a:srgbClr val="000000">
-                <a:alpha val="16000"/>
-              </a:srgbClr>
-            </a:outerShdw>
-          </a:effectLst>
-        </p:spPr>
-      </p:sp>
-      <p:sp>
-        <p:nvSpPr>
-          <p:cNvPr id="12" name="Text 10"/>
-          <p:cNvSpPr/>
-          <p:nvPr/>
-        </p:nvSpPr>
-        <p:spPr>
-          <a:xfrm>
-            <a:off x="914400" y="4434840"/>
-            <a:ext cx="4754880" cy="365760"/>
+          <a:ln w="19050">
+            <a:solidFill>
+              <a:srgbClr val="8C4FFF"/>
+            </a:solidFill>
+            <a:prstDash val="solid"/>
+          </a:ln>
+        </p:spPr>
+      </p:sp>
+      <p:sp>
+        <p:nvSpPr>
+          <p:cNvPr id="17" name="Shape 15"/>
+          <p:cNvSpPr/>
+          <p:nvPr/>
+        </p:nvSpPr>
+        <p:spPr>
+          <a:xfrm>
+            <a:off x="3971109" y="1691640"/>
+            <a:ext cx="310896" cy="310896"/>
+          </a:xfrm>
+          <a:prstGeom prst="ellipse">
+            <a:avLst/>
+          </a:prstGeom>
+          <a:solidFill>
+            <a:srgbClr val="8C4FFF"/>
+          </a:solidFill>
+          <a:ln/>
+        </p:spPr>
+      </p:sp>
+      <p:sp>
+        <p:nvSpPr>
+          <p:cNvPr id="18" name="Text 16"/>
+          <p:cNvSpPr/>
+          <p:nvPr/>
+        </p:nvSpPr>
+        <p:spPr>
+          <a:xfrm>
+            <a:off x="3971109" y="1691640"/>
+            <a:ext cx="310896" cy="310896"/>
           </a:xfrm>
           <a:prstGeom prst="rect">
             <a:avLst/>
@@ -4009,34 +4995,118 @@
           <a:bodyPr wrap="square" rtlCol="0" anchor="ctr"/>
           <a:lstStyle/>
           <a:p>
-            <a:pPr indent="0" marL="0">
-              <a:buNone/>
-            </a:pPr>
-            <a:r>
-              <a:rPr lang="en-US" sz="1650" b="1" dirty="0">
-                <a:solidFill>
-                  <a:srgbClr val="1E2761"/>
-                </a:solidFill>
-                <a:latin typeface="Cambria" pitchFamily="34" charset="0"/>
-                <a:ea typeface="Cambria" pitchFamily="34" charset="-122"/>
-                <a:cs typeface="Cambria" pitchFamily="34" charset="-120"/>
-              </a:rPr>
-              <a:t>Compliance event bus</a:t>
-            </a:r>
-            <a:endParaRPr lang="en-US" sz="1650" dirty="0"/>
-          </a:p>
-        </p:txBody>
-      </p:sp>
-      <p:sp>
-        <p:nvSpPr>
-          <p:cNvPr id="13" name="Text 11"/>
-          <p:cNvSpPr/>
-          <p:nvPr/>
-        </p:nvSpPr>
-        <p:spPr>
-          <a:xfrm>
-            <a:off x="914400" y="4892040"/>
-            <a:ext cx="4800600" cy="822960"/>
+            <a:pPr algn="ctr" indent="0" marL="0">
+              <a:buNone/>
+            </a:pPr>
+            <a:r>
+              <a:rPr lang="en-US" sz="1200" b="1" dirty="0">
+                <a:solidFill>
+                  <a:srgbClr val="FFFFFF"/>
+                </a:solidFill>
+                <a:latin typeface="Trebuchet MS" pitchFamily="34" charset="0"/>
+                <a:ea typeface="Trebuchet MS" pitchFamily="34" charset="-122"/>
+                <a:cs typeface="Trebuchet MS" pitchFamily="34" charset="-120"/>
+              </a:rPr>
+              <a:t>3</a:t>
+            </a:r>
+            <a:endParaRPr lang="en-US" sz="1200" dirty="0"/>
+          </a:p>
+        </p:txBody>
+      </p:sp>
+      <p:sp>
+        <p:nvSpPr>
+          <p:cNvPr id="19" name="Text 17"/>
+          <p:cNvSpPr/>
+          <p:nvPr/>
+        </p:nvSpPr>
+        <p:spPr>
+          <a:xfrm>
+            <a:off x="3989397" y="2057400"/>
+            <a:ext cx="1126018" cy="502920"/>
+          </a:xfrm>
+          <a:prstGeom prst="rect">
+            <a:avLst/>
+          </a:prstGeom>
+          <a:noFill/>
+          <a:ln/>
+        </p:spPr>
+        <p:txBody>
+          <a:bodyPr wrap="square" rtlCol="0" anchor="t"/>
+          <a:lstStyle/>
+          <a:p>
+            <a:pPr indent="0" marL="0">
+              <a:lnSpc>
+                <a:spcPct val="95000"/>
+              </a:lnSpc>
+              <a:buNone/>
+            </a:pPr>
+            <a:r>
+              <a:rPr lang="en-US" sz="1100" b="1" dirty="0">
+                <a:solidFill>
+                  <a:srgbClr val="FFFFFF"/>
+                </a:solidFill>
+                <a:latin typeface="Calibri" pitchFamily="34" charset="0"/>
+                <a:ea typeface="Calibri" pitchFamily="34" charset="-122"/>
+                <a:cs typeface="Calibri" pitchFamily="34" charset="-120"/>
+              </a:rPr>
+              <a:t>Identity — Cognito</a:t>
+            </a:r>
+            <a:endParaRPr lang="en-US" sz="1100" dirty="0"/>
+          </a:p>
+        </p:txBody>
+      </p:sp>
+      <p:sp>
+        <p:nvSpPr>
+          <p:cNvPr id="20" name="Text 18"/>
+          <p:cNvSpPr/>
+          <p:nvPr/>
+        </p:nvSpPr>
+        <p:spPr>
+          <a:xfrm>
+            <a:off x="3989397" y="2532888"/>
+            <a:ext cx="1126018" cy="438912"/>
+          </a:xfrm>
+          <a:prstGeom prst="rect">
+            <a:avLst/>
+          </a:prstGeom>
+          <a:noFill/>
+          <a:ln/>
+        </p:spPr>
+        <p:txBody>
+          <a:bodyPr wrap="square" rtlCol="0" anchor="t"/>
+          <a:lstStyle/>
+          <a:p>
+            <a:pPr indent="0" marL="0">
+              <a:lnSpc>
+                <a:spcPct val="98000"/>
+              </a:lnSpc>
+              <a:buNone/>
+            </a:pPr>
+            <a:r>
+              <a:rPr lang="en-US" sz="860" dirty="0">
+                <a:solidFill>
+                  <a:srgbClr val="8FA1B3"/>
+                </a:solidFill>
+                <a:latin typeface="Calibri" pitchFamily="34" charset="0"/>
+                <a:ea typeface="Calibri" pitchFamily="34" charset="-122"/>
+                <a:cs typeface="Calibri" pitchFamily="34" charset="-120"/>
+              </a:rPr>
+              <a:t>IdP federation → JWT</a:t>
+            </a:r>
+            <a:endParaRPr lang="en-US" sz="860" dirty="0"/>
+          </a:p>
+        </p:txBody>
+      </p:sp>
+      <p:sp>
+        <p:nvSpPr>
+          <p:cNvPr id="21" name="Text 19"/>
+          <p:cNvSpPr/>
+          <p:nvPr/>
+        </p:nvSpPr>
+        <p:spPr>
+          <a:xfrm>
+            <a:off x="5206855" y="2144268"/>
+            <a:ext cx="219456" cy="329184"/>
           </a:xfrm>
           <a:prstGeom prst="rect">
             <a:avLst/>
@@ -4048,60 +5118,81 @@
           <a:bodyPr wrap="square" rtlCol="0" anchor="ctr"/>
           <a:lstStyle/>
           <a:p>
-            <a:pPr indent="0" marL="0">
-              <a:buNone/>
-            </a:pPr>
-            <a:r>
-              <a:rPr lang="en-US" sz="1350" dirty="0">
-                <a:solidFill>
-                  <a:srgbClr val="1B2440"/>
-                </a:solidFill>
-              </a:rPr>
-              <a:t>Every material step emits an immutable, masked, case-level event.</a:t>
-            </a:r>
-            <a:endParaRPr lang="en-US" sz="1350" dirty="0"/>
-          </a:p>
-        </p:txBody>
-      </p:sp>
-      <p:sp>
-        <p:nvSpPr>
-          <p:cNvPr id="14" name="Shape 12"/>
-          <p:cNvSpPr/>
-          <p:nvPr/>
-        </p:nvSpPr>
-        <p:spPr>
-          <a:xfrm>
-            <a:off x="6217920" y="4251960"/>
-            <a:ext cx="5303520" cy="1554480"/>
+            <a:pPr algn="ctr" indent="0" marL="0">
+              <a:buNone/>
+            </a:pPr>
+            <a:r>
+              <a:rPr lang="en-US" sz="1300" b="1" dirty="0">
+                <a:solidFill>
+                  <a:srgbClr val="FF9900"/>
+                </a:solidFill>
+                <a:latin typeface="Calibri" pitchFamily="34" charset="0"/>
+                <a:ea typeface="Calibri" pitchFamily="34" charset="-122"/>
+                <a:cs typeface="Calibri" pitchFamily="34" charset="-120"/>
+              </a:rPr>
+              <a:t>→</a:t>
+            </a:r>
+            <a:endParaRPr lang="en-US" sz="1300" dirty="0"/>
+          </a:p>
+        </p:txBody>
+      </p:sp>
+      <p:sp>
+        <p:nvSpPr>
+          <p:cNvPr id="22" name="Shape 20"/>
+          <p:cNvSpPr/>
+          <p:nvPr/>
+        </p:nvSpPr>
+        <p:spPr>
+          <a:xfrm>
+            <a:off x="5408023" y="1600200"/>
+            <a:ext cx="1345474" cy="1417320"/>
           </a:xfrm>
           <a:prstGeom prst="roundRect">
             <a:avLst>
-              <a:gd name="adj" fmla="val 4118"/>
+              <a:gd name="adj" fmla="val 4078"/>
             </a:avLst>
           </a:prstGeom>
           <a:solidFill>
-            <a:srgbClr val="F4F7FE"/>
+            <a:srgbClr val="2C3B4E"/>
           </a:solidFill>
-          <a:ln/>
-          <a:effectLst>
-            <a:outerShdw sx="100000" sy="100000" kx="0" ky="0" algn="bl" rotWithShape="0" blurRad="88900" dist="38100" dir="5400000">
-              <a:srgbClr val="000000">
-                <a:alpha val="16000"/>
-              </a:srgbClr>
-            </a:outerShdw>
-          </a:effectLst>
-        </p:spPr>
-      </p:sp>
-      <p:sp>
-        <p:nvSpPr>
-          <p:cNvPr id="15" name="Text 13"/>
-          <p:cNvSpPr/>
-          <p:nvPr/>
-        </p:nvSpPr>
-        <p:spPr>
-          <a:xfrm>
-            <a:off x="6492240" y="4434840"/>
-            <a:ext cx="4754880" cy="365760"/>
+          <a:ln w="19050">
+            <a:solidFill>
+              <a:srgbClr val="FF9900"/>
+            </a:solidFill>
+            <a:prstDash val="solid"/>
+          </a:ln>
+        </p:spPr>
+      </p:sp>
+      <p:sp>
+        <p:nvSpPr>
+          <p:cNvPr id="23" name="Shape 21"/>
+          <p:cNvSpPr/>
+          <p:nvPr/>
+        </p:nvSpPr>
+        <p:spPr>
+          <a:xfrm>
+            <a:off x="5499463" y="1691640"/>
+            <a:ext cx="310896" cy="310896"/>
+          </a:xfrm>
+          <a:prstGeom prst="ellipse">
+            <a:avLst/>
+          </a:prstGeom>
+          <a:solidFill>
+            <a:srgbClr val="FF9900"/>
+          </a:solidFill>
+          <a:ln/>
+        </p:spPr>
+      </p:sp>
+      <p:sp>
+        <p:nvSpPr>
+          <p:cNvPr id="24" name="Text 22"/>
+          <p:cNvSpPr/>
+          <p:nvPr/>
+        </p:nvSpPr>
+        <p:spPr>
+          <a:xfrm>
+            <a:off x="5499463" y="1691640"/>
+            <a:ext cx="310896" cy="310896"/>
           </a:xfrm>
           <a:prstGeom prst="rect">
             <a:avLst/>
@@ -4113,34 +5204,118 @@
           <a:bodyPr wrap="square" rtlCol="0" anchor="ctr"/>
           <a:lstStyle/>
           <a:p>
-            <a:pPr indent="0" marL="0">
-              <a:buNone/>
-            </a:pPr>
-            <a:r>
-              <a:rPr lang="en-US" sz="1650" b="1" dirty="0">
-                <a:solidFill>
-                  <a:srgbClr val="1E2761"/>
-                </a:solidFill>
-                <a:latin typeface="Cambria" pitchFamily="34" charset="0"/>
-                <a:ea typeface="Cambria" pitchFamily="34" charset="-122"/>
-                <a:cs typeface="Cambria" pitchFamily="34" charset="-120"/>
-              </a:rPr>
-              <a:t>Life-event orchestrator</a:t>
-            </a:r>
-            <a:endParaRPr lang="en-US" sz="1650" dirty="0"/>
-          </a:p>
-        </p:txBody>
-      </p:sp>
-      <p:sp>
-        <p:nvSpPr>
-          <p:cNvPr id="16" name="Text 14"/>
-          <p:cNvSpPr/>
-          <p:nvPr/>
-        </p:nvSpPr>
-        <p:spPr>
-          <a:xfrm>
-            <a:off x="6492240" y="4892040"/>
-            <a:ext cx="4800600" cy="822960"/>
+            <a:pPr algn="ctr" indent="0" marL="0">
+              <a:buNone/>
+            </a:pPr>
+            <a:r>
+              <a:rPr lang="en-US" sz="1200" b="1" dirty="0">
+                <a:solidFill>
+                  <a:srgbClr val="FFFFFF"/>
+                </a:solidFill>
+                <a:latin typeface="Trebuchet MS" pitchFamily="34" charset="0"/>
+                <a:ea typeface="Trebuchet MS" pitchFamily="34" charset="-122"/>
+                <a:cs typeface="Trebuchet MS" pitchFamily="34" charset="-120"/>
+              </a:rPr>
+              <a:t>4</a:t>
+            </a:r>
+            <a:endParaRPr lang="en-US" sz="1200" dirty="0"/>
+          </a:p>
+        </p:txBody>
+      </p:sp>
+      <p:sp>
+        <p:nvSpPr>
+          <p:cNvPr id="25" name="Text 23"/>
+          <p:cNvSpPr/>
+          <p:nvPr/>
+        </p:nvSpPr>
+        <p:spPr>
+          <a:xfrm>
+            <a:off x="5517751" y="2057400"/>
+            <a:ext cx="1126018" cy="502920"/>
+          </a:xfrm>
+          <a:prstGeom prst="rect">
+            <a:avLst/>
+          </a:prstGeom>
+          <a:noFill/>
+          <a:ln/>
+        </p:spPr>
+        <p:txBody>
+          <a:bodyPr wrap="square" rtlCol="0" anchor="t"/>
+          <a:lstStyle/>
+          <a:p>
+            <a:pPr indent="0" marL="0">
+              <a:lnSpc>
+                <a:spcPct val="95000"/>
+              </a:lnSpc>
+              <a:buNone/>
+            </a:pPr>
+            <a:r>
+              <a:rPr lang="en-US" sz="1100" b="1" dirty="0">
+                <a:solidFill>
+                  <a:srgbClr val="FFFFFF"/>
+                </a:solidFill>
+                <a:latin typeface="Calibri" pitchFamily="34" charset="0"/>
+                <a:ea typeface="Calibri" pitchFamily="34" charset="-122"/>
+                <a:cs typeface="Calibri" pitchFamily="34" charset="-120"/>
+              </a:rPr>
+              <a:t>API Gateway</a:t>
+            </a:r>
+            <a:endParaRPr lang="en-US" sz="1100" dirty="0"/>
+          </a:p>
+        </p:txBody>
+      </p:sp>
+      <p:sp>
+        <p:nvSpPr>
+          <p:cNvPr id="26" name="Text 24"/>
+          <p:cNvSpPr/>
+          <p:nvPr/>
+        </p:nvSpPr>
+        <p:spPr>
+          <a:xfrm>
+            <a:off x="5517751" y="2532888"/>
+            <a:ext cx="1126018" cy="438912"/>
+          </a:xfrm>
+          <a:prstGeom prst="rect">
+            <a:avLst/>
+          </a:prstGeom>
+          <a:noFill/>
+          <a:ln/>
+        </p:spPr>
+        <p:txBody>
+          <a:bodyPr wrap="square" rtlCol="0" anchor="t"/>
+          <a:lstStyle/>
+          <a:p>
+            <a:pPr indent="0" marL="0">
+              <a:lnSpc>
+                <a:spcPct val="98000"/>
+              </a:lnSpc>
+              <a:buNone/>
+            </a:pPr>
+            <a:r>
+              <a:rPr lang="en-US" sz="860" dirty="0">
+                <a:solidFill>
+                  <a:srgbClr val="8FA1B3"/>
+                </a:solidFill>
+                <a:latin typeface="Calibri" pitchFamily="34" charset="0"/>
+                <a:ea typeface="Calibri" pitchFamily="34" charset="-122"/>
+                <a:cs typeface="Calibri" pitchFamily="34" charset="-120"/>
+              </a:rPr>
+              <a:t>JWT authorizer</a:t>
+            </a:r>
+            <a:endParaRPr lang="en-US" sz="860" dirty="0"/>
+          </a:p>
+        </p:txBody>
+      </p:sp>
+      <p:sp>
+        <p:nvSpPr>
+          <p:cNvPr id="27" name="Text 25"/>
+          <p:cNvSpPr/>
+          <p:nvPr/>
+        </p:nvSpPr>
+        <p:spPr>
+          <a:xfrm>
+            <a:off x="6735209" y="2144268"/>
+            <a:ext cx="219456" cy="329184"/>
           </a:xfrm>
           <a:prstGeom prst="rect">
             <a:avLst/>
@@ -4152,31 +5327,81 @@
           <a:bodyPr wrap="square" rtlCol="0" anchor="ctr"/>
           <a:lstStyle/>
           <a:p>
-            <a:pPr indent="0" marL="0">
-              <a:buNone/>
-            </a:pPr>
-            <a:r>
-              <a:rPr lang="en-US" sz="1350" dirty="0">
-                <a:solidFill>
-                  <a:srgbClr val="1B2440"/>
-                </a:solidFill>
-              </a:rPr>
-              <a:t>Explicit resident confirmation before every material action.</a:t>
-            </a:r>
-            <a:endParaRPr lang="en-US" sz="1350" dirty="0"/>
-          </a:p>
-        </p:txBody>
-      </p:sp>
-      <p:sp>
-        <p:nvSpPr>
-          <p:cNvPr id="17" name="Text 15"/>
-          <p:cNvSpPr/>
-          <p:nvPr/>
-        </p:nvSpPr>
-        <p:spPr>
-          <a:xfrm>
-            <a:off x="640080" y="6309360"/>
-            <a:ext cx="10972800" cy="274320"/>
+            <a:pPr algn="ctr" indent="0" marL="0">
+              <a:buNone/>
+            </a:pPr>
+            <a:r>
+              <a:rPr lang="en-US" sz="1300" b="1" dirty="0">
+                <a:solidFill>
+                  <a:srgbClr val="FF9900"/>
+                </a:solidFill>
+                <a:latin typeface="Calibri" pitchFamily="34" charset="0"/>
+                <a:ea typeface="Calibri" pitchFamily="34" charset="-122"/>
+                <a:cs typeface="Calibri" pitchFamily="34" charset="-120"/>
+              </a:rPr>
+              <a:t>→</a:t>
+            </a:r>
+            <a:endParaRPr lang="en-US" sz="1300" dirty="0"/>
+          </a:p>
+        </p:txBody>
+      </p:sp>
+      <p:sp>
+        <p:nvSpPr>
+          <p:cNvPr id="28" name="Shape 26"/>
+          <p:cNvSpPr/>
+          <p:nvPr/>
+        </p:nvSpPr>
+        <p:spPr>
+          <a:xfrm>
+            <a:off x="6936377" y="1600200"/>
+            <a:ext cx="1345474" cy="1417320"/>
+          </a:xfrm>
+          <a:prstGeom prst="roundRect">
+            <a:avLst>
+              <a:gd name="adj" fmla="val 4078"/>
+            </a:avLst>
+          </a:prstGeom>
+          <a:solidFill>
+            <a:srgbClr val="2C3B4E"/>
+          </a:solidFill>
+          <a:ln w="19050">
+            <a:solidFill>
+              <a:srgbClr val="FF9900"/>
+            </a:solidFill>
+            <a:prstDash val="solid"/>
+          </a:ln>
+        </p:spPr>
+      </p:sp>
+      <p:sp>
+        <p:nvSpPr>
+          <p:cNvPr id="29" name="Shape 27"/>
+          <p:cNvSpPr/>
+          <p:nvPr/>
+        </p:nvSpPr>
+        <p:spPr>
+          <a:xfrm>
+            <a:off x="7027817" y="1691640"/>
+            <a:ext cx="310896" cy="310896"/>
+          </a:xfrm>
+          <a:prstGeom prst="ellipse">
+            <a:avLst/>
+          </a:prstGeom>
+          <a:solidFill>
+            <a:srgbClr val="FF9900"/>
+          </a:solidFill>
+          <a:ln/>
+        </p:spPr>
+      </p:sp>
+      <p:sp>
+        <p:nvSpPr>
+          <p:cNvPr id="30" name="Text 28"/>
+          <p:cNvSpPr/>
+          <p:nvPr/>
+        </p:nvSpPr>
+        <p:spPr>
+          <a:xfrm>
+            <a:off x="7027817" y="1691640"/>
+            <a:ext cx="310896" cy="310896"/>
           </a:xfrm>
           <a:prstGeom prst="rect">
             <a:avLst/>
@@ -4188,18 +5413,1131 @@
           <a:bodyPr wrap="square" rtlCol="0" anchor="ctr"/>
           <a:lstStyle/>
           <a:p>
-            <a:pPr indent="0" marL="0">
-              <a:buNone/>
-            </a:pPr>
-            <a:r>
-              <a:rPr lang="en-US" sz="1150" i="1" dirty="0">
-                <a:solidFill>
-                  <a:srgbClr val="5B6488"/>
-                </a:solidFill>
-              </a:rPr>
-              <a:t>Move (address, vehicle, voter, schools), new business, job loss, disaster — coordinated with consent &amp; confirmation gates.</a:t>
-            </a:r>
-            <a:endParaRPr lang="en-US" sz="1150" dirty="0"/>
+            <a:pPr algn="ctr" indent="0" marL="0">
+              <a:buNone/>
+            </a:pPr>
+            <a:r>
+              <a:rPr lang="en-US" sz="1200" b="1" dirty="0">
+                <a:solidFill>
+                  <a:srgbClr val="FFFFFF"/>
+                </a:solidFill>
+                <a:latin typeface="Trebuchet MS" pitchFamily="34" charset="0"/>
+                <a:ea typeface="Trebuchet MS" pitchFamily="34" charset="-122"/>
+                <a:cs typeface="Trebuchet MS" pitchFamily="34" charset="-120"/>
+              </a:rPr>
+              <a:t>5</a:t>
+            </a:r>
+            <a:endParaRPr lang="en-US" sz="1200" dirty="0"/>
+          </a:p>
+        </p:txBody>
+      </p:sp>
+      <p:sp>
+        <p:nvSpPr>
+          <p:cNvPr id="31" name="Text 29"/>
+          <p:cNvSpPr/>
+          <p:nvPr/>
+        </p:nvSpPr>
+        <p:spPr>
+          <a:xfrm>
+            <a:off x="7046105" y="2057400"/>
+            <a:ext cx="1126018" cy="502920"/>
+          </a:xfrm>
+          <a:prstGeom prst="rect">
+            <a:avLst/>
+          </a:prstGeom>
+          <a:noFill/>
+          <a:ln/>
+        </p:spPr>
+        <p:txBody>
+          <a:bodyPr wrap="square" rtlCol="0" anchor="t"/>
+          <a:lstStyle/>
+          <a:p>
+            <a:pPr indent="0" marL="0">
+              <a:lnSpc>
+                <a:spcPct val="95000"/>
+              </a:lnSpc>
+              <a:buNone/>
+            </a:pPr>
+            <a:r>
+              <a:rPr lang="en-US" sz="1100" b="1" dirty="0">
+                <a:solidFill>
+                  <a:srgbClr val="FFFFFF"/>
+                </a:solidFill>
+                <a:latin typeface="Calibri" pitchFamily="34" charset="0"/>
+                <a:ea typeface="Calibri" pitchFamily="34" charset="-122"/>
+                <a:cs typeface="Calibri" pitchFamily="34" charset="-120"/>
+              </a:rPr>
+              <a:t>MCP tool gateway</a:t>
+            </a:r>
+            <a:endParaRPr lang="en-US" sz="1100" dirty="0"/>
+          </a:p>
+        </p:txBody>
+      </p:sp>
+      <p:sp>
+        <p:nvSpPr>
+          <p:cNvPr id="32" name="Text 30"/>
+          <p:cNvSpPr/>
+          <p:nvPr/>
+        </p:nvSpPr>
+        <p:spPr>
+          <a:xfrm>
+            <a:off x="7046105" y="2532888"/>
+            <a:ext cx="1126018" cy="438912"/>
+          </a:xfrm>
+          <a:prstGeom prst="rect">
+            <a:avLst/>
+          </a:prstGeom>
+          <a:noFill/>
+          <a:ln/>
+        </p:spPr>
+        <p:txBody>
+          <a:bodyPr wrap="square" rtlCol="0" anchor="t"/>
+          <a:lstStyle/>
+          <a:p>
+            <a:pPr indent="0" marL="0">
+              <a:lnSpc>
+                <a:spcPct val="98000"/>
+              </a:lnSpc>
+              <a:buNone/>
+            </a:pPr>
+            <a:r>
+              <a:rPr lang="en-US" sz="860" dirty="0">
+                <a:solidFill>
+                  <a:srgbClr val="8FA1B3"/>
+                </a:solidFill>
+                <a:latin typeface="Calibri" pitchFamily="34" charset="0"/>
+                <a:ea typeface="Calibri" pitchFamily="34" charset="-122"/>
+                <a:cs typeface="Calibri" pitchFamily="34" charset="-120"/>
+              </a:rPr>
+              <a:t>Deny-by-default · least privilege</a:t>
+            </a:r>
+            <a:endParaRPr lang="en-US" sz="860" dirty="0"/>
+          </a:p>
+        </p:txBody>
+      </p:sp>
+      <p:sp>
+        <p:nvSpPr>
+          <p:cNvPr id="33" name="Text 31"/>
+          <p:cNvSpPr/>
+          <p:nvPr/>
+        </p:nvSpPr>
+        <p:spPr>
+          <a:xfrm>
+            <a:off x="8263563" y="2144268"/>
+            <a:ext cx="219456" cy="329184"/>
+          </a:xfrm>
+          <a:prstGeom prst="rect">
+            <a:avLst/>
+          </a:prstGeom>
+          <a:noFill/>
+          <a:ln/>
+        </p:spPr>
+        <p:txBody>
+          <a:bodyPr wrap="square" rtlCol="0" anchor="ctr"/>
+          <a:lstStyle/>
+          <a:p>
+            <a:pPr algn="ctr" indent="0" marL="0">
+              <a:buNone/>
+            </a:pPr>
+            <a:r>
+              <a:rPr lang="en-US" sz="1300" b="1" dirty="0">
+                <a:solidFill>
+                  <a:srgbClr val="FF9900"/>
+                </a:solidFill>
+                <a:latin typeface="Calibri" pitchFamily="34" charset="0"/>
+                <a:ea typeface="Calibri" pitchFamily="34" charset="-122"/>
+                <a:cs typeface="Calibri" pitchFamily="34" charset="-120"/>
+              </a:rPr>
+              <a:t>→</a:t>
+            </a:r>
+            <a:endParaRPr lang="en-US" sz="1300" dirty="0"/>
+          </a:p>
+        </p:txBody>
+      </p:sp>
+      <p:sp>
+        <p:nvSpPr>
+          <p:cNvPr id="34" name="Shape 32"/>
+          <p:cNvSpPr/>
+          <p:nvPr/>
+        </p:nvSpPr>
+        <p:spPr>
+          <a:xfrm>
+            <a:off x="8464731" y="1600200"/>
+            <a:ext cx="1345474" cy="1417320"/>
+          </a:xfrm>
+          <a:prstGeom prst="roundRect">
+            <a:avLst>
+              <a:gd name="adj" fmla="val 4078"/>
+            </a:avLst>
+          </a:prstGeom>
+          <a:solidFill>
+            <a:srgbClr val="2C3B4E"/>
+          </a:solidFill>
+          <a:ln w="19050">
+            <a:solidFill>
+              <a:srgbClr val="01A88D"/>
+            </a:solidFill>
+            <a:prstDash val="solid"/>
+          </a:ln>
+        </p:spPr>
+      </p:sp>
+      <p:sp>
+        <p:nvSpPr>
+          <p:cNvPr id="35" name="Shape 33"/>
+          <p:cNvSpPr/>
+          <p:nvPr/>
+        </p:nvSpPr>
+        <p:spPr>
+          <a:xfrm>
+            <a:off x="8556171" y="1691640"/>
+            <a:ext cx="310896" cy="310896"/>
+          </a:xfrm>
+          <a:prstGeom prst="ellipse">
+            <a:avLst/>
+          </a:prstGeom>
+          <a:solidFill>
+            <a:srgbClr val="01A88D"/>
+          </a:solidFill>
+          <a:ln/>
+        </p:spPr>
+      </p:sp>
+      <p:sp>
+        <p:nvSpPr>
+          <p:cNvPr id="36" name="Text 34"/>
+          <p:cNvSpPr/>
+          <p:nvPr/>
+        </p:nvSpPr>
+        <p:spPr>
+          <a:xfrm>
+            <a:off x="8556171" y="1691640"/>
+            <a:ext cx="310896" cy="310896"/>
+          </a:xfrm>
+          <a:prstGeom prst="rect">
+            <a:avLst/>
+          </a:prstGeom>
+          <a:noFill/>
+          <a:ln/>
+        </p:spPr>
+        <p:txBody>
+          <a:bodyPr wrap="square" rtlCol="0" anchor="ctr"/>
+          <a:lstStyle/>
+          <a:p>
+            <a:pPr algn="ctr" indent="0" marL="0">
+              <a:buNone/>
+            </a:pPr>
+            <a:r>
+              <a:rPr lang="en-US" sz="1200" b="1" dirty="0">
+                <a:solidFill>
+                  <a:srgbClr val="FFFFFF"/>
+                </a:solidFill>
+                <a:latin typeface="Trebuchet MS" pitchFamily="34" charset="0"/>
+                <a:ea typeface="Trebuchet MS" pitchFamily="34" charset="-122"/>
+                <a:cs typeface="Trebuchet MS" pitchFamily="34" charset="-120"/>
+              </a:rPr>
+              <a:t>6</a:t>
+            </a:r>
+            <a:endParaRPr lang="en-US" sz="1200" dirty="0"/>
+          </a:p>
+        </p:txBody>
+      </p:sp>
+      <p:sp>
+        <p:nvSpPr>
+          <p:cNvPr id="37" name="Text 35"/>
+          <p:cNvSpPr/>
+          <p:nvPr/>
+        </p:nvSpPr>
+        <p:spPr>
+          <a:xfrm>
+            <a:off x="8574459" y="2057400"/>
+            <a:ext cx="1126018" cy="502920"/>
+          </a:xfrm>
+          <a:prstGeom prst="rect">
+            <a:avLst/>
+          </a:prstGeom>
+          <a:noFill/>
+          <a:ln/>
+        </p:spPr>
+        <p:txBody>
+          <a:bodyPr wrap="square" rtlCol="0" anchor="t"/>
+          <a:lstStyle/>
+          <a:p>
+            <a:pPr indent="0" marL="0">
+              <a:lnSpc>
+                <a:spcPct val="95000"/>
+              </a:lnSpc>
+              <a:buNone/>
+            </a:pPr>
+            <a:r>
+              <a:rPr lang="en-US" sz="1100" b="1" dirty="0">
+                <a:solidFill>
+                  <a:srgbClr val="FFFFFF"/>
+                </a:solidFill>
+                <a:latin typeface="Calibri" pitchFamily="34" charset="0"/>
+                <a:ea typeface="Calibri" pitchFamily="34" charset="-122"/>
+                <a:cs typeface="Calibri" pitchFamily="34" charset="-120"/>
+              </a:rPr>
+              <a:t>Agent — Bedrock</a:t>
+            </a:r>
+            <a:endParaRPr lang="en-US" sz="1100" dirty="0"/>
+          </a:p>
+        </p:txBody>
+      </p:sp>
+      <p:sp>
+        <p:nvSpPr>
+          <p:cNvPr id="38" name="Text 36"/>
+          <p:cNvSpPr/>
+          <p:nvPr/>
+        </p:nvSpPr>
+        <p:spPr>
+          <a:xfrm>
+            <a:off x="8574459" y="2532888"/>
+            <a:ext cx="1126018" cy="438912"/>
+          </a:xfrm>
+          <a:prstGeom prst="rect">
+            <a:avLst/>
+          </a:prstGeom>
+          <a:noFill/>
+          <a:ln/>
+        </p:spPr>
+        <p:txBody>
+          <a:bodyPr wrap="square" rtlCol="0" anchor="t"/>
+          <a:lstStyle/>
+          <a:p>
+            <a:pPr indent="0" marL="0">
+              <a:lnSpc>
+                <a:spcPct val="98000"/>
+              </a:lnSpc>
+              <a:buNone/>
+            </a:pPr>
+            <a:r>
+              <a:rPr lang="en-US" sz="860" dirty="0">
+                <a:solidFill>
+                  <a:srgbClr val="8FA1B3"/>
+                </a:solidFill>
+                <a:latin typeface="Calibri" pitchFamily="34" charset="0"/>
+                <a:ea typeface="Calibri" pitchFamily="34" charset="-122"/>
+                <a:cs typeface="Calibri" pitchFamily="34" charset="-120"/>
+              </a:rPr>
+              <a:t>Guardrails + Strands/LangGraph</a:t>
+            </a:r>
+            <a:endParaRPr lang="en-US" sz="860" dirty="0"/>
+          </a:p>
+        </p:txBody>
+      </p:sp>
+      <p:sp>
+        <p:nvSpPr>
+          <p:cNvPr id="39" name="Text 37"/>
+          <p:cNvSpPr/>
+          <p:nvPr/>
+        </p:nvSpPr>
+        <p:spPr>
+          <a:xfrm>
+            <a:off x="9791918" y="2144268"/>
+            <a:ext cx="219456" cy="329184"/>
+          </a:xfrm>
+          <a:prstGeom prst="rect">
+            <a:avLst/>
+          </a:prstGeom>
+          <a:noFill/>
+          <a:ln/>
+        </p:spPr>
+        <p:txBody>
+          <a:bodyPr wrap="square" rtlCol="0" anchor="ctr"/>
+          <a:lstStyle/>
+          <a:p>
+            <a:pPr algn="ctr" indent="0" marL="0">
+              <a:buNone/>
+            </a:pPr>
+            <a:r>
+              <a:rPr lang="en-US" sz="1300" b="1" dirty="0">
+                <a:solidFill>
+                  <a:srgbClr val="FF9900"/>
+                </a:solidFill>
+                <a:latin typeface="Calibri" pitchFamily="34" charset="0"/>
+                <a:ea typeface="Calibri" pitchFamily="34" charset="-122"/>
+                <a:cs typeface="Calibri" pitchFamily="34" charset="-120"/>
+              </a:rPr>
+              <a:t>→</a:t>
+            </a:r>
+            <a:endParaRPr lang="en-US" sz="1300" dirty="0"/>
+          </a:p>
+        </p:txBody>
+      </p:sp>
+      <p:sp>
+        <p:nvSpPr>
+          <p:cNvPr id="40" name="Shape 38"/>
+          <p:cNvSpPr/>
+          <p:nvPr/>
+        </p:nvSpPr>
+        <p:spPr>
+          <a:xfrm>
+            <a:off x="9993086" y="1600200"/>
+            <a:ext cx="1345474" cy="1417320"/>
+          </a:xfrm>
+          <a:prstGeom prst="roundRect">
+            <a:avLst>
+              <a:gd name="adj" fmla="val 4078"/>
+            </a:avLst>
+          </a:prstGeom>
+          <a:solidFill>
+            <a:srgbClr val="2C3B4E"/>
+          </a:solidFill>
+          <a:ln w="19050">
+            <a:solidFill>
+              <a:srgbClr val="7AA116"/>
+            </a:solidFill>
+            <a:prstDash val="solid"/>
+          </a:ln>
+        </p:spPr>
+      </p:sp>
+      <p:sp>
+        <p:nvSpPr>
+          <p:cNvPr id="41" name="Shape 39"/>
+          <p:cNvSpPr/>
+          <p:nvPr/>
+        </p:nvSpPr>
+        <p:spPr>
+          <a:xfrm>
+            <a:off x="10084526" y="1691640"/>
+            <a:ext cx="310896" cy="310896"/>
+          </a:xfrm>
+          <a:prstGeom prst="ellipse">
+            <a:avLst/>
+          </a:prstGeom>
+          <a:solidFill>
+            <a:srgbClr val="7AA116"/>
+          </a:solidFill>
+          <a:ln/>
+        </p:spPr>
+      </p:sp>
+      <p:sp>
+        <p:nvSpPr>
+          <p:cNvPr id="42" name="Text 40"/>
+          <p:cNvSpPr/>
+          <p:nvPr/>
+        </p:nvSpPr>
+        <p:spPr>
+          <a:xfrm>
+            <a:off x="10084526" y="1691640"/>
+            <a:ext cx="310896" cy="310896"/>
+          </a:xfrm>
+          <a:prstGeom prst="rect">
+            <a:avLst/>
+          </a:prstGeom>
+          <a:noFill/>
+          <a:ln/>
+        </p:spPr>
+        <p:txBody>
+          <a:bodyPr wrap="square" rtlCol="0" anchor="ctr"/>
+          <a:lstStyle/>
+          <a:p>
+            <a:pPr algn="ctr" indent="0" marL="0">
+              <a:buNone/>
+            </a:pPr>
+            <a:r>
+              <a:rPr lang="en-US" sz="1200" b="1" dirty="0">
+                <a:solidFill>
+                  <a:srgbClr val="FFFFFF"/>
+                </a:solidFill>
+                <a:latin typeface="Trebuchet MS" pitchFamily="34" charset="0"/>
+                <a:ea typeface="Trebuchet MS" pitchFamily="34" charset="-122"/>
+                <a:cs typeface="Trebuchet MS" pitchFamily="34" charset="-120"/>
+              </a:rPr>
+              <a:t>7</a:t>
+            </a:r>
+            <a:endParaRPr lang="en-US" sz="1200" dirty="0"/>
+          </a:p>
+        </p:txBody>
+      </p:sp>
+      <p:sp>
+        <p:nvSpPr>
+          <p:cNvPr id="43" name="Text 41"/>
+          <p:cNvSpPr/>
+          <p:nvPr/>
+        </p:nvSpPr>
+        <p:spPr>
+          <a:xfrm>
+            <a:off x="10102814" y="2057400"/>
+            <a:ext cx="1126018" cy="502920"/>
+          </a:xfrm>
+          <a:prstGeom prst="rect">
+            <a:avLst/>
+          </a:prstGeom>
+          <a:noFill/>
+          <a:ln/>
+        </p:spPr>
+        <p:txBody>
+          <a:bodyPr wrap="square" rtlCol="0" anchor="t"/>
+          <a:lstStyle/>
+          <a:p>
+            <a:pPr indent="0" marL="0">
+              <a:lnSpc>
+                <a:spcPct val="95000"/>
+              </a:lnSpc>
+              <a:buNone/>
+            </a:pPr>
+            <a:r>
+              <a:rPr lang="en-US" sz="1100" b="1" dirty="0">
+                <a:solidFill>
+                  <a:srgbClr val="FFFFFF"/>
+                </a:solidFill>
+                <a:latin typeface="Calibri" pitchFamily="34" charset="0"/>
+                <a:ea typeface="Calibri" pitchFamily="34" charset="-122"/>
+                <a:cs typeface="Calibri" pitchFamily="34" charset="-120"/>
+              </a:rPr>
+              <a:t>Human gate → action</a:t>
+            </a:r>
+            <a:endParaRPr lang="en-US" sz="1100" dirty="0"/>
+          </a:p>
+        </p:txBody>
+      </p:sp>
+      <p:sp>
+        <p:nvSpPr>
+          <p:cNvPr id="44" name="Text 42"/>
+          <p:cNvSpPr/>
+          <p:nvPr/>
+        </p:nvSpPr>
+        <p:spPr>
+          <a:xfrm>
+            <a:off x="10102814" y="2532888"/>
+            <a:ext cx="1126018" cy="438912"/>
+          </a:xfrm>
+          <a:prstGeom prst="rect">
+            <a:avLst/>
+          </a:prstGeom>
+          <a:noFill/>
+          <a:ln/>
+        </p:spPr>
+        <p:txBody>
+          <a:bodyPr wrap="square" rtlCol="0" anchor="t"/>
+          <a:lstStyle/>
+          <a:p>
+            <a:pPr indent="0" marL="0">
+              <a:lnSpc>
+                <a:spcPct val="98000"/>
+              </a:lnSpc>
+              <a:buNone/>
+            </a:pPr>
+            <a:r>
+              <a:rPr lang="en-US" sz="860" dirty="0">
+                <a:solidFill>
+                  <a:srgbClr val="8FA1B3"/>
+                </a:solidFill>
+                <a:latin typeface="Calibri" pitchFamily="34" charset="0"/>
+                <a:ea typeface="Calibri" pitchFamily="34" charset="-122"/>
+                <a:cs typeface="Calibri" pitchFamily="34" charset="-120"/>
+              </a:rPr>
+              <a:t>Approve, then tools + data</a:t>
+            </a:r>
+            <a:endParaRPr lang="en-US" sz="860" dirty="0"/>
+          </a:p>
+        </p:txBody>
+      </p:sp>
+      <p:sp>
+        <p:nvSpPr>
+          <p:cNvPr id="45" name="Text 43"/>
+          <p:cNvSpPr/>
+          <p:nvPr/>
+        </p:nvSpPr>
+        <p:spPr>
+          <a:xfrm>
+            <a:off x="822960" y="3200400"/>
+            <a:ext cx="10515600" cy="566928"/>
+          </a:xfrm>
+          <a:prstGeom prst="rect">
+            <a:avLst/>
+          </a:prstGeom>
+          <a:noFill/>
+          <a:ln/>
+        </p:spPr>
+        <p:txBody>
+          <a:bodyPr wrap="square" rtlCol="0" anchor="t"/>
+          <a:lstStyle/>
+          <a:p>
+            <a:pPr indent="0" marL="0">
+              <a:lnSpc>
+                <a:spcPct val="105000"/>
+              </a:lnSpc>
+              <a:buNone/>
+            </a:pPr>
+            <a:r>
+              <a:rPr lang="en-US" sz="1070" b="1" dirty="0">
+                <a:solidFill>
+                  <a:srgbClr val="FF9900"/>
+                </a:solidFill>
+                <a:latin typeface="Calibri" pitchFamily="34" charset="0"/>
+                <a:ea typeface="Calibri" pitchFamily="34" charset="-122"/>
+                <a:cs typeface="Calibri" pitchFamily="34" charset="-120"/>
+              </a:rPr>
+              <a:t>Traffic flow:  </a:t>
+            </a:r>
+            <a:pPr indent="0" marL="0">
+              <a:lnSpc>
+                <a:spcPct val="105000"/>
+              </a:lnSpc>
+              <a:buNone/>
+            </a:pPr>
+            <a:r>
+              <a:rPr lang="en-US" sz="1070" dirty="0">
+                <a:solidFill>
+                  <a:srgbClr val="C9D3DC"/>
+                </a:solidFill>
+                <a:latin typeface="Calibri" pitchFamily="34" charset="0"/>
+                <a:ea typeface="Calibri" pitchFamily="34" charset="-122"/>
+                <a:cs typeface="Calibri" pitchFamily="34" charset="-120"/>
+              </a:rPr>
+              <a:t>User authenticates to the agency IdP, which Amazon Cognito federates into a signed JWT. API Gateway validates the JWT; the MCP gateway re-validates the custom:slg_role claim and issues a scoped, time-boxed token so the agent can call only the tools that role is entitled to (agent grant ∩ user entitlement). Bedrock Guardrails filter every prompt and response; the consequential action is held at the human gate. Every step writes to CloudTrail and a WORM (S3 Object Lock) audit log.</a:t>
+            </a:r>
+            <a:endParaRPr lang="en-US" sz="1070" dirty="0"/>
+          </a:p>
+        </p:txBody>
+      </p:sp>
+      <p:sp>
+        <p:nvSpPr>
+          <p:cNvPr id="46" name="Text 44"/>
+          <p:cNvSpPr/>
+          <p:nvPr/>
+        </p:nvSpPr>
+        <p:spPr>
+          <a:xfrm>
+            <a:off x="822960" y="3886200"/>
+            <a:ext cx="10515600" cy="274320"/>
+          </a:xfrm>
+          <a:prstGeom prst="rect">
+            <a:avLst/>
+          </a:prstGeom>
+          <a:noFill/>
+          <a:ln/>
+        </p:spPr>
+        <p:txBody>
+          <a:bodyPr wrap="square" rtlCol="0" anchor="ctr"/>
+          <a:lstStyle/>
+          <a:p>
+            <a:pPr indent="0" marL="0">
+              <a:buNone/>
+            </a:pPr>
+            <a:r>
+              <a:rPr lang="en-US" sz="1100" b="1" spc="150" kern="0" dirty="0">
+                <a:solidFill>
+                  <a:srgbClr val="FF9900"/>
+                </a:solidFill>
+                <a:latin typeface="Calibri" pitchFamily="34" charset="0"/>
+                <a:ea typeface="Calibri" pitchFamily="34" charset="-122"/>
+                <a:cs typeface="Calibri" pitchFamily="34" charset="-120"/>
+              </a:rPr>
+              <a:t>REGULATED-ENVIRONMENT CONTROLS</a:t>
+            </a:r>
+            <a:endParaRPr lang="en-US" sz="1100" dirty="0"/>
+          </a:p>
+        </p:txBody>
+      </p:sp>
+      <p:sp>
+        <p:nvSpPr>
+          <p:cNvPr id="47" name="Shape 45"/>
+          <p:cNvSpPr/>
+          <p:nvPr/>
+        </p:nvSpPr>
+        <p:spPr>
+          <a:xfrm>
+            <a:off x="822960" y="4206240"/>
+            <a:ext cx="2478024" cy="1325880"/>
+          </a:xfrm>
+          <a:prstGeom prst="roundRect">
+            <a:avLst>
+              <a:gd name="adj" fmla="val 4138"/>
+            </a:avLst>
+          </a:prstGeom>
+          <a:solidFill>
+            <a:srgbClr val="3A4B5F"/>
+          </a:solidFill>
+          <a:ln/>
+        </p:spPr>
+      </p:sp>
+      <p:sp>
+        <p:nvSpPr>
+          <p:cNvPr id="48" name="Text 46"/>
+          <p:cNvSpPr/>
+          <p:nvPr/>
+        </p:nvSpPr>
+        <p:spPr>
+          <a:xfrm>
+            <a:off x="950976" y="4315968"/>
+            <a:ext cx="2221992" cy="457200"/>
+          </a:xfrm>
+          <a:prstGeom prst="rect">
+            <a:avLst/>
+          </a:prstGeom>
+          <a:noFill/>
+          <a:ln/>
+        </p:spPr>
+        <p:txBody>
+          <a:bodyPr wrap="square" rtlCol="0" anchor="t"/>
+          <a:lstStyle/>
+          <a:p>
+            <a:pPr indent="0" marL="0">
+              <a:lnSpc>
+                <a:spcPct val="95000"/>
+              </a:lnSpc>
+              <a:buNone/>
+            </a:pPr>
+            <a:r>
+              <a:rPr lang="en-US" sz="1050" b="1" dirty="0">
+                <a:solidFill>
+                  <a:srgbClr val="FFFFFF"/>
+                </a:solidFill>
+                <a:latin typeface="Calibri" pitchFamily="34" charset="0"/>
+                <a:ea typeface="Calibri" pitchFamily="34" charset="-122"/>
+                <a:cs typeface="Calibri" pitchFamily="34" charset="-120"/>
+              </a:rPr>
+              <a:t>Identity &amp; least privilege</a:t>
+            </a:r>
+            <a:endParaRPr lang="en-US" sz="1050" dirty="0"/>
+          </a:p>
+        </p:txBody>
+      </p:sp>
+      <p:sp>
+        <p:nvSpPr>
+          <p:cNvPr id="49" name="Text 47"/>
+          <p:cNvSpPr/>
+          <p:nvPr/>
+        </p:nvSpPr>
+        <p:spPr>
+          <a:xfrm>
+            <a:off x="950976" y="4754880"/>
+            <a:ext cx="2221992" cy="713232"/>
+          </a:xfrm>
+          <a:prstGeom prst="rect">
+            <a:avLst/>
+          </a:prstGeom>
+          <a:noFill/>
+          <a:ln/>
+        </p:spPr>
+        <p:txBody>
+          <a:bodyPr wrap="square" rtlCol="0" anchor="t"/>
+          <a:lstStyle/>
+          <a:p>
+            <a:pPr indent="0" marL="0">
+              <a:lnSpc>
+                <a:spcPct val="100000"/>
+              </a:lnSpc>
+              <a:buNone/>
+            </a:pPr>
+            <a:r>
+              <a:rPr lang="en-US" sz="860" dirty="0">
+                <a:solidFill>
+                  <a:srgbClr val="8FA1B3"/>
+                </a:solidFill>
+                <a:latin typeface="Calibri" pitchFamily="34" charset="0"/>
+                <a:ea typeface="Calibri" pitchFamily="34" charset="-122"/>
+                <a:cs typeface="Calibri" pitchFamily="34" charset="-120"/>
+              </a:rPr>
+              <a:t>Cognito + custom:slg_role; deny-by-default MCP gateway; effective scope = agent grant ∩ user entitlement.</a:t>
+            </a:r>
+            <a:endParaRPr lang="en-US" sz="860" dirty="0"/>
+          </a:p>
+        </p:txBody>
+      </p:sp>
+      <p:sp>
+        <p:nvSpPr>
+          <p:cNvPr id="50" name="Shape 48"/>
+          <p:cNvSpPr/>
+          <p:nvPr/>
+        </p:nvSpPr>
+        <p:spPr>
+          <a:xfrm>
+            <a:off x="3502152" y="4206240"/>
+            <a:ext cx="2478024" cy="1325880"/>
+          </a:xfrm>
+          <a:prstGeom prst="roundRect">
+            <a:avLst>
+              <a:gd name="adj" fmla="val 4138"/>
+            </a:avLst>
+          </a:prstGeom>
+          <a:solidFill>
+            <a:srgbClr val="3A4B5F"/>
+          </a:solidFill>
+          <a:ln/>
+        </p:spPr>
+      </p:sp>
+      <p:sp>
+        <p:nvSpPr>
+          <p:cNvPr id="51" name="Text 49"/>
+          <p:cNvSpPr/>
+          <p:nvPr/>
+        </p:nvSpPr>
+        <p:spPr>
+          <a:xfrm>
+            <a:off x="3630168" y="4315968"/>
+            <a:ext cx="2221992" cy="457200"/>
+          </a:xfrm>
+          <a:prstGeom prst="rect">
+            <a:avLst/>
+          </a:prstGeom>
+          <a:noFill/>
+          <a:ln/>
+        </p:spPr>
+        <p:txBody>
+          <a:bodyPr wrap="square" rtlCol="0" anchor="t"/>
+          <a:lstStyle/>
+          <a:p>
+            <a:pPr indent="0" marL="0">
+              <a:lnSpc>
+                <a:spcPct val="95000"/>
+              </a:lnSpc>
+              <a:buNone/>
+            </a:pPr>
+            <a:r>
+              <a:rPr lang="en-US" sz="1050" b="1" dirty="0">
+                <a:solidFill>
+                  <a:srgbClr val="FFFFFF"/>
+                </a:solidFill>
+                <a:latin typeface="Calibri" pitchFamily="34" charset="0"/>
+                <a:ea typeface="Calibri" pitchFamily="34" charset="-122"/>
+                <a:cs typeface="Calibri" pitchFamily="34" charset="-120"/>
+              </a:rPr>
+              <a:t>Data protection</a:t>
+            </a:r>
+            <a:endParaRPr lang="en-US" sz="1050" dirty="0"/>
+          </a:p>
+        </p:txBody>
+      </p:sp>
+      <p:sp>
+        <p:nvSpPr>
+          <p:cNvPr id="52" name="Text 50"/>
+          <p:cNvSpPr/>
+          <p:nvPr/>
+        </p:nvSpPr>
+        <p:spPr>
+          <a:xfrm>
+            <a:off x="3630168" y="4754880"/>
+            <a:ext cx="2221992" cy="713232"/>
+          </a:xfrm>
+          <a:prstGeom prst="rect">
+            <a:avLst/>
+          </a:prstGeom>
+          <a:noFill/>
+          <a:ln/>
+        </p:spPr>
+        <p:txBody>
+          <a:bodyPr wrap="square" rtlCol="0" anchor="t"/>
+          <a:lstStyle/>
+          <a:p>
+            <a:pPr indent="0" marL="0">
+              <a:lnSpc>
+                <a:spcPct val="100000"/>
+              </a:lnSpc>
+              <a:buNone/>
+            </a:pPr>
+            <a:r>
+              <a:rPr lang="en-US" sz="860" dirty="0">
+                <a:solidFill>
+                  <a:srgbClr val="8FA1B3"/>
+                </a:solidFill>
+                <a:latin typeface="Calibri" pitchFamily="34" charset="0"/>
+                <a:ea typeface="Calibri" pitchFamily="34" charset="-122"/>
+                <a:cs typeface="Calibri" pitchFamily="34" charset="-120"/>
+              </a:rPr>
+              <a:t>PII masking before inference; KMS encryption; S3 Object Lock (WORM) audit; private VPC + Bedrock VPC endpoint.</a:t>
+            </a:r>
+            <a:endParaRPr lang="en-US" sz="860" dirty="0"/>
+          </a:p>
+        </p:txBody>
+      </p:sp>
+      <p:sp>
+        <p:nvSpPr>
+          <p:cNvPr id="53" name="Shape 51"/>
+          <p:cNvSpPr/>
+          <p:nvPr/>
+        </p:nvSpPr>
+        <p:spPr>
+          <a:xfrm>
+            <a:off x="6181344" y="4206240"/>
+            <a:ext cx="2478024" cy="1325880"/>
+          </a:xfrm>
+          <a:prstGeom prst="roundRect">
+            <a:avLst>
+              <a:gd name="adj" fmla="val 4138"/>
+            </a:avLst>
+          </a:prstGeom>
+          <a:solidFill>
+            <a:srgbClr val="3A4B5F"/>
+          </a:solidFill>
+          <a:ln/>
+        </p:spPr>
+      </p:sp>
+      <p:sp>
+        <p:nvSpPr>
+          <p:cNvPr id="54" name="Text 52"/>
+          <p:cNvSpPr/>
+          <p:nvPr/>
+        </p:nvSpPr>
+        <p:spPr>
+          <a:xfrm>
+            <a:off x="6309360" y="4315968"/>
+            <a:ext cx="2221992" cy="457200"/>
+          </a:xfrm>
+          <a:prstGeom prst="rect">
+            <a:avLst/>
+          </a:prstGeom>
+          <a:noFill/>
+          <a:ln/>
+        </p:spPr>
+        <p:txBody>
+          <a:bodyPr wrap="square" rtlCol="0" anchor="t"/>
+          <a:lstStyle/>
+          <a:p>
+            <a:pPr indent="0" marL="0">
+              <a:lnSpc>
+                <a:spcPct val="95000"/>
+              </a:lnSpc>
+              <a:buNone/>
+            </a:pPr>
+            <a:r>
+              <a:rPr lang="en-US" sz="1050" b="1" dirty="0">
+                <a:solidFill>
+                  <a:srgbClr val="FFFFFF"/>
+                </a:solidFill>
+                <a:latin typeface="Calibri" pitchFamily="34" charset="0"/>
+                <a:ea typeface="Calibri" pitchFamily="34" charset="-122"/>
+                <a:cs typeface="Calibri" pitchFamily="34" charset="-120"/>
+              </a:rPr>
+              <a:t>AI guardrails &amp; HITL</a:t>
+            </a:r>
+            <a:endParaRPr lang="en-US" sz="1050" dirty="0"/>
+          </a:p>
+        </p:txBody>
+      </p:sp>
+      <p:sp>
+        <p:nvSpPr>
+          <p:cNvPr id="55" name="Text 53"/>
+          <p:cNvSpPr/>
+          <p:nvPr/>
+        </p:nvSpPr>
+        <p:spPr>
+          <a:xfrm>
+            <a:off x="6309360" y="4754880"/>
+            <a:ext cx="2221992" cy="713232"/>
+          </a:xfrm>
+          <a:prstGeom prst="rect">
+            <a:avLst/>
+          </a:prstGeom>
+          <a:noFill/>
+          <a:ln/>
+        </p:spPr>
+        <p:txBody>
+          <a:bodyPr wrap="square" rtlCol="0" anchor="t"/>
+          <a:lstStyle/>
+          <a:p>
+            <a:pPr indent="0" marL="0">
+              <a:lnSpc>
+                <a:spcPct val="100000"/>
+              </a:lnSpc>
+              <a:buNone/>
+            </a:pPr>
+            <a:r>
+              <a:rPr lang="en-US" sz="860" dirty="0">
+                <a:solidFill>
+                  <a:srgbClr val="8FA1B3"/>
+                </a:solidFill>
+                <a:latin typeface="Calibri" pitchFamily="34" charset="0"/>
+                <a:ea typeface="Calibri" pitchFamily="34" charset="-122"/>
+                <a:cs typeface="Calibri" pitchFamily="34" charset="-120"/>
+              </a:rPr>
+              <a:t>Bedrock Guardrails; grounded, cited answers; consequential action withheld in code until a human approves.</a:t>
+            </a:r>
+            <a:endParaRPr lang="en-US" sz="860" dirty="0"/>
+          </a:p>
+        </p:txBody>
+      </p:sp>
+      <p:sp>
+        <p:nvSpPr>
+          <p:cNvPr id="56" name="Shape 54"/>
+          <p:cNvSpPr/>
+          <p:nvPr/>
+        </p:nvSpPr>
+        <p:spPr>
+          <a:xfrm>
+            <a:off x="8860536" y="4206240"/>
+            <a:ext cx="2478024" cy="1325880"/>
+          </a:xfrm>
+          <a:prstGeom prst="roundRect">
+            <a:avLst>
+              <a:gd name="adj" fmla="val 4138"/>
+            </a:avLst>
+          </a:prstGeom>
+          <a:solidFill>
+            <a:srgbClr val="3A4B5F"/>
+          </a:solidFill>
+          <a:ln/>
+        </p:spPr>
+      </p:sp>
+      <p:sp>
+        <p:nvSpPr>
+          <p:cNvPr id="57" name="Text 55"/>
+          <p:cNvSpPr/>
+          <p:nvPr/>
+        </p:nvSpPr>
+        <p:spPr>
+          <a:xfrm>
+            <a:off x="8988552" y="4315968"/>
+            <a:ext cx="2221992" cy="457200"/>
+          </a:xfrm>
+          <a:prstGeom prst="rect">
+            <a:avLst/>
+          </a:prstGeom>
+          <a:noFill/>
+          <a:ln/>
+        </p:spPr>
+        <p:txBody>
+          <a:bodyPr wrap="square" rtlCol="0" anchor="t"/>
+          <a:lstStyle/>
+          <a:p>
+            <a:pPr indent="0" marL="0">
+              <a:lnSpc>
+                <a:spcPct val="95000"/>
+              </a:lnSpc>
+              <a:buNone/>
+            </a:pPr>
+            <a:r>
+              <a:rPr lang="en-US" sz="1050" b="1" dirty="0">
+                <a:solidFill>
+                  <a:srgbClr val="FFFFFF"/>
+                </a:solidFill>
+                <a:latin typeface="Calibri" pitchFamily="34" charset="0"/>
+                <a:ea typeface="Calibri" pitchFamily="34" charset="-122"/>
+                <a:cs typeface="Calibri" pitchFamily="34" charset="-120"/>
+              </a:rPr>
+              <a:t>Compliance posture</a:t>
+            </a:r>
+            <a:endParaRPr lang="en-US" sz="1050" dirty="0"/>
+          </a:p>
+        </p:txBody>
+      </p:sp>
+      <p:sp>
+        <p:nvSpPr>
+          <p:cNvPr id="58" name="Text 56"/>
+          <p:cNvSpPr/>
+          <p:nvPr/>
+        </p:nvSpPr>
+        <p:spPr>
+          <a:xfrm>
+            <a:off x="8988552" y="4754880"/>
+            <a:ext cx="2221992" cy="713232"/>
+          </a:xfrm>
+          <a:prstGeom prst="rect">
+            <a:avLst/>
+          </a:prstGeom>
+          <a:noFill/>
+          <a:ln/>
+        </p:spPr>
+        <p:txBody>
+          <a:bodyPr wrap="square" rtlCol="0" anchor="t"/>
+          <a:lstStyle/>
+          <a:p>
+            <a:pPr indent="0" marL="0">
+              <a:lnSpc>
+                <a:spcPct val="100000"/>
+              </a:lnSpc>
+              <a:buNone/>
+            </a:pPr>
+            <a:r>
+              <a:rPr lang="en-US" sz="860" dirty="0">
+                <a:solidFill>
+                  <a:srgbClr val="8FA1B3"/>
+                </a:solidFill>
+                <a:latin typeface="Calibri" pitchFamily="34" charset="0"/>
+                <a:ea typeface="Calibri" pitchFamily="34" charset="-122"/>
+                <a:cs typeface="Calibri" pitchFamily="34" charset="-120"/>
+              </a:rPr>
+              <a:t>Bedrock FedRAMP High + DoD IL-4/5 in GovCloud; CJIS / IRS-1075 alignment; CloudTrail; ADA WCAG 2.1 AA.</a:t>
+            </a:r>
+            <a:endParaRPr lang="en-US" sz="860" dirty="0"/>
+          </a:p>
+        </p:txBody>
+      </p:sp>
+      <p:sp>
+        <p:nvSpPr>
+          <p:cNvPr id="59" name="Shape 57"/>
+          <p:cNvSpPr/>
+          <p:nvPr/>
+        </p:nvSpPr>
+        <p:spPr>
+          <a:xfrm>
+            <a:off x="822960" y="5715000"/>
+            <a:ext cx="10515600" cy="713232"/>
+          </a:xfrm>
+          <a:prstGeom prst="roundRect">
+            <a:avLst>
+              <a:gd name="adj" fmla="val 7692"/>
+            </a:avLst>
+          </a:prstGeom>
+          <a:solidFill>
+            <a:srgbClr val="2C3B4E"/>
+          </a:solidFill>
+          <a:ln w="12700">
+            <a:solidFill>
+              <a:srgbClr val="FF9900"/>
+            </a:solidFill>
+            <a:prstDash val="solid"/>
+          </a:ln>
+        </p:spPr>
+      </p:sp>
+      <p:sp>
+        <p:nvSpPr>
+          <p:cNvPr id="60" name="Text 58"/>
+          <p:cNvSpPr/>
+          <p:nvPr/>
+        </p:nvSpPr>
+        <p:spPr>
+          <a:xfrm>
+            <a:off x="1005840" y="5760720"/>
+            <a:ext cx="10149840" cy="621792"/>
+          </a:xfrm>
+          <a:prstGeom prst="rect">
+            <a:avLst/>
+          </a:prstGeom>
+          <a:noFill/>
+          <a:ln/>
+        </p:spPr>
+        <p:txBody>
+          <a:bodyPr wrap="square" rtlCol="0" anchor="ctr"/>
+          <a:lstStyle/>
+          <a:p>
+            <a:pPr indent="0" marL="0">
+              <a:lnSpc>
+                <a:spcPct val="102000"/>
+              </a:lnSpc>
+              <a:buNone/>
+            </a:pPr>
+            <a:r>
+              <a:rPr lang="en-US" sz="1030" b="1" dirty="0">
+                <a:solidFill>
+                  <a:srgbClr val="FF9900"/>
+                </a:solidFill>
+                <a:latin typeface="Calibri" pitchFamily="34" charset="0"/>
+                <a:ea typeface="Calibri" pitchFamily="34" charset="-122"/>
+                <a:cs typeface="Calibri" pitchFamily="34" charset="-120"/>
+              </a:rPr>
+              <a:t>Deployment models:  </a:t>
+            </a:r>
+            <a:pPr indent="0" marL="0">
+              <a:lnSpc>
+                <a:spcPct val="102000"/>
+              </a:lnSpc>
+              <a:buNone/>
+            </a:pPr>
+            <a:r>
+              <a:rPr lang="en-US" sz="1030" dirty="0">
+                <a:solidFill>
+                  <a:srgbClr val="C9D3DC"/>
+                </a:solidFill>
+                <a:latin typeface="Calibri" pitchFamily="34" charset="0"/>
+                <a:ea typeface="Calibri" pitchFamily="34" charset="-122"/>
+                <a:cs typeface="Calibri" pitchFamily="34" charset="-120"/>
+              </a:rPr>
+              <a:t>Model A (standalone) — each agent ships its own VPC, edge, Cognito, data and WORM audit stack, deployable by one CloudFormation/Terraform quickstart. Model B (+ Whole-of-Government) — adds shared canonical data, saga orchestration and a compliance event bus. GovCloud (US) uses the portable gateway path.</a:t>
+            </a:r>
+            <a:endParaRPr lang="en-US" sz="1030" dirty="0"/>
           </a:p>
         </p:txBody>
       </p:sp>
@@ -4217,7 +6555,7 @@
     <p:bg>
       <p:bgPr>
         <a:solidFill>
-          <a:srgbClr val="1E2761"/>
+          <a:srgbClr val="232F3E"/>
         </a:solidFill>
       </p:bgPr>
     </p:bg>
@@ -4243,8 +6581,8 @@
         </p:nvSpPr>
         <p:spPr>
           <a:xfrm>
-            <a:off x="731520" y="548640"/>
-            <a:ext cx="10058400" cy="365760"/>
+            <a:off x="822960" y="548640"/>
+            <a:ext cx="10515600" cy="310896"/>
           </a:xfrm>
           <a:prstGeom prst="rect">
             <a:avLst/>
@@ -4260,14 +6598,17 @@
               <a:buNone/>
             </a:pPr>
             <a:r>
-              <a:rPr lang="en-US" sz="1300" b="1" spc="200" kern="0" dirty="0">
-                <a:solidFill>
-                  <a:srgbClr val="2E8BC0"/>
-                </a:solidFill>
-              </a:rPr>
-              <a:t>THE ENGAGEMENT</a:t>
-            </a:r>
-            <a:endParaRPr lang="en-US" sz="1300" dirty="0"/>
+              <a:rPr lang="en-US" sz="1200" b="1" spc="250" kern="0" dirty="0">
+                <a:solidFill>
+                  <a:srgbClr val="FF9900"/>
+                </a:solidFill>
+                <a:latin typeface="Calibri" pitchFamily="34" charset="0"/>
+                <a:ea typeface="Calibri" pitchFamily="34" charset="-122"/>
+                <a:cs typeface="Calibri" pitchFamily="34" charset="-120"/>
+              </a:rPr>
+              <a:t>WHAT GOOD LOOKS LIKE</a:t>
+            </a:r>
+            <a:endParaRPr lang="en-US" sz="1200" dirty="0"/>
           </a:p>
         </p:txBody>
       </p:sp>
@@ -4279,34 +6620,37 @@
         </p:nvSpPr>
         <p:spPr>
           <a:xfrm>
-            <a:off x="731520" y="960120"/>
-            <a:ext cx="10972800" cy="731520"/>
-          </a:xfrm>
-          <a:prstGeom prst="rect">
-            <a:avLst/>
-          </a:prstGeom>
-          <a:noFill/>
-          <a:ln/>
-        </p:spPr>
-        <p:txBody>
-          <a:bodyPr wrap="square" rtlCol="0" anchor="ctr"/>
-          <a:lstStyle/>
-          <a:p>
-            <a:pPr indent="0" marL="0">
-              <a:buNone/>
-            </a:pPr>
-            <a:r>
-              <a:rPr lang="en-US" sz="2800" b="1" dirty="0">
+            <a:off x="822960" y="877824"/>
+            <a:ext cx="10515600" cy="777240"/>
+          </a:xfrm>
+          <a:prstGeom prst="rect">
+            <a:avLst/>
+          </a:prstGeom>
+          <a:noFill/>
+          <a:ln/>
+        </p:spPr>
+        <p:txBody>
+          <a:bodyPr wrap="square" rtlCol="0" anchor="t"/>
+          <a:lstStyle/>
+          <a:p>
+            <a:pPr indent="0" marL="0">
+              <a:lnSpc>
+                <a:spcPct val="100000"/>
+              </a:lnSpc>
+              <a:buNone/>
+            </a:pPr>
+            <a:r>
+              <a:rPr lang="en-US" sz="2500" b="1" dirty="0">
                 <a:solidFill>
                   <a:srgbClr val="FFFFFF"/>
                 </a:solidFill>
-                <a:latin typeface="Cambria" pitchFamily="34" charset="0"/>
-                <a:ea typeface="Cambria" pitchFamily="34" charset="-122"/>
-                <a:cs typeface="Cambria" pitchFamily="34" charset="-120"/>
-              </a:rPr>
-              <a:t>A credible starting point — not a science project</a:t>
-            </a:r>
-            <a:endParaRPr lang="en-US" sz="2800" dirty="0"/>
+                <a:latin typeface="Trebuchet MS" pitchFamily="34" charset="0"/>
+                <a:ea typeface="Trebuchet MS" pitchFamily="34" charset="-122"/>
+                <a:cs typeface="Trebuchet MS" pitchFamily="34" charset="-120"/>
+              </a:rPr>
+              <a:t>Deployable, defensible, and built to scale.</a:t>
+            </a:r>
+            <a:endParaRPr lang="en-US" sz="2500" dirty="0"/>
           </a:p>
         </p:txBody>
       </p:sp>
@@ -4318,25 +6662,23 @@
         </p:nvSpPr>
         <p:spPr>
           <a:xfrm>
-            <a:off x="731520" y="1920240"/>
-            <a:ext cx="5212080" cy="1600200"/>
+            <a:off x="822960" y="1828800"/>
+            <a:ext cx="3322320" cy="1600200"/>
           </a:xfrm>
           <a:prstGeom prst="roundRect">
             <a:avLst>
-              <a:gd name="adj" fmla="val 4000"/>
+              <a:gd name="adj" fmla="val 4571"/>
             </a:avLst>
           </a:prstGeom>
           <a:solidFill>
-            <a:srgbClr val="2A376E"/>
+            <a:srgbClr val="2C3B4E"/>
           </a:solidFill>
-          <a:ln/>
-          <a:effectLst>
-            <a:outerShdw sx="100000" sy="100000" kx="0" ky="0" algn="bl" rotWithShape="0" blurRad="88900" dist="38100" dir="5400000">
-              <a:srgbClr val="000000">
-                <a:alpha val="16000"/>
-              </a:srgbClr>
-            </a:outerShdw>
-          </a:effectLst>
+          <a:ln w="12700">
+            <a:solidFill>
+              <a:srgbClr val="37475A"/>
+            </a:solidFill>
+            <a:prstDash val="solid"/>
+          </a:ln>
         </p:spPr>
       </p:sp>
       <p:sp>
@@ -4347,8 +6689,8 @@
         </p:nvSpPr>
         <p:spPr>
           <a:xfrm>
-            <a:off x="1005840" y="2103120"/>
-            <a:ext cx="4663440" cy="365760"/>
+            <a:off x="1024128" y="1975104"/>
+            <a:ext cx="2956560" cy="658368"/>
           </a:xfrm>
           <a:prstGeom prst="rect">
             <a:avLst/>
@@ -4364,95 +6706,142 @@
               <a:buNone/>
             </a:pPr>
             <a:r>
-              <a:rPr lang="en-US" sz="1650" b="1" dirty="0">
+              <a:rPr lang="en-US" sz="3000" b="1" dirty="0">
+                <a:solidFill>
+                  <a:srgbClr val="FF9900"/>
+                </a:solidFill>
+                <a:latin typeface="Trebuchet MS" pitchFamily="34" charset="0"/>
+                <a:ea typeface="Trebuchet MS" pitchFamily="34" charset="-122"/>
+                <a:cs typeface="Trebuchet MS" pitchFamily="34" charset="-120"/>
+              </a:rPr>
+              <a:t>8 agents</a:t>
+            </a:r>
+            <a:endParaRPr lang="en-US" sz="3000" dirty="0"/>
+          </a:p>
+        </p:txBody>
+      </p:sp>
+      <p:sp>
+        <p:nvSpPr>
+          <p:cNvPr id="6" name="Text 4"/>
+          <p:cNvSpPr/>
+          <p:nvPr/>
+        </p:nvSpPr>
+        <p:spPr>
+          <a:xfrm>
+            <a:off x="1042416" y="2596896"/>
+            <a:ext cx="2901696" cy="566928"/>
+          </a:xfrm>
+          <a:prstGeom prst="rect">
+            <a:avLst/>
+          </a:prstGeom>
+          <a:noFill/>
+          <a:ln/>
+        </p:spPr>
+        <p:txBody>
+          <a:bodyPr wrap="square" rtlCol="0" anchor="t"/>
+          <a:lstStyle/>
+          <a:p>
+            <a:pPr indent="0" marL="0">
+              <a:lnSpc>
+                <a:spcPct val="102000"/>
+              </a:lnSpc>
+              <a:buNone/>
+            </a:pPr>
+            <a:r>
+              <a:rPr lang="en-US" sz="1100" dirty="0">
                 <a:solidFill>
                   <a:srgbClr val="FFFFFF"/>
                 </a:solidFill>
-                <a:latin typeface="Cambria" pitchFamily="34" charset="0"/>
-                <a:ea typeface="Cambria" pitchFamily="34" charset="-122"/>
-                <a:cs typeface="Cambria" pitchFamily="34" charset="-120"/>
-              </a:rPr>
-              <a:t>Reference, ready to run</a:t>
-            </a:r>
-            <a:endParaRPr lang="en-US" sz="1650" dirty="0"/>
-          </a:p>
-        </p:txBody>
-      </p:sp>
-      <p:sp>
-        <p:nvSpPr>
-          <p:cNvPr id="6" name="Text 4"/>
-          <p:cNvSpPr/>
-          <p:nvPr/>
-        </p:nvSpPr>
-        <p:spPr>
-          <a:xfrm>
-            <a:off x="1005840" y="2578608"/>
-            <a:ext cx="4709160" cy="914400"/>
-          </a:xfrm>
-          <a:prstGeom prst="rect">
-            <a:avLst/>
-          </a:prstGeom>
-          <a:noFill/>
+                <a:latin typeface="Calibri" pitchFamily="34" charset="0"/>
+                <a:ea typeface="Calibri" pitchFamily="34" charset="-122"/>
+                <a:cs typeface="Calibri" pitchFamily="34" charset="-120"/>
+              </a:rPr>
+              <a:t>each with code, IaC, containers, runbooks and a customer deck</a:t>
+            </a:r>
+            <a:endParaRPr lang="en-US" sz="1100" dirty="0"/>
+          </a:p>
+        </p:txBody>
+      </p:sp>
+      <p:sp>
+        <p:nvSpPr>
+          <p:cNvPr id="7" name="Text 5"/>
+          <p:cNvSpPr/>
+          <p:nvPr/>
+        </p:nvSpPr>
+        <p:spPr>
+          <a:xfrm>
+            <a:off x="1024128" y="3118104"/>
+            <a:ext cx="912571" cy="256032"/>
+          </a:xfrm>
+          <a:prstGeom prst="rect">
+            <a:avLst>
+              <a:gd name="adj" fmla="val 14286"/>
+            </a:avLst>
+          </a:prstGeom>
+          <a:solidFill>
+            <a:srgbClr val="37475A"/>
+          </a:solidFill>
           <a:ln/>
         </p:spPr>
         <p:txBody>
           <a:bodyPr wrap="square" rtlCol="0" anchor="ctr"/>
           <a:lstStyle/>
           <a:p>
-            <a:pPr indent="0" marL="0">
-              <a:buNone/>
-            </a:pPr>
-            <a:r>
-              <a:rPr lang="en-US" sz="1300" dirty="0">
-                <a:solidFill>
-                  <a:srgbClr val="CADCFC"/>
-                </a:solidFill>
-              </a:rPr>
-              <a:t>179 automated tests pass with no API key; deterministic demo before any AWS spend.</a:t>
-            </a:r>
-            <a:endParaRPr lang="en-US" sz="1300" dirty="0"/>
-          </a:p>
-        </p:txBody>
-      </p:sp>
-      <p:sp>
-        <p:nvSpPr>
-          <p:cNvPr id="7" name="Shape 5"/>
-          <p:cNvSpPr/>
-          <p:nvPr/>
-        </p:nvSpPr>
-        <p:spPr>
-          <a:xfrm>
-            <a:off x="6217920" y="1920240"/>
-            <a:ext cx="5212080" cy="1600200"/>
+            <a:pPr algn="ctr" indent="0" marL="0">
+              <a:buNone/>
+            </a:pPr>
+            <a:r>
+              <a:rPr lang="en-US" sz="800" b="1" spc="30" kern="0" dirty="0">
+                <a:solidFill>
+                  <a:srgbClr val="FFFFFF"/>
+                </a:solidFill>
+                <a:latin typeface="Calibri" pitchFamily="34" charset="0"/>
+                <a:ea typeface="Calibri" pitchFamily="34" charset="-122"/>
+                <a:cs typeface="Calibri" pitchFamily="34" charset="-120"/>
+              </a:rPr>
+              <a:t>REFERENCE</a:t>
+            </a:r>
+            <a:endParaRPr lang="en-US" sz="800" dirty="0"/>
+          </a:p>
+        </p:txBody>
+      </p:sp>
+      <p:sp>
+        <p:nvSpPr>
+          <p:cNvPr id="8" name="Shape 6"/>
+          <p:cNvSpPr/>
+          <p:nvPr/>
+        </p:nvSpPr>
+        <p:spPr>
+          <a:xfrm>
+            <a:off x="4419600" y="1828800"/>
+            <a:ext cx="3322320" cy="1600200"/>
           </a:xfrm>
           <a:prstGeom prst="roundRect">
             <a:avLst>
-              <a:gd name="adj" fmla="val 4000"/>
+              <a:gd name="adj" fmla="val 4571"/>
             </a:avLst>
           </a:prstGeom>
           <a:solidFill>
-            <a:srgbClr val="2A376E"/>
+            <a:srgbClr val="2C3B4E"/>
           </a:solidFill>
-          <a:ln/>
-          <a:effectLst>
-            <a:outerShdw sx="100000" sy="100000" kx="0" ky="0" algn="bl" rotWithShape="0" blurRad="88900" dist="38100" dir="5400000">
-              <a:srgbClr val="000000">
-                <a:alpha val="16000"/>
-              </a:srgbClr>
-            </a:outerShdw>
-          </a:effectLst>
-        </p:spPr>
-      </p:sp>
-      <p:sp>
-        <p:nvSpPr>
-          <p:cNvPr id="8" name="Text 6"/>
-          <p:cNvSpPr/>
-          <p:nvPr/>
-        </p:nvSpPr>
-        <p:spPr>
-          <a:xfrm>
-            <a:off x="6492240" y="2103120"/>
-            <a:ext cx="4663440" cy="365760"/>
+          <a:ln w="12700">
+            <a:solidFill>
+              <a:srgbClr val="37475A"/>
+            </a:solidFill>
+            <a:prstDash val="solid"/>
+          </a:ln>
+        </p:spPr>
+      </p:sp>
+      <p:sp>
+        <p:nvSpPr>
+          <p:cNvPr id="9" name="Text 7"/>
+          <p:cNvSpPr/>
+          <p:nvPr/>
+        </p:nvSpPr>
+        <p:spPr>
+          <a:xfrm>
+            <a:off x="4620768" y="1975104"/>
+            <a:ext cx="2956560" cy="658368"/>
           </a:xfrm>
           <a:prstGeom prst="rect">
             <a:avLst/>
@@ -4468,95 +6857,142 @@
               <a:buNone/>
             </a:pPr>
             <a:r>
-              <a:rPr lang="en-US" sz="1650" b="1" dirty="0">
+              <a:rPr lang="en-US" sz="2800" b="1" dirty="0">
+                <a:solidFill>
+                  <a:srgbClr val="FF9900"/>
+                </a:solidFill>
+                <a:latin typeface="Trebuchet MS" pitchFamily="34" charset="0"/>
+                <a:ea typeface="Trebuchet MS" pitchFamily="34" charset="-122"/>
+                <a:cs typeface="Trebuchet MS" pitchFamily="34" charset="-120"/>
+              </a:rPr>
+              <a:t>CFN + Terraform</a:t>
+            </a:r>
+            <a:endParaRPr lang="en-US" sz="2800" dirty="0"/>
+          </a:p>
+        </p:txBody>
+      </p:sp>
+      <p:sp>
+        <p:nvSpPr>
+          <p:cNvPr id="10" name="Text 8"/>
+          <p:cNvSpPr/>
+          <p:nvPr/>
+        </p:nvSpPr>
+        <p:spPr>
+          <a:xfrm>
+            <a:off x="4639056" y="2596896"/>
+            <a:ext cx="2901696" cy="566928"/>
+          </a:xfrm>
+          <a:prstGeom prst="rect">
+            <a:avLst/>
+          </a:prstGeom>
+          <a:noFill/>
+          <a:ln/>
+        </p:spPr>
+        <p:txBody>
+          <a:bodyPr wrap="square" rtlCol="0" anchor="t"/>
+          <a:lstStyle/>
+          <a:p>
+            <a:pPr indent="0" marL="0">
+              <a:lnSpc>
+                <a:spcPct val="102000"/>
+              </a:lnSpc>
+              <a:buNone/>
+            </a:pPr>
+            <a:r>
+              <a:rPr lang="en-US" sz="1100" dirty="0">
                 <a:solidFill>
                   <a:srgbClr val="FFFFFF"/>
                 </a:solidFill>
-                <a:latin typeface="Cambria" pitchFamily="34" charset="0"/>
-                <a:ea typeface="Cambria" pitchFamily="34" charset="-122"/>
-                <a:cs typeface="Cambria" pitchFamily="34" charset="-120"/>
-              </a:rPr>
-              <a:t>Infrastructure as code</a:t>
-            </a:r>
-            <a:endParaRPr lang="en-US" sz="1650" dirty="0"/>
-          </a:p>
-        </p:txBody>
-      </p:sp>
-      <p:sp>
-        <p:nvSpPr>
-          <p:cNvPr id="9" name="Text 7"/>
-          <p:cNvSpPr/>
-          <p:nvPr/>
-        </p:nvSpPr>
-        <p:spPr>
-          <a:xfrm>
-            <a:off x="6492240" y="2578608"/>
-            <a:ext cx="4709160" cy="914400"/>
-          </a:xfrm>
-          <a:prstGeom prst="rect">
-            <a:avLst/>
-          </a:prstGeom>
-          <a:noFill/>
+                <a:latin typeface="Calibri" pitchFamily="34" charset="0"/>
+                <a:ea typeface="Calibri" pitchFamily="34" charset="-122"/>
+                <a:cs typeface="Calibri" pitchFamily="34" charset="-120"/>
+              </a:rPr>
+              <a:t>full IaC parity across commercial and GovCloud</a:t>
+            </a:r>
+            <a:endParaRPr lang="en-US" sz="1100" dirty="0"/>
+          </a:p>
+        </p:txBody>
+      </p:sp>
+      <p:sp>
+        <p:nvSpPr>
+          <p:cNvPr id="11" name="Text 9"/>
+          <p:cNvSpPr/>
+          <p:nvPr/>
+        </p:nvSpPr>
+        <p:spPr>
+          <a:xfrm>
+            <a:off x="4620768" y="3118104"/>
+            <a:ext cx="1137514" cy="256032"/>
+          </a:xfrm>
+          <a:prstGeom prst="rect">
+            <a:avLst>
+              <a:gd name="adj" fmla="val 14286"/>
+            </a:avLst>
+          </a:prstGeom>
+          <a:solidFill>
+            <a:srgbClr val="37475A"/>
+          </a:solidFill>
           <a:ln/>
         </p:spPr>
         <p:txBody>
           <a:bodyPr wrap="square" rtlCol="0" anchor="ctr"/>
           <a:lstStyle/>
           <a:p>
-            <a:pPr indent="0" marL="0">
-              <a:buNone/>
-            </a:pPr>
-            <a:r>
-              <a:rPr lang="en-US" sz="1300" dirty="0">
-                <a:solidFill>
-                  <a:srgbClr val="CADCFC"/>
-                </a:solidFill>
-              </a:rPr>
-              <a:t>CloudFormation + Terraform, commercial &amp; GovCloud; WORM, audit, KMS, Guardrails.</a:t>
-            </a:r>
-            <a:endParaRPr lang="en-US" sz="1300" dirty="0"/>
-          </a:p>
-        </p:txBody>
-      </p:sp>
-      <p:sp>
-        <p:nvSpPr>
-          <p:cNvPr id="10" name="Shape 8"/>
-          <p:cNvSpPr/>
-          <p:nvPr/>
-        </p:nvSpPr>
-        <p:spPr>
-          <a:xfrm>
-            <a:off x="731520" y="3749040"/>
-            <a:ext cx="5212080" cy="1600200"/>
+            <a:pPr algn="ctr" indent="0" marL="0">
+              <a:buNone/>
+            </a:pPr>
+            <a:r>
+              <a:rPr lang="en-US" sz="800" b="1" spc="30" kern="0" dirty="0">
+                <a:solidFill>
+                  <a:srgbClr val="FFFFFF"/>
+                </a:solidFill>
+                <a:latin typeface="Calibri" pitchFamily="34" charset="0"/>
+                <a:ea typeface="Calibri" pitchFamily="34" charset="-122"/>
+                <a:cs typeface="Calibri" pitchFamily="34" charset="-120"/>
+              </a:rPr>
+              <a:t>ARCHITECTURE</a:t>
+            </a:r>
+            <a:endParaRPr lang="en-US" sz="800" dirty="0"/>
+          </a:p>
+        </p:txBody>
+      </p:sp>
+      <p:sp>
+        <p:nvSpPr>
+          <p:cNvPr id="12" name="Shape 10"/>
+          <p:cNvSpPr/>
+          <p:nvPr/>
+        </p:nvSpPr>
+        <p:spPr>
+          <a:xfrm>
+            <a:off x="8016240" y="1828800"/>
+            <a:ext cx="3322320" cy="1600200"/>
           </a:xfrm>
           <a:prstGeom prst="roundRect">
             <a:avLst>
-              <a:gd name="adj" fmla="val 4000"/>
+              <a:gd name="adj" fmla="val 4571"/>
             </a:avLst>
           </a:prstGeom>
           <a:solidFill>
-            <a:srgbClr val="2A376E"/>
+            <a:srgbClr val="2C3B4E"/>
           </a:solidFill>
-          <a:ln/>
-          <a:effectLst>
-            <a:outerShdw sx="100000" sy="100000" kx="0" ky="0" algn="bl" rotWithShape="0" blurRad="88900" dist="38100" dir="5400000">
-              <a:srgbClr val="000000">
-                <a:alpha val="16000"/>
-              </a:srgbClr>
-            </a:outerShdw>
-          </a:effectLst>
-        </p:spPr>
-      </p:sp>
-      <p:sp>
-        <p:nvSpPr>
-          <p:cNvPr id="11" name="Text 9"/>
-          <p:cNvSpPr/>
-          <p:nvPr/>
-        </p:nvSpPr>
-        <p:spPr>
-          <a:xfrm>
-            <a:off x="1005840" y="3931920"/>
-            <a:ext cx="4663440" cy="365760"/>
+          <a:ln w="12700">
+            <a:solidFill>
+              <a:srgbClr val="37475A"/>
+            </a:solidFill>
+            <a:prstDash val="solid"/>
+          </a:ln>
+        </p:spPr>
+      </p:sp>
+      <p:sp>
+        <p:nvSpPr>
+          <p:cNvPr id="13" name="Text 11"/>
+          <p:cNvSpPr/>
+          <p:nvPr/>
+        </p:nvSpPr>
+        <p:spPr>
+          <a:xfrm>
+            <a:off x="8217408" y="1975104"/>
+            <a:ext cx="2956560" cy="658368"/>
           </a:xfrm>
           <a:prstGeom prst="rect">
             <a:avLst/>
@@ -4572,95 +7008,137 @@
               <a:buNone/>
             </a:pPr>
             <a:r>
-              <a:rPr lang="en-US" sz="1650" b="1" dirty="0">
+              <a:rPr lang="en-US" sz="2800" b="1" dirty="0">
+                <a:solidFill>
+                  <a:srgbClr val="FF9900"/>
+                </a:solidFill>
+                <a:latin typeface="Trebuchet MS" pitchFamily="34" charset="0"/>
+                <a:ea typeface="Trebuchet MS" pitchFamily="34" charset="-122"/>
+                <a:cs typeface="Trebuchet MS" pitchFamily="34" charset="-120"/>
+              </a:rPr>
+              <a:t>WCAG 2.1 AA</a:t>
+            </a:r>
+            <a:endParaRPr lang="en-US" sz="2800" dirty="0"/>
+          </a:p>
+        </p:txBody>
+      </p:sp>
+      <p:sp>
+        <p:nvSpPr>
+          <p:cNvPr id="14" name="Text 12"/>
+          <p:cNvSpPr/>
+          <p:nvPr/>
+        </p:nvSpPr>
+        <p:spPr>
+          <a:xfrm>
+            <a:off x="8235696" y="2596896"/>
+            <a:ext cx="2901696" cy="566928"/>
+          </a:xfrm>
+          <a:prstGeom prst="rect">
+            <a:avLst/>
+          </a:prstGeom>
+          <a:noFill/>
+          <a:ln/>
+        </p:spPr>
+        <p:txBody>
+          <a:bodyPr wrap="square" rtlCol="0" anchor="t"/>
+          <a:lstStyle/>
+          <a:p>
+            <a:pPr indent="0" marL="0">
+              <a:lnSpc>
+                <a:spcPct val="102000"/>
+              </a:lnSpc>
+              <a:buNone/>
+            </a:pPr>
+            <a:r>
+              <a:rPr lang="en-US" sz="1100" dirty="0">
                 <a:solidFill>
                   <a:srgbClr val="FFFFFF"/>
                 </a:solidFill>
-                <a:latin typeface="Cambria" pitchFamily="34" charset="0"/>
-                <a:ea typeface="Cambria" pitchFamily="34" charset="-122"/>
-                <a:cs typeface="Cambria" pitchFamily="34" charset="-120"/>
-              </a:rPr>
-              <a:t>Field-ready collateral</a:t>
-            </a:r>
-            <a:endParaRPr lang="en-US" sz="1650" dirty="0"/>
-          </a:p>
-        </p:txBody>
-      </p:sp>
-      <p:sp>
-        <p:nvSpPr>
-          <p:cNvPr id="12" name="Text 10"/>
-          <p:cNvSpPr/>
-          <p:nvPr/>
-        </p:nvSpPr>
-        <p:spPr>
-          <a:xfrm>
-            <a:off x="1005840" y="4407408"/>
-            <a:ext cx="4709160" cy="914400"/>
-          </a:xfrm>
-          <a:prstGeom prst="rect">
-            <a:avLst/>
-          </a:prstGeom>
-          <a:noFill/>
+                <a:latin typeface="Calibri" pitchFamily="34" charset="0"/>
+                <a:ea typeface="Calibri" pitchFamily="34" charset="-122"/>
+                <a:cs typeface="Calibri" pitchFamily="34" charset="-120"/>
+              </a:rPr>
+              <a:t>accessibility tested; control mappings included</a:t>
+            </a:r>
+            <a:endParaRPr lang="en-US" sz="1100" dirty="0"/>
+          </a:p>
+        </p:txBody>
+      </p:sp>
+      <p:sp>
+        <p:nvSpPr>
+          <p:cNvPr id="15" name="Text 13"/>
+          <p:cNvSpPr/>
+          <p:nvPr/>
+        </p:nvSpPr>
+        <p:spPr>
+          <a:xfrm>
+            <a:off x="8217408" y="3118104"/>
+            <a:ext cx="987552" cy="256032"/>
+          </a:xfrm>
+          <a:prstGeom prst="rect">
+            <a:avLst>
+              <a:gd name="adj" fmla="val 14286"/>
+            </a:avLst>
+          </a:prstGeom>
+          <a:solidFill>
+            <a:srgbClr val="0E7C68"/>
+          </a:solidFill>
           <a:ln/>
         </p:spPr>
         <p:txBody>
           <a:bodyPr wrap="square" rtlCol="0" anchor="ctr"/>
           <a:lstStyle/>
           <a:p>
-            <a:pPr indent="0" marL="0">
-              <a:buNone/>
-            </a:pPr>
-            <a:r>
-              <a:rPr lang="en-US" sz="1300" dirty="0">
-                <a:solidFill>
-                  <a:srgbClr val="CADCFC"/>
-                </a:solidFill>
-              </a:rPr>
-              <a:t>Per-agent decks, ROI worksheet, compliance mappings, runbooks, SA enablement.</a:t>
-            </a:r>
-            <a:endParaRPr lang="en-US" sz="1300" dirty="0"/>
-          </a:p>
-        </p:txBody>
-      </p:sp>
-      <p:sp>
-        <p:nvSpPr>
-          <p:cNvPr id="13" name="Shape 11"/>
-          <p:cNvSpPr/>
-          <p:nvPr/>
-        </p:nvSpPr>
-        <p:spPr>
-          <a:xfrm>
-            <a:off x="6217920" y="3749040"/>
-            <a:ext cx="5212080" cy="1600200"/>
+            <a:pPr algn="ctr" indent="0" marL="0">
+              <a:buNone/>
+            </a:pPr>
+            <a:r>
+              <a:rPr lang="en-US" sz="800" b="1" spc="30" kern="0" dirty="0">
+                <a:solidFill>
+                  <a:srgbClr val="FFFFFF"/>
+                </a:solidFill>
+                <a:latin typeface="Calibri" pitchFamily="34" charset="0"/>
+                <a:ea typeface="Calibri" pitchFamily="34" charset="-122"/>
+                <a:cs typeface="Calibri" pitchFamily="34" charset="-120"/>
+              </a:rPr>
+              <a:t>COMPLIANCE</a:t>
+            </a:r>
+            <a:endParaRPr lang="en-US" sz="800" dirty="0"/>
+          </a:p>
+        </p:txBody>
+      </p:sp>
+      <p:sp>
+        <p:nvSpPr>
+          <p:cNvPr id="16" name="Shape 14"/>
+          <p:cNvSpPr/>
+          <p:nvPr/>
+        </p:nvSpPr>
+        <p:spPr>
+          <a:xfrm>
+            <a:off x="822960" y="3730752"/>
+            <a:ext cx="10515600" cy="841248"/>
           </a:xfrm>
           <a:prstGeom prst="roundRect">
             <a:avLst>
-              <a:gd name="adj" fmla="val 4000"/>
+              <a:gd name="adj" fmla="val 6522"/>
             </a:avLst>
           </a:prstGeom>
           <a:solidFill>
-            <a:srgbClr val="2A376E"/>
+            <a:srgbClr val="3A4B5F"/>
           </a:solidFill>
           <a:ln/>
-          <a:effectLst>
-            <a:outerShdw sx="100000" sy="100000" kx="0" ky="0" algn="bl" rotWithShape="0" blurRad="88900" dist="38100" dir="5400000">
-              <a:srgbClr val="000000">
-                <a:alpha val="16000"/>
-              </a:srgbClr>
-            </a:outerShdw>
-          </a:effectLst>
-        </p:spPr>
-      </p:sp>
-      <p:sp>
-        <p:nvSpPr>
-          <p:cNvPr id="14" name="Text 12"/>
-          <p:cNvSpPr/>
-          <p:nvPr/>
-        </p:nvSpPr>
-        <p:spPr>
-          <a:xfrm>
-            <a:off x="6492240" y="3931920"/>
-            <a:ext cx="4663440" cy="365760"/>
+        </p:spPr>
+      </p:sp>
+      <p:sp>
+        <p:nvSpPr>
+          <p:cNvPr id="17" name="Text 15"/>
+          <p:cNvSpPr/>
+          <p:nvPr/>
+        </p:nvSpPr>
+        <p:spPr>
+          <a:xfrm>
+            <a:off x="1005840" y="3776472"/>
+            <a:ext cx="10149840" cy="749808"/>
           </a:xfrm>
           <a:prstGeom prst="rect">
             <a:avLst/>
@@ -4673,33 +7151,53 @@
           <a:lstStyle/>
           <a:p>
             <a:pPr indent="0" marL="0">
-              <a:buNone/>
-            </a:pPr>
-            <a:r>
-              <a:rPr lang="en-US" sz="1650" b="1" dirty="0">
-                <a:solidFill>
-                  <a:srgbClr val="FFFFFF"/>
-                </a:solidFill>
-                <a:latin typeface="Cambria" pitchFamily="34" charset="0"/>
-                <a:ea typeface="Cambria" pitchFamily="34" charset="-122"/>
-                <a:cs typeface="Cambria" pitchFamily="34" charset="-120"/>
-              </a:rPr>
-              <a:t>Scoped pilot</a:t>
-            </a:r>
-            <a:endParaRPr lang="en-US" sz="1650" dirty="0"/>
-          </a:p>
-        </p:txBody>
-      </p:sp>
-      <p:sp>
-        <p:nvSpPr>
-          <p:cNvPr id="15" name="Text 13"/>
-          <p:cNvSpPr/>
-          <p:nvPr/>
-        </p:nvSpPr>
-        <p:spPr>
-          <a:xfrm>
-            <a:off x="6492240" y="4407408"/>
-            <a:ext cx="4709160" cy="914400"/>
+              <a:lnSpc>
+                <a:spcPct val="105000"/>
+              </a:lnSpc>
+              <a:buNone/>
+            </a:pPr>
+            <a:r>
+              <a:rPr lang="en-US" sz="1150" b="1" dirty="0">
+                <a:solidFill>
+                  <a:srgbClr val="FF9900"/>
+                </a:solidFill>
+                <a:latin typeface="Calibri" pitchFamily="34" charset="0"/>
+                <a:ea typeface="Calibri" pitchFamily="34" charset="-122"/>
+                <a:cs typeface="Calibri" pitchFamily="34" charset="-120"/>
+              </a:rPr>
+              <a:t>The executive case:  </a:t>
+            </a:r>
+            <a:pPr indent="0" marL="0">
+              <a:lnSpc>
+                <a:spcPct val="105000"/>
+              </a:lnSpc>
+              <a:buNone/>
+            </a:pPr>
+            <a:r>
+              <a:rPr lang="en-US" sz="1150" dirty="0">
+                <a:solidFill>
+                  <a:srgbClr val="C9D3DC"/>
+                </a:solidFill>
+                <a:latin typeface="Calibri" pitchFamily="34" charset="0"/>
+                <a:ea typeface="Calibri" pitchFamily="34" charset="-122"/>
+                <a:cs typeface="Calibri" pitchFamily="34" charset="-120"/>
+              </a:rPr>
+              <a:t>Lead with the agent that fits the room — 311 for citizen value, benefits for mission, public safety for credibility — then sell the platform underneath. Build governance once and every future agent inherits it. That is the difference between another pilot and a fundable program.</a:t>
+            </a:r>
+            <a:endParaRPr lang="en-US" sz="1150" dirty="0"/>
+          </a:p>
+        </p:txBody>
+      </p:sp>
+      <p:sp>
+        <p:nvSpPr>
+          <p:cNvPr id="18" name="Text 16"/>
+          <p:cNvSpPr/>
+          <p:nvPr/>
+        </p:nvSpPr>
+        <p:spPr>
+          <a:xfrm>
+            <a:off x="822960" y="6437376"/>
+            <a:ext cx="10515600" cy="365760"/>
           </a:xfrm>
           <a:prstGeom prst="rect">
             <a:avLst/>
@@ -4715,50 +7213,17 @@
               <a:buNone/>
             </a:pPr>
             <a:r>
-              <a:rPr lang="en-US" sz="1300" dirty="0">
-                <a:solidFill>
-                  <a:srgbClr val="CADCFC"/>
-                </a:solidFill>
-              </a:rPr>
-              <a:t>One agency, one workflow, your IdP &amp; knowledge base — producing audit evidence.</a:t>
-            </a:r>
-            <a:endParaRPr lang="en-US" sz="1300" dirty="0"/>
-          </a:p>
-        </p:txBody>
-      </p:sp>
-      <p:sp>
-        <p:nvSpPr>
-          <p:cNvPr id="16" name="Text 14"/>
-          <p:cNvSpPr/>
-          <p:nvPr/>
-        </p:nvSpPr>
-        <p:spPr>
-          <a:xfrm>
-            <a:off x="731520" y="5943600"/>
-            <a:ext cx="10698480" cy="548640"/>
-          </a:xfrm>
-          <a:prstGeom prst="rect">
-            <a:avLst/>
-          </a:prstGeom>
-          <a:noFill/>
-          <a:ln/>
-        </p:spPr>
-        <p:txBody>
-          <a:bodyPr wrap="square" rtlCol="0" anchor="ctr"/>
-          <a:lstStyle/>
-          <a:p>
-            <a:pPr indent="0" marL="0">
-              <a:buNone/>
-            </a:pPr>
-            <a:r>
-              <a:rPr lang="en-US" sz="1500" b="1" i="1" dirty="0">
-                <a:solidFill>
-                  <a:srgbClr val="FFFFFF"/>
-                </a:solidFill>
-              </a:rPr>
-              <a:t>Let's pick the first agency and workflow — and stand up an auditable pilot on your AWS account.</a:t>
-            </a:r>
-            <a:endParaRPr lang="en-US" sz="1500" dirty="0"/>
+              <a:rPr lang="en-US" sz="830" i="1" dirty="0">
+                <a:solidFill>
+                  <a:srgbClr val="8FA1B3"/>
+                </a:solidFill>
+                <a:latin typeface="Calibri" pitchFamily="34" charset="0"/>
+                <a:ea typeface="Calibri" pitchFamily="34" charset="-122"/>
+                <a:cs typeface="Calibri" pitchFamily="34" charset="-120"/>
+              </a:rPr>
+              <a:t>Figures are documented outcomes from named deployments, labeled by evidence tier. Vendor-reported vs. government/peer-reviewed sourcing in DECK-SOURCES.md. Improvement applied to a reference agency — not a guarantee.</a:t>
+            </a:r>
+            <a:endParaRPr lang="en-US" sz="830" dirty="0"/>
           </a:p>
         </p:txBody>
       </p:sp>
@@ -4813,7 +7278,7 @@
     </a:clrScheme>
     <a:fontScheme name="Office">
       <a:majorFont>
-        <a:latin typeface="Calibri Light" panose="020F0302020204030204"/>
+        <a:latin typeface="Trebuchet MS"/>
         <a:ea typeface=""/>
         <a:cs typeface=""/>
         <a:font script="Jpan" typeface="游ゴシック Light"/>
@@ -4865,7 +7330,7 @@
         <a:font script="Tfng" typeface="Ebrima"/>
       </a:majorFont>
       <a:minorFont>
-        <a:latin typeface="Calibri" panose="020F0502020204030204"/>
+        <a:latin typeface="Calibri"/>
         <a:ea typeface=""/>
         <a:cs typeface=""/>
         <a:font script="Jpan" typeface="游ゴシック"/>

--- a/decks/SLG-Agentic-AI-Suite-Executive-Overview.pptx
+++ b/decks/SLG-Agentic-AI-Suite-Executive-Overview.pptx
@@ -771,7 +771,7 @@
           <a:p>
             <a:r>
               <a:rPr lang="en-US" dirty="0"/>
-              <a:t>[~70 sec] Show the portfolio as one repeated pattern across three tiers — resident-facing, casework, operations — with a human gate everywhere and one platform underneath. The proof point for a skeptical engineer: each agent withholds its consequential action (issue, adjudicate, release, award) and that's enforced by tests, not promised in a slide.</a:t>
+              <a:t>[~70 sec] Show the portfolio as one repeated pattern across three tiers - resident-facing, casework, operations - with a human gate everywhere and one platform underneath. The proof point for a skeptical engineer: each agent withholds its consequential action (issue, adjudicate, release, award) and that's enforced by tests, not promised in a slide.</a:t>
             </a:r>
             <a:endParaRPr lang="en-US" dirty="0"/>
           </a:p>
@@ -859,7 +859,7 @@
           <a:p>
             <a:r>
               <a:rPr lang="en-US" dirty="0"/>
-              <a:t>[~75 sec] One governed backbone shared by all agents — that's the cost and security argument in a single diagram. Reuse the JWT/least-privilege/WORM walk-through. Stress full IaC parity: CloudFormation and Terraform, commercial and GovCloud. For the CISO, this is the slide that says 'a solution architect can deploy this, and it'll pass your review.'</a:t>
+              <a:t>[~75 sec] One governed backbone shared by all agents - that's the cost and security argument in a single diagram. Reuse the JWT / least-privilege / WORM walk-through. Stress full IaC parity: CloudFormation and Terraform, commercial and GovCloud. For the CISO, this is the slide that says a solution architect can deploy this and it will pass your review.</a:t>
             </a:r>
             <a:endParaRPr lang="en-US" dirty="0"/>
           </a:p>
@@ -947,7 +947,7 @@
           <a:p>
             <a:r>
               <a:rPr lang="en-US" dirty="0"/>
-              <a:t>[~60 sec] Close on deployability: every agent ships with code, infrastructure-as-code, containers, runbooks and its own customer deck; full CFN/Terraform parity; WCAG 2.1 AA tested with control mappings included. Then the sales coaching line: lead with the agent that fits the room, sell the platform underneath. The executive takeaway: build governance once, inherit it forever — that's a fundable program, not another pilot.</a:t>
+              <a:t>[~60 sec] Close on deployability: every agent ships with code, infrastructure-as-code, containers, runbooks and its own customer deck; full CFN/Terraform parity; WCAG 2.1 AA tested with control mappings included. Then the sales-coaching line: lead with the agent that fits the room, sell the platform underneath. The executive takeaway: build governance once, inherit it forever - that's a fundable program, not another pilot.</a:t>
             </a:r>
             <a:endParaRPr lang="en-US" dirty="0"/>
           </a:p>

--- a/decks/SLG-Agentic-AI-Suite-Executive-Overview.pptx
+++ b/decks/SLG-Agentic-AI-Suite-Executive-Overview.pptx
@@ -7246,28 +7246,28 @@
         <a:sysClr val="window" lastClr="FFFFFF"/>
       </a:lt1>
       <a:dk2>
-        <a:srgbClr val="44546A"/>
+        <a:srgbClr val="232F3E"/>
       </a:dk2>
       <a:lt2>
         <a:srgbClr val="E7E6E6"/>
       </a:lt2>
       <a:accent1>
-        <a:srgbClr val="4472C4"/>
+        <a:srgbClr val="FF9900"/>
       </a:accent1>
       <a:accent2>
-        <a:srgbClr val="ED7D31"/>
+        <a:srgbClr val="232F3E"/>
       </a:accent2>
       <a:accent3>
-        <a:srgbClr val="A5A5A5"/>
+        <a:srgbClr val="01A88D"/>
       </a:accent3>
       <a:accent4>
-        <a:srgbClr val="FFC000"/>
+        <a:srgbClr val="8C4FFF"/>
       </a:accent4>
       <a:accent5>
-        <a:srgbClr val="5B9BD5"/>
+        <a:srgbClr val="DD344C"/>
       </a:accent5>
       <a:accent6>
-        <a:srgbClr val="70AD47"/>
+        <a:srgbClr val="ED7100"/>
       </a:accent6>
       <a:hlink>
         <a:srgbClr val="0563C1"/>
@@ -7278,7 +7278,7 @@
     </a:clrScheme>
     <a:fontScheme name="Office">
       <a:majorFont>
-        <a:latin typeface="Trebuchet MS"/>
+        <a:latin typeface="Amazon Ember"/>
         <a:ea typeface=""/>
         <a:cs typeface=""/>
         <a:font script="Jpan" typeface="游ゴシック Light"/>
@@ -7330,7 +7330,7 @@
         <a:font script="Tfng" typeface="Ebrima"/>
       </a:majorFont>
       <a:minorFont>
-        <a:latin typeface="Calibri"/>
+        <a:latin typeface="Amazon Ember"/>
         <a:ea typeface=""/>
         <a:cs typeface=""/>
         <a:font script="Jpan" typeface="游ゴシック"/>

--- a/decks/SLG-Agentic-AI-Suite-Executive-Overview.pptx
+++ b/decks/SLG-Agentic-AI-Suite-Executive-Overview.pptx
@@ -11,6 +11,7 @@
     <p:sldId id="259" r:id="rId5"/>
     <p:sldId id="260" r:id="rId6"/>
     <p:sldId id="261" r:id="rId7"/>
+    <p:sldId id="262" r:id="rId13"/>
   </p:sldIdLst>
   <p:notesMasterIdLst>
     <p:notesMasterId r:id="rId8"/>
@@ -1589,6 +1590,40 @@
           </a:p>
         </p:txBody>
       </p:sp>
+      <p:sp>
+        <p:nvSpPr>
+          <p:cNvPr id="9" name="TextBox 8"/>
+          <p:cNvSpPr txBox="1"/>
+          <p:nvPr/>
+        </p:nvSpPr>
+        <p:spPr>
+          <a:xfrm>
+            <a:off x="365760" y="6291072"/>
+            <a:ext cx="11460175" cy="457200"/>
+          </a:xfrm>
+          <a:prstGeom prst="rect">
+            <a:avLst/>
+          </a:prstGeom>
+          <a:noFill/>
+        </p:spPr>
+        <p:txBody>
+          <a:bodyPr wrap="square" tIns="0" bIns="0">
+            <a:spAutoFit/>
+          </a:bodyPr>
+          <a:lstStyle/>
+          <a:p>
+            <a:pPr algn="l"/>
+            <a:r>
+              <a:rPr sz="800" i="1">
+                <a:solidFill>
+                  <a:srgbClr val="879296"/>
+                </a:solidFill>
+              </a:rPr>
+              <a:t>Reference accelerator — not an AWS service, not AWS-supported software, not a compliance certification, and not production-ready for regulated data without customer-specific engineering, testing, authorization, and operational ownership.</a:t>
+            </a:r>
+          </a:p>
+        </p:txBody>
+      </p:sp>
     </p:spTree>
   </p:cSld>
   <p:clrMapOvr>
@@ -7224,6 +7259,198 @@
               <a:t>Figures are documented outcomes from named deployments, labeled by evidence tier. Vendor-reported vs. government/peer-reviewed sourcing in DECK-SOURCES.md. Improvement applied to a reference agency — not a guarantee.</a:t>
             </a:r>
             <a:endParaRPr lang="en-US" sz="830" dirty="0"/>
+          </a:p>
+        </p:txBody>
+      </p:sp>
+    </p:spTree>
+  </p:cSld>
+  <p:clrMapOvr>
+    <a:masterClrMapping/>
+  </p:clrMapOvr>
+</p:sld>
+</file>
+
+<file path=ppt/slides/slide7.xml><?xml version="1.0" encoding="utf-8"?>
+<p:sld xmlns:a="http://schemas.openxmlformats.org/drawingml/2006/main" xmlns:p="http://schemas.openxmlformats.org/presentationml/2006/main" xmlns:r="http://schemas.openxmlformats.org/officeDocument/2006/relationships">
+  <p:cSld>
+    <p:spTree>
+      <p:nvGrpSpPr>
+        <p:cNvPr id="1" name=""/>
+        <p:cNvGrpSpPr/>
+        <p:nvPr/>
+      </p:nvGrpSpPr>
+      <p:grpSpPr/>
+      <p:sp>
+        <p:nvSpPr>
+          <p:cNvPr id="2" name="Rectangle 1"/>
+          <p:cNvSpPr/>
+          <p:nvPr/>
+        </p:nvSpPr>
+        <p:spPr>
+          <a:xfrm>
+            <a:off x="0" y="0"/>
+            <a:ext cx="12191695" cy="6858000"/>
+          </a:xfrm>
+          <a:prstGeom prst="rect">
+            <a:avLst/>
+          </a:prstGeom>
+          <a:solidFill>
+            <a:srgbClr val="232F3E"/>
+          </a:solidFill>
+          <a:ln>
+            <a:noFill/>
+          </a:ln>
+          <a:effectLst/>
+        </p:spPr>
+        <p:style>
+          <a:lnRef idx="1">
+            <a:schemeClr val="accent1"/>
+          </a:lnRef>
+          <a:fillRef idx="3">
+            <a:schemeClr val="accent1"/>
+          </a:fillRef>
+          <a:effectRef idx="2">
+            <a:schemeClr val="accent1"/>
+          </a:effectRef>
+          <a:fontRef idx="minor">
+            <a:schemeClr val="lt1"/>
+          </a:fontRef>
+        </p:style>
+        <p:txBody>
+          <a:bodyPr rtlCol="0" anchor="ctr"/>
+          <a:lstStyle/>
+          <a:p>
+            <a:pPr algn="ctr"/>
+          </a:p>
+        </p:txBody>
+      </p:sp>
+      <p:sp>
+        <p:nvSpPr>
+          <p:cNvPr id="3" name="Rectangle 2"/>
+          <p:cNvSpPr/>
+          <p:nvPr/>
+        </p:nvSpPr>
+        <p:spPr>
+          <a:xfrm>
+            <a:off x="822960" y="1051560"/>
+            <a:ext cx="2011680" cy="82296"/>
+          </a:xfrm>
+          <a:prstGeom prst="rect">
+            <a:avLst/>
+          </a:prstGeom>
+          <a:solidFill>
+            <a:srgbClr val="FF9900"/>
+          </a:solidFill>
+          <a:ln>
+            <a:noFill/>
+          </a:ln>
+          <a:effectLst/>
+        </p:spPr>
+        <p:style>
+          <a:lnRef idx="1">
+            <a:schemeClr val="accent1"/>
+          </a:lnRef>
+          <a:fillRef idx="3">
+            <a:schemeClr val="accent1"/>
+          </a:fillRef>
+          <a:effectRef idx="2">
+            <a:schemeClr val="accent1"/>
+          </a:effectRef>
+          <a:fontRef idx="minor">
+            <a:schemeClr val="lt1"/>
+          </a:fontRef>
+        </p:style>
+        <p:txBody>
+          <a:bodyPr rtlCol="0" anchor="ctr"/>
+          <a:lstStyle/>
+          <a:p>
+            <a:pPr algn="ctr"/>
+          </a:p>
+        </p:txBody>
+      </p:sp>
+      <p:sp>
+        <p:nvSpPr>
+          <p:cNvPr id="4" name="TextBox 3"/>
+          <p:cNvSpPr txBox="1"/>
+          <p:nvPr/>
+        </p:nvSpPr>
+        <p:spPr>
+          <a:xfrm>
+            <a:off x="822960" y="1234440"/>
+            <a:ext cx="10545775" cy="914400"/>
+          </a:xfrm>
+          <a:prstGeom prst="rect">
+            <a:avLst/>
+          </a:prstGeom>
+          <a:noFill/>
+        </p:spPr>
+        <p:txBody>
+          <a:bodyPr wrap="square">
+            <a:spAutoFit/>
+          </a:bodyPr>
+          <a:lstStyle/>
+          <a:p>
+            <a:r>
+              <a:rPr sz="3400" b="1">
+                <a:solidFill>
+                  <a:srgbClr val="FFFFFF"/>
+                </a:solidFill>
+              </a:rPr>
+              <a:t>Disclaimer &amp; Shared Responsibility</a:t>
+            </a:r>
+          </a:p>
+        </p:txBody>
+      </p:sp>
+      <p:sp>
+        <p:nvSpPr>
+          <p:cNvPr id="5" name="TextBox 4"/>
+          <p:cNvSpPr txBox="1"/>
+          <p:nvPr/>
+        </p:nvSpPr>
+        <p:spPr>
+          <a:xfrm>
+            <a:off x="822960" y="2468880"/>
+            <a:ext cx="10545775" cy="3108960"/>
+          </a:xfrm>
+          <a:prstGeom prst="rect">
+            <a:avLst/>
+          </a:prstGeom>
+          <a:noFill/>
+        </p:spPr>
+        <p:txBody>
+          <a:bodyPr wrap="square">
+            <a:spAutoFit/>
+          </a:bodyPr>
+          <a:lstStyle/>
+          <a:p>
+            <a:pPr>
+              <a:spcAft>
+                <a:spcPts val="1200"/>
+              </a:spcAft>
+            </a:pPr>
+            <a:r>
+              <a:rPr sz="1600">
+                <a:solidFill>
+                  <a:srgbClr val="D5DBDB"/>
+                </a:solidFill>
+              </a:rPr>
+              <a:t>Reference accelerator — not an AWS service, not AWS-supported software, not a compliance certification, and not production-ready for regulated data without customer-specific engineering, testing, authorization, and operational ownership.</a:t>
+            </a:r>
+          </a:p>
+          <a:p>
+            <a:pPr>
+              <a:spcAft>
+                <a:spcPts val="1200"/>
+              </a:spcAft>
+            </a:pPr>
+            <a:r>
+              <a:rPr sz="1600">
+                <a:solidFill>
+                  <a:srgbClr val="D5DBDB"/>
+                </a:solidFill>
+              </a:rPr>
+              <a:t>Built on AWS; not affiliated with or endorsed by Amazon Web Services.</a:t>
+            </a:r>
           </a:p>
         </p:txBody>
       </p:sp>
